--- a/docs/informe/Presentacion_Sazloop_Avance2.pptx
+++ b/docs/informe/Presentacion_Sazloop_Avance2.pptx
@@ -4,6 +4,9 @@
   <p:sldMasterIdLst>
     <p:sldMasterId id="2147483648" r:id="rId1"/>
   </p:sldMasterIdLst>
+  <p:notesMasterIdLst>
+    <p:notesMasterId r:id="rId14"/>
+  </p:notesMasterIdLst>
   <p:sldIdLst>
     <p:sldId id="256" r:id="rId2"/>
     <p:sldId id="257" r:id="rId3"/>
@@ -18,9 +21,6 @@
     <p:sldId id="266" r:id="rId12"/>
     <p:sldId id="267" r:id="rId13"/>
   </p:sldIdLst>
-  <p:notesMasterIdLst>
-    <p:notesMasterId r:id="rId14"/>
-  </p:notesMasterIdLst>
   <p:sldSz cx="12192000" cy="6858000"/>
   <p:notesSz cx="6858000" cy="12192000"/>
   <p:defaultTextStyle>
@@ -115,6 +115,11 @@
       </a:defRPr>
     </a:lvl9pPr>
   </p:defaultTextStyle>
+  <p:extLst>
+    <p:ext uri="{EFAFB233-063F-42B5-8137-9DF3F51BA10A}">
+      <p15:sldGuideLst xmlns:p15="http://schemas.microsoft.com/office/powerpoint/2012/main"/>
+    </p:ext>
+  </p:extLst>
 </p:presentation>
 </file>
 
@@ -140,234 +145,10 @@
           <a:chExt cx="0" cy="0"/>
         </a:xfrm>
       </p:grpSpPr>
-      <p:sp>
-        <p:nvSpPr>
-          <p:cNvPr id="2" name="Header Placeholder 1"/>
-          <p:cNvSpPr>
-            <a:spLocks noGrp="1"/>
-          </p:cNvSpPr>
-          <p:nvPr>
-            <p:ph type="hdr" sz="quarter"/>
-          </p:nvPr>
-        </p:nvSpPr>
-        <p:spPr>
-          <a:xfrm>
-            <a:off x="0" y="0"/>
-            <a:ext cx="2971800" cy="458788"/>
-          </a:xfrm>
-          <a:prstGeom prst="rect">
-            <a:avLst/>
-          </a:prstGeom>
-        </p:spPr>
-        <p:txBody>
-          <a:bodyPr vert="horz" lIns="91440" tIns="45720" rIns="91440" bIns="45720" rtlCol="0"/>
-          <a:lstStyle>
-            <a:lvl1pPr algn="l">
-              <a:defRPr sz="1200"/>
-            </a:lvl1pPr>
-          </a:lstStyle>
-          <a:p>
-            <a:endParaRPr lang="en-US"/>
-          </a:p>
-        </p:txBody>
-      </p:sp>
-      <p:sp>
-        <p:nvSpPr>
-          <p:cNvPr id="3" name="Date Placeholder 2"/>
-          <p:cNvSpPr>
-            <a:spLocks noGrp="1"/>
-          </p:cNvSpPr>
-          <p:nvPr>
-            <p:ph type="dt" idx="1"/>
-          </p:nvPr>
-        </p:nvSpPr>
-        <p:spPr>
-          <a:xfrm>
-            <a:off x="3884613" y="0"/>
-            <a:ext cx="2971800" cy="458788"/>
-          </a:xfrm>
-          <a:prstGeom prst="rect">
-            <a:avLst/>
-          </a:prstGeom>
-        </p:spPr>
-        <p:txBody>
-          <a:bodyPr vert="horz" lIns="91440" tIns="45720" rIns="91440" bIns="45720" rtlCol="0"/>
-          <a:lstStyle>
-            <a:lvl1pPr algn="r">
-              <a:defRPr sz="1200"/>
-            </a:lvl1pPr>
-          </a:lstStyle>
-          <a:p>
-            <a:fld id="{5282F153-3F37-0F45-9E97-73ACFA13230C}" type="datetimeFigureOut">
-              <a:rPr lang="en-US"/>
-              <a:t>7/23/19</a:t>
-            </a:fld>
-            <a:endParaRPr lang="en-US"/>
-          </a:p>
-        </p:txBody>
-      </p:sp>
-      <p:sp>
-        <p:nvSpPr>
-          <p:cNvPr id="4" name="Slide Image Placeholder 3"/>
-          <p:cNvSpPr>
-            <a:spLocks noGrp="1" noRot="1" noChangeAspect="1"/>
-          </p:cNvSpPr>
-          <p:nvPr>
-            <p:ph type="sldImg" idx="2"/>
-          </p:nvPr>
-        </p:nvSpPr>
-        <p:spPr>
-          <a:xfrm>
-            <a:off x="685800" y="1143000"/>
-            <a:ext cx="5486400" cy="3086100"/>
-          </a:xfrm>
-          <a:prstGeom prst="rect">
-            <a:avLst/>
-          </a:prstGeom>
-          <a:noFill/>
-          <a:ln w="12700">
-            <a:solidFill>
-              <a:prstClr val="black"/>
-            </a:solidFill>
-          </a:ln>
-        </p:spPr>
-        <p:txBody>
-          <a:bodyPr vert="horz" lIns="91440" tIns="45720" rIns="91440" bIns="45720" rtlCol="0" anchor="ctr"/>
-          <a:lstStyle/>
-          <a:p>
-            <a:endParaRPr lang="en-US"/>
-          </a:p>
-        </p:txBody>
-      </p:sp>
-      <p:sp>
-        <p:nvSpPr>
-          <p:cNvPr id="5" name="Notes Placeholder 4"/>
-          <p:cNvSpPr>
-            <a:spLocks noGrp="1"/>
-          </p:cNvSpPr>
-          <p:nvPr>
-            <p:ph type="body" sz="quarter" idx="3"/>
-          </p:nvPr>
-        </p:nvSpPr>
-        <p:spPr>
-          <a:xfrm>
-            <a:off x="685800" y="4400550"/>
-            <a:ext cx="5486400" cy="3600450"/>
-          </a:xfrm>
-          <a:prstGeom prst="rect">
-            <a:avLst/>
-          </a:prstGeom>
-        </p:spPr>
-        <p:txBody>
-          <a:bodyPr vert="horz" lIns="91440" tIns="45720" rIns="91440" bIns="45720" rtlCol="0"/>
-          <a:lstStyle/>
-          <a:p>
-            <a:pPr lvl="0"/>
-            <a:r>
-              <a:rPr lang="en-US"/>
-              <a:t>Click to edit Master text styles</a:t>
-            </a:r>
-          </a:p>
-          <a:p>
-            <a:pPr lvl="1"/>
-            <a:r>
-              <a:rPr lang="en-US"/>
-              <a:t>Second level</a:t>
-            </a:r>
-          </a:p>
-          <a:p>
-            <a:pPr lvl="2"/>
-            <a:r>
-              <a:rPr lang="en-US"/>
-              <a:t>Third level</a:t>
-            </a:r>
-          </a:p>
-          <a:p>
-            <a:pPr lvl="3"/>
-            <a:r>
-              <a:rPr lang="en-US"/>
-              <a:t>Fourth level</a:t>
-            </a:r>
-          </a:p>
-          <a:p>
-            <a:pPr lvl="4"/>
-            <a:r>
-              <a:rPr lang="en-US"/>
-              <a:t>Fifth level</a:t>
-            </a:r>
-          </a:p>
-        </p:txBody>
-      </p:sp>
-      <p:sp>
-        <p:nvSpPr>
-          <p:cNvPr id="6" name="Footer Placeholder 5"/>
-          <p:cNvSpPr>
-            <a:spLocks noGrp="1"/>
-          </p:cNvSpPr>
-          <p:nvPr>
-            <p:ph type="ftr" sz="quarter" idx="4"/>
-          </p:nvPr>
-        </p:nvSpPr>
-        <p:spPr>
-          <a:xfrm>
-            <a:off x="0" y="8685213"/>
-            <a:ext cx="2971800" cy="458787"/>
-          </a:xfrm>
-          <a:prstGeom prst="rect">
-            <a:avLst/>
-          </a:prstGeom>
-        </p:spPr>
-        <p:txBody>
-          <a:bodyPr vert="horz" lIns="91440" tIns="45720" rIns="91440" bIns="45720" rtlCol="0" anchor="b"/>
-          <a:lstStyle>
-            <a:lvl1pPr algn="l">
-              <a:defRPr sz="1200"/>
-            </a:lvl1pPr>
-          </a:lstStyle>
-          <a:p>
-            <a:endParaRPr lang="en-US"/>
-          </a:p>
-        </p:txBody>
-      </p:sp>
-      <p:sp>
-        <p:nvSpPr>
-          <p:cNvPr id="7" name="Slide Number Placeholder 6"/>
-          <p:cNvSpPr>
-            <a:spLocks noGrp="1"/>
-          </p:cNvSpPr>
-          <p:nvPr>
-            <p:ph type="sldNum" sz="quarter" idx="5"/>
-          </p:nvPr>
-        </p:nvSpPr>
-        <p:spPr>
-          <a:xfrm>
-            <a:off x="3884613" y="8685213"/>
-            <a:ext cx="2971800" cy="458787"/>
-          </a:xfrm>
-          <a:prstGeom prst="rect">
-            <a:avLst/>
-          </a:prstGeom>
-        </p:spPr>
-        <p:txBody>
-          <a:bodyPr vert="horz" lIns="91440" tIns="45720" rIns="91440" bIns="45720" rtlCol="0" anchor="b"/>
-          <a:lstStyle>
-            <a:lvl1pPr algn="r">
-              <a:defRPr sz="1200"/>
-            </a:lvl1pPr>
-          </a:lstStyle>
-          <a:p>
-            <a:fld id="{CE5E9CC1-C706-0F49-92D6-E571CC5EEA8F}" type="slidenum">
-              <a:rPr lang="en-US"/>
-              <a:t>‹#›</a:t>
-            </a:fld>
-            <a:endParaRPr lang="en-US"/>
-          </a:p>
-        </p:txBody>
-      </p:sp>
     </p:spTree>
     <p:extLst>
       <p:ext uri="{BB962C8B-B14F-4D97-AF65-F5344CB8AC3E}">
-        <p14:creationId xmlns:p14="http://schemas.microsoft.com/office/powerpoint/2010/main" val="1024086991"/>
+        <p14:creationId xmlns:p14="http://schemas.microsoft.com/office/powerpoint/2010/main" val="3229699285"/>
       </p:ext>
     </p:extLst>
   </p:cSld>
@@ -511,10 +292,6 @@
           <a:bodyPr/>
           <a:lstStyle/>
           <a:p>
-            <a:r>
-              <a:rPr lang="en-US" dirty="0"/>
-              <a:t/>
-            </a:r>
             <a:endParaRPr lang="en-US" dirty="0"/>
           </a:p>
         </p:txBody>
@@ -599,10 +376,6 @@
           <a:bodyPr/>
           <a:lstStyle/>
           <a:p>
-            <a:r>
-              <a:rPr lang="en-US" dirty="0"/>
-              <a:t/>
-            </a:r>
             <a:endParaRPr lang="en-US" dirty="0"/>
           </a:p>
         </p:txBody>
@@ -687,10 +460,6 @@
           <a:bodyPr/>
           <a:lstStyle/>
           <a:p>
-            <a:r>
-              <a:rPr lang="en-US" dirty="0"/>
-              <a:t/>
-            </a:r>
             <a:endParaRPr lang="en-US" dirty="0"/>
           </a:p>
         </p:txBody>
@@ -775,10 +544,6 @@
           <a:bodyPr/>
           <a:lstStyle/>
           <a:p>
-            <a:r>
-              <a:rPr lang="en-US" dirty="0"/>
-              <a:t/>
-            </a:r>
             <a:endParaRPr lang="en-US" dirty="0"/>
           </a:p>
         </p:txBody>
@@ -863,10 +628,6 @@
           <a:bodyPr/>
           <a:lstStyle/>
           <a:p>
-            <a:r>
-              <a:rPr lang="en-US" dirty="0"/>
-              <a:t/>
-            </a:r>
             <a:endParaRPr lang="en-US" dirty="0"/>
           </a:p>
         </p:txBody>
@@ -951,10 +712,6 @@
           <a:bodyPr/>
           <a:lstStyle/>
           <a:p>
-            <a:r>
-              <a:rPr lang="en-US" dirty="0"/>
-              <a:t/>
-            </a:r>
             <a:endParaRPr lang="en-US" dirty="0"/>
           </a:p>
         </p:txBody>
@@ -1039,10 +796,6 @@
           <a:bodyPr/>
           <a:lstStyle/>
           <a:p>
-            <a:r>
-              <a:rPr lang="en-US" dirty="0"/>
-              <a:t/>
-            </a:r>
             <a:endParaRPr lang="en-US" dirty="0"/>
           </a:p>
         </p:txBody>
@@ -1127,10 +880,6 @@
           <a:bodyPr/>
           <a:lstStyle/>
           <a:p>
-            <a:r>
-              <a:rPr lang="en-US" dirty="0"/>
-              <a:t/>
-            </a:r>
             <a:endParaRPr lang="en-US" dirty="0"/>
           </a:p>
         </p:txBody>
@@ -1215,10 +964,6 @@
           <a:bodyPr/>
           <a:lstStyle/>
           <a:p>
-            <a:r>
-              <a:rPr lang="en-US" dirty="0"/>
-              <a:t/>
-            </a:r>
             <a:endParaRPr lang="en-US" dirty="0"/>
           </a:p>
         </p:txBody>
@@ -1303,10 +1048,6 @@
           <a:bodyPr/>
           <a:lstStyle/>
           <a:p>
-            <a:r>
-              <a:rPr lang="en-US" dirty="0"/>
-              <a:t/>
-            </a:r>
             <a:endParaRPr lang="en-US" dirty="0"/>
           </a:p>
         </p:txBody>
@@ -1391,10 +1132,6 @@
           <a:bodyPr/>
           <a:lstStyle/>
           <a:p>
-            <a:r>
-              <a:rPr lang="en-US" dirty="0"/>
-              <a:t/>
-            </a:r>
             <a:endParaRPr lang="en-US" dirty="0"/>
           </a:p>
         </p:txBody>
@@ -1479,10 +1216,6 @@
           <a:bodyPr/>
           <a:lstStyle/>
           <a:p>
-            <a:r>
-              <a:rPr lang="en-US" dirty="0"/>
-              <a:t/>
-            </a:r>
             <a:endParaRPr lang="en-US" dirty="0"/>
           </a:p>
         </p:txBody>
@@ -1561,6 +1294,7 @@
         <a:solidFill>
           <a:srgbClr val="10291F"/>
         </a:solidFill>
+        <a:effectLst/>
       </p:bgPr>
     </p:bg>
     <p:spTree>
@@ -1580,9 +1314,11 @@
       <p:sp>
         <p:nvSpPr>
           <p:cNvPr id="2" name="Text 0"/>
-          <p:cNvSpPr/>
+          <p:cNvSpPr>
+            <a:spLocks noGrp="1"/>
+          </p:cNvSpPr>
           <p:nvPr>
-            <p:ph idx="100" type="title" hasCustomPrompt="1"/>
+            <p:ph type="title" idx="100" hasCustomPrompt="1"/>
           </p:nvPr>
         </p:nvSpPr>
         <p:spPr>
@@ -1599,7 +1335,7 @@
         <p:txBody>
           <a:bodyPr wrap="square" rtlCol="0"/>
           <a:lstStyle>
-            <a:lvl1pPr algn="l" indent="0" marL="0">
+            <a:lvl1pPr marL="0" indent="0" algn="l">
               <a:buNone/>
               <a:defRPr lang="en-US" sz="8800" dirty="0">
                 <a:solidFill>
@@ -1612,7 +1348,7 @@
             </a:lvl1pPr>
           </a:lstStyle>
           <a:p>
-            <a:pPr algn="l" indent="0" marL="0">
+            <a:pPr marL="0" indent="0" algn="l">
               <a:buNone/>
             </a:pPr>
             <a:r>
@@ -1646,6 +1382,7 @@
         <a:solidFill>
           <a:srgbClr val="FFFDF7"/>
         </a:solidFill>
+        <a:effectLst/>
       </p:bgPr>
     </p:bg>
     <p:spTree>
@@ -1665,9 +1402,11 @@
       <p:sp>
         <p:nvSpPr>
           <p:cNvPr id="2" name="Text 0"/>
-          <p:cNvSpPr/>
+          <p:cNvSpPr>
+            <a:spLocks noGrp="1"/>
+          </p:cNvSpPr>
           <p:nvPr>
-            <p:ph idx="100" type="title" hasCustomPrompt="1"/>
+            <p:ph type="title" idx="100" hasCustomPrompt="1"/>
           </p:nvPr>
         </p:nvSpPr>
         <p:spPr>
@@ -1684,7 +1423,7 @@
         <p:txBody>
           <a:bodyPr wrap="square" rtlCol="0"/>
           <a:lstStyle>
-            <a:lvl1pPr algn="l" indent="0" marL="0">
+            <a:lvl1pPr marL="0" indent="0" algn="l">
               <a:buNone/>
               <a:defRPr lang="en-US" sz="3200" dirty="0">
                 <a:solidFill>
@@ -1697,7 +1436,7 @@
             </a:lvl1pPr>
           </a:lstStyle>
           <a:p>
-            <a:pPr algn="l" indent="0" marL="0">
+            <a:pPr marL="0" indent="0" algn="l">
               <a:buNone/>
             </a:pPr>
             <a:r>
@@ -1736,7 +1475,7 @@
           <a:bodyPr wrap="square" lIns="0" tIns="0" rIns="0" bIns="0" rtlCol="0" anchor="ctr"/>
           <a:lstStyle/>
           <a:p>
-            <a:pPr indent="0" marL="0">
+            <a:pPr marL="0" indent="0">
               <a:buNone/>
             </a:pPr>
             <a:r>
@@ -1774,7 +1513,7 @@
           </a:prstGeom>
           <a:extLst>
             <a:ext uri="{C572A759-6A51-4108-AA02-DFA0A04FC94B}">
-              <ma14:wrappingTextBoxFlag xmlns:ma14="http://schemas.microsoft.com/office/mac/drawingml/2011/main" val="0"/>
+              <ma14:wrappingTextBoxFlag xmlns:ma14="http://schemas.microsoft.com/office/mac/drawingml/2011/main" xmlns="" val="0"/>
             </a:ext>
           </a:extLst>
         </p:spPr>
@@ -1795,8 +1534,8 @@
           <a:p>
             <a:pPr algn="r"/>
             <a:fld id="{F7021451-1387-4CA6-816F-3879F97B5CBC}" type="slidenum">
-              <a:rPr b="0" lang="en-US"/>
-              <a:t>1003</a:t>
+              <a:rPr lang="en-US" b="0"/>
+              <a:t>‹Nº›</a:t>
             </a:fld>
             <a:endParaRPr lang="en-US"/>
           </a:p>
@@ -1813,6 +1552,11 @@
 <file path=ppt/slideMasters/slideMaster1.xml><?xml version="1.0" encoding="utf-8"?>
 <p:sldMaster xmlns:a="http://schemas.openxmlformats.org/drawingml/2006/main" xmlns:r="http://schemas.openxmlformats.org/officeDocument/2006/relationships" xmlns:p="http://schemas.openxmlformats.org/presentationml/2006/main">
   <p:cSld>
+    <p:bg>
+      <p:bgRef idx="1001">
+        <a:schemeClr val="bg1"/>
+      </p:bgRef>
+    </p:bg>
     <p:spTree>
       <p:nvGrpSpPr>
         <p:cNvPr id="1" name=""/>
@@ -1847,7 +1591,7 @@
           </a:prstGeom>
           <a:extLst>
             <a:ext uri="{C572A759-6A51-4108-AA02-DFA0A04FC94B}">
-              <ma14:wrappingTextBoxFlag xmlns:ma14="http://schemas.microsoft.com/office/mac/drawingml/2011/main" val="0"/>
+              <ma14:wrappingTextBoxFlag xmlns:ma14="http://schemas.microsoft.com/office/mac/drawingml/2011/main" xmlns="" val="0"/>
             </a:ext>
           </a:extLst>
         </p:spPr>
@@ -1868,8 +1612,8 @@
           <a:p>
             <a:pPr algn="r"/>
             <a:fld id="{F7021451-1387-4CA6-816F-3879F97B5CBC}" type="slidenum">
-              <a:rPr b="0" lang="en-US"/>
-              <a:t>null</a:t>
+              <a:rPr lang="en-US" b="0"/>
+              <a:t>‹Nº›</a:t>
             </a:fld>
             <a:endParaRPr lang="en-US"/>
           </a:p>
@@ -2173,6 +1917,13 @@
           </a:solidFill>
           <a:ln/>
         </p:spPr>
+        <p:txBody>
+          <a:bodyPr/>
+          <a:lstStyle/>
+          <a:p>
+            <a:endParaRPr lang="es-PE"/>
+          </a:p>
+        </p:txBody>
       </p:sp>
       <p:sp>
         <p:nvSpPr>
@@ -2196,6 +1947,13 @@
             <a:prstDash val="solid"/>
           </a:ln>
         </p:spPr>
+        <p:txBody>
+          <a:bodyPr/>
+          <a:lstStyle/>
+          <a:p>
+            <a:endParaRPr lang="es-PE"/>
+          </a:p>
+        </p:txBody>
       </p:sp>
       <p:sp>
         <p:nvSpPr>
@@ -2219,6 +1977,13 @@
             <a:prstDash val="solid"/>
           </a:ln>
         </p:spPr>
+        <p:txBody>
+          <a:bodyPr/>
+          <a:lstStyle/>
+          <a:p>
+            <a:endParaRPr lang="es-PE"/>
+          </a:p>
+        </p:txBody>
       </p:sp>
       <p:sp>
         <p:nvSpPr>
@@ -2242,6 +2007,13 @@
             <a:prstDash val="solid"/>
           </a:ln>
         </p:spPr>
+        <p:txBody>
+          <a:bodyPr/>
+          <a:lstStyle/>
+          <a:p>
+            <a:endParaRPr lang="es-PE"/>
+          </a:p>
+        </p:txBody>
       </p:sp>
       <p:sp>
         <p:nvSpPr>
@@ -2265,6 +2037,13 @@
             <a:prstDash val="solid"/>
           </a:ln>
         </p:spPr>
+        <p:txBody>
+          <a:bodyPr/>
+          <a:lstStyle/>
+          <a:p>
+            <a:endParaRPr lang="es-PE"/>
+          </a:p>
+        </p:txBody>
       </p:sp>
       <p:sp>
         <p:nvSpPr>
@@ -2287,14 +2066,14 @@
           <a:bodyPr wrap="square" lIns="0" tIns="0" rIns="0" bIns="0" rtlCol="0" anchor="t"/>
           <a:lstStyle/>
           <a:p>
-            <a:pPr algn="l" indent="0" marL="0">
+            <a:pPr marL="0" indent="0" algn="l">
               <a:lnSpc>
                 <a:spcPct val="100000"/>
               </a:lnSpc>
               <a:buNone/>
             </a:pPr>
             <a:r>
-              <a:rPr lang="en-US" sz="1300" b="1" spc="200" kern="0" dirty="0">
+              <a:rPr lang="en-US" sz="1300" b="1" kern="0" spc="200" dirty="0">
                 <a:solidFill>
                   <a:srgbClr val="D9ECAB"/>
                 </a:solidFill>
@@ -2311,15 +2090,17 @@
       <p:sp>
         <p:nvSpPr>
           <p:cNvPr id="8" name="Text 0"/>
-          <p:cNvSpPr/>
+          <p:cNvSpPr>
+            <a:spLocks noGrp="1"/>
+          </p:cNvSpPr>
           <p:nvPr>
-            <p:ph idx="100" type="title" hasCustomPrompt="1"/>
+            <p:ph type="title" idx="100" hasCustomPrompt="1"/>
           </p:nvPr>
         </p:nvSpPr>
         <p:spPr>
           <a:xfrm>
             <a:off x="640080" y="1737360"/>
-            <a:ext cx="6766560" cy="1463040"/>
+            <a:ext cx="6166162" cy="1463040"/>
           </a:xfrm>
           <a:prstGeom prst="rect">
             <a:avLst/>
@@ -2331,7 +2112,7 @@
           <a:bodyPr wrap="square" lIns="0" tIns="0" rIns="0" bIns="0" rtlCol="0" anchor="t"/>
           <a:lstStyle/>
           <a:p>
-            <a:pPr algn="l" indent="0" marL="0">
+            <a:pPr marL="0" indent="0" algn="l">
               <a:lnSpc>
                 <a:spcPct val="100000"/>
               </a:lnSpc>
@@ -2350,23 +2131,6 @@
             </a:r>
             <a:endParaRPr lang="en-US" sz="8800" dirty="0"/>
           </a:p>
-          <a:p>
-            <a:pPr algn="l" indent="0" marL="0">
-              <a:buNone/>
-            </a:pPr>
-            <a:r>
-              <a:rPr lang="en-US" sz="8800" dirty="0">
-                <a:solidFill>
-                  <a:srgbClr val="EFAA79"/>
-                </a:solidFill>
-                <a:latin typeface="Calibri" pitchFamily="34" charset="0"/>
-                <a:ea typeface="Calibri" pitchFamily="34" charset="-122"/>
-                <a:cs typeface="Calibri" pitchFamily="34" charset="-120"/>
-              </a:rPr>
-              <a:t>.</a:t>
-            </a:r>
-            <a:endParaRPr lang="en-US" sz="8800" dirty="0"/>
-          </a:p>
         </p:txBody>
       </p:sp>
       <p:sp>
@@ -2390,7 +2154,7 @@
           <a:bodyPr wrap="square" lIns="0" tIns="0" rIns="0" bIns="0" rtlCol="0" anchor="t"/>
           <a:lstStyle/>
           <a:p>
-            <a:pPr algn="l" indent="0" marL="0">
+            <a:pPr marL="0" indent="0" algn="l">
               <a:lnSpc>
                 <a:spcPct val="100000"/>
               </a:lnSpc>
@@ -2432,7 +2196,7 @@
           <a:bodyPr wrap="square" lIns="0" tIns="0" rIns="0" bIns="0" rtlCol="0" anchor="t"/>
           <a:lstStyle/>
           <a:p>
-            <a:pPr algn="l" indent="0" marL="0">
+            <a:pPr marL="0" indent="0" algn="l">
               <a:lnSpc>
                 <a:spcPct val="100000"/>
               </a:lnSpc>
@@ -2447,7 +2211,29 @@
                 <a:ea typeface="Calibri" pitchFamily="34" charset="-122"/>
                 <a:cs typeface="Calibri" pitchFamily="34" charset="-120"/>
               </a:rPr>
-              <a:t>Plataforma web mobile-first de packs sorpresa con recojo presencial para Lima Metropolitana</a:t>
+              <a:t>Plataforma web mobile-first de packs sorpresa con recojo </a:t>
+            </a:r>
+            <a:r>
+              <a:rPr lang="en-US" sz="2000" dirty="0" err="1">
+                <a:solidFill>
+                  <a:srgbClr val="E5EDD6"/>
+                </a:solidFill>
+                <a:latin typeface="Calibri" pitchFamily="34" charset="0"/>
+                <a:ea typeface="Calibri" pitchFamily="34" charset="-122"/>
+                <a:cs typeface="Calibri" pitchFamily="34" charset="-120"/>
+              </a:rPr>
+              <a:t>presencial</a:t>
+            </a:r>
+            <a:r>
+              <a:rPr lang="en-US" sz="2000" dirty="0">
+                <a:solidFill>
+                  <a:srgbClr val="E5EDD6"/>
+                </a:solidFill>
+                <a:latin typeface="Calibri" pitchFamily="34" charset="0"/>
+                <a:ea typeface="Calibri" pitchFamily="34" charset="-122"/>
+                <a:cs typeface="Calibri" pitchFamily="34" charset="-120"/>
+              </a:rPr>
+              <a:t> para Lima Metropolitana</a:t>
             </a:r>
             <a:endParaRPr lang="en-US" sz="2000" dirty="0"/>
           </a:p>
@@ -2474,7 +2260,7 @@
           <a:bodyPr wrap="square" lIns="0" tIns="0" rIns="0" bIns="0" rtlCol="0" anchor="t"/>
           <a:lstStyle/>
           <a:p>
-            <a:pPr algn="l" indent="0" marL="0">
+            <a:pPr marL="0" indent="0" algn="l">
               <a:lnSpc>
                 <a:spcPct val="100000"/>
               </a:lnSpc>
@@ -2516,17 +2302,24 @@
           </a:solidFill>
           <a:ln/>
         </p:spPr>
+        <p:txBody>
+          <a:bodyPr/>
+          <a:lstStyle/>
+          <a:p>
+            <a:endParaRPr lang="es-PE"/>
+          </a:p>
+        </p:txBody>
       </p:sp>
       <p:pic>
         <p:nvPicPr>
-          <p:cNvPr id="13" name="Image 0" descr="Logotipo de la Universidad Tecnológica del Perú">    </p:cNvPr>
+          <p:cNvPr id="13" name="Image 0" descr="Logotipo de la Universidad Tecnológica del Perú"/>
           <p:cNvPicPr>
             <a:picLocks noChangeAspect="1"/>
           </p:cNvPicPr>
           <p:nvPr/>
         </p:nvPicPr>
         <p:blipFill>
-          <a:blip r:embed="rId1"/>
+          <a:blip r:embed="rId3"/>
           <a:stretch>
             <a:fillRect/>
           </a:stretch>
@@ -2562,7 +2355,7 @@
           <a:bodyPr wrap="square" lIns="0" tIns="0" rIns="0" bIns="0" rtlCol="0" anchor="t"/>
           <a:lstStyle/>
           <a:p>
-            <a:pPr algn="l" indent="0" marL="0">
+            <a:pPr marL="0" indent="0" algn="l">
               <a:lnSpc>
                 <a:spcPct val="100000"/>
               </a:lnSpc>
@@ -2585,7 +2378,7 @@
             <a:endParaRPr lang="en-US" sz="1300" dirty="0"/>
           </a:p>
           <a:p>
-            <a:pPr algn="l" indent="0" marL="0">
+            <a:pPr marL="0" indent="0" algn="l">
               <a:lnSpc>
                 <a:spcPct val="100000"/>
               </a:lnSpc>
@@ -2627,6 +2420,13 @@
           </a:solidFill>
           <a:ln/>
         </p:spPr>
+        <p:txBody>
+          <a:bodyPr/>
+          <a:lstStyle/>
+          <a:p>
+            <a:endParaRPr lang="es-PE"/>
+          </a:p>
+        </p:txBody>
       </p:sp>
       <p:sp>
         <p:nvSpPr>
@@ -2649,7 +2449,7 @@
           <a:bodyPr wrap="square" lIns="0" tIns="0" rIns="0" bIns="0" rtlCol="0" anchor="t"/>
           <a:lstStyle/>
           <a:p>
-            <a:pPr algn="l" indent="0" marL="0">
+            <a:pPr marL="0" indent="0" algn="l">
               <a:lnSpc>
                 <a:spcPct val="100000"/>
               </a:lnSpc>
@@ -2691,7 +2491,7 @@
           <a:bodyPr wrap="square" lIns="0" tIns="0" rIns="0" bIns="0" rtlCol="0" anchor="t"/>
           <a:lstStyle/>
           <a:p>
-            <a:pPr algn="l" indent="0" marL="0">
+            <a:pPr marL="0" indent="0" algn="l">
               <a:lnSpc>
                 <a:spcPct val="100000"/>
               </a:lnSpc>
@@ -2733,7 +2533,7 @@
           <a:bodyPr wrap="square" lIns="0" tIns="0" rIns="0" bIns="0" rtlCol="0" anchor="t"/>
           <a:lstStyle/>
           <a:p>
-            <a:pPr algn="l" indent="0" marL="0">
+            <a:pPr marL="0" indent="0" algn="l">
               <a:lnSpc>
                 <a:spcPct val="100000"/>
               </a:lnSpc>
@@ -2776,6 +2576,13 @@
             <a:prstDash val="solid"/>
           </a:ln>
         </p:spPr>
+        <p:txBody>
+          <a:bodyPr/>
+          <a:lstStyle/>
+          <a:p>
+            <a:endParaRPr lang="es-PE"/>
+          </a:p>
+        </p:txBody>
       </p:sp>
       <p:sp>
         <p:nvSpPr>
@@ -2798,7 +2605,7 @@
           <a:bodyPr wrap="square" lIns="0" tIns="0" rIns="0" bIns="0" rtlCol="0" anchor="t"/>
           <a:lstStyle/>
           <a:p>
-            <a:pPr algn="l" indent="0" marL="0">
+            <a:pPr marL="0" indent="0" algn="l">
               <a:lnSpc>
                 <a:spcPct val="100000"/>
               </a:lnSpc>
@@ -2840,7 +2647,7 @@
           <a:bodyPr wrap="square" lIns="0" tIns="0" rIns="0" bIns="0" rtlCol="0" anchor="t"/>
           <a:lstStyle/>
           <a:p>
-            <a:pPr algn="l" indent="0" marL="0">
+            <a:pPr marL="0" indent="0" algn="l">
               <a:lnSpc>
                 <a:spcPct val="100000"/>
               </a:lnSpc>
@@ -2883,6 +2690,13 @@
             <a:prstDash val="solid"/>
           </a:ln>
         </p:spPr>
+        <p:txBody>
+          <a:bodyPr/>
+          <a:lstStyle/>
+          <a:p>
+            <a:endParaRPr lang="es-PE"/>
+          </a:p>
+        </p:txBody>
       </p:sp>
       <p:sp>
         <p:nvSpPr>
@@ -2905,7 +2719,7 @@
           <a:bodyPr wrap="square" lIns="0" tIns="0" rIns="0" bIns="0" rtlCol="0" anchor="t"/>
           <a:lstStyle/>
           <a:p>
-            <a:pPr algn="l" indent="0" marL="0">
+            <a:pPr marL="0" indent="0" algn="l">
               <a:lnSpc>
                 <a:spcPct val="100000"/>
               </a:lnSpc>
@@ -2947,7 +2761,7 @@
           <a:bodyPr wrap="square" lIns="0" tIns="0" rIns="0" bIns="0" rtlCol="0" anchor="t"/>
           <a:lstStyle/>
           <a:p>
-            <a:pPr algn="l" indent="0" marL="0">
+            <a:pPr marL="0" indent="0" algn="l">
               <a:lnSpc>
                 <a:spcPct val="100000"/>
               </a:lnSpc>
@@ -2990,6 +2804,13 @@
             <a:prstDash val="solid"/>
           </a:ln>
         </p:spPr>
+        <p:txBody>
+          <a:bodyPr/>
+          <a:lstStyle/>
+          <a:p>
+            <a:endParaRPr lang="es-PE"/>
+          </a:p>
+        </p:txBody>
       </p:sp>
       <p:sp>
         <p:nvSpPr>
@@ -3012,7 +2833,7 @@
           <a:bodyPr wrap="square" lIns="0" tIns="0" rIns="0" bIns="0" rtlCol="0" anchor="t"/>
           <a:lstStyle/>
           <a:p>
-            <a:pPr algn="l" indent="0" marL="0">
+            <a:pPr marL="0" indent="0" algn="l">
               <a:lnSpc>
                 <a:spcPct val="100000"/>
               </a:lnSpc>
@@ -3054,7 +2875,7 @@
           <a:bodyPr wrap="square" lIns="0" tIns="0" rIns="0" bIns="0" rtlCol="0" anchor="t"/>
           <a:lstStyle/>
           <a:p>
-            <a:pPr algn="l" indent="0" marL="0">
+            <a:pPr marL="0" indent="0" algn="l">
               <a:lnSpc>
                 <a:spcPct val="100000"/>
               </a:lnSpc>
@@ -3097,6 +2918,13 @@
             <a:prstDash val="solid"/>
           </a:ln>
         </p:spPr>
+        <p:txBody>
+          <a:bodyPr/>
+          <a:lstStyle/>
+          <a:p>
+            <a:endParaRPr lang="es-PE"/>
+          </a:p>
+        </p:txBody>
       </p:sp>
       <p:sp>
         <p:nvSpPr>
@@ -3119,7 +2947,7 @@
           <a:bodyPr wrap="square" lIns="0" tIns="0" rIns="0" bIns="0" rtlCol="0" anchor="t"/>
           <a:lstStyle/>
           <a:p>
-            <a:pPr algn="l" indent="0" marL="0">
+            <a:pPr marL="0" indent="0" algn="l">
               <a:lnSpc>
                 <a:spcPct val="100000"/>
               </a:lnSpc>
@@ -3161,7 +2989,7 @@
           <a:bodyPr wrap="square" lIns="0" tIns="0" rIns="0" bIns="0" rtlCol="0" anchor="t"/>
           <a:lstStyle/>
           <a:p>
-            <a:pPr algn="l" indent="0" marL="0">
+            <a:pPr marL="0" indent="0" algn="l">
               <a:lnSpc>
                 <a:spcPct val="100000"/>
               </a:lnSpc>
@@ -3210,9 +3038,11 @@
       <p:sp>
         <p:nvSpPr>
           <p:cNvPr id="2" name="Text 0"/>
-          <p:cNvSpPr/>
+          <p:cNvSpPr>
+            <a:spLocks noGrp="1"/>
+          </p:cNvSpPr>
           <p:nvPr>
-            <p:ph idx="100" type="title" hasCustomPrompt="1"/>
+            <p:ph type="title" idx="100" hasCustomPrompt="1"/>
           </p:nvPr>
         </p:nvSpPr>
         <p:spPr>
@@ -3230,7 +3060,7 @@
           <a:bodyPr wrap="square" lIns="0" tIns="0" rIns="0" bIns="0" rtlCol="0" anchor="t"/>
           <a:lstStyle/>
           <a:p>
-            <a:pPr algn="l" indent="0" marL="0">
+            <a:pPr marL="0" indent="0" algn="l">
               <a:buNone/>
             </a:pPr>
             <a:r>
@@ -3269,14 +3099,14 @@
           <a:bodyPr wrap="square" lIns="0" tIns="0" rIns="0" bIns="0" rtlCol="0" anchor="t"/>
           <a:lstStyle/>
           <a:p>
-            <a:pPr algn="l" indent="0" marL="0">
+            <a:pPr marL="0" indent="0" algn="l">
               <a:lnSpc>
                 <a:spcPct val="100000"/>
               </a:lnSpc>
               <a:buNone/>
             </a:pPr>
             <a:r>
-              <a:rPr lang="en-US" sz="1200" b="1" spc="200" kern="0" dirty="0">
+              <a:rPr lang="en-US" sz="1200" b="1" kern="0" spc="200" dirty="0">
                 <a:solidFill>
                   <a:srgbClr val="315C3D"/>
                 </a:solidFill>
@@ -3311,6 +3141,13 @@
           </a:solidFill>
           <a:ln/>
         </p:spPr>
+        <p:txBody>
+          <a:bodyPr/>
+          <a:lstStyle/>
+          <a:p>
+            <a:endParaRPr lang="es-PE"/>
+          </a:p>
+        </p:txBody>
       </p:sp>
       <p:sp>
         <p:nvSpPr>
@@ -3333,7 +3170,7 @@
           <a:bodyPr wrap="square" lIns="0" tIns="0" rIns="0" bIns="0" rtlCol="0" anchor="ctr"/>
           <a:lstStyle/>
           <a:p>
-            <a:pPr algn="l" indent="0" marL="0">
+            <a:pPr marL="0" indent="0" algn="l">
               <a:lnSpc>
                 <a:spcPct val="100000"/>
               </a:lnSpc>
@@ -3375,7 +3212,7 @@
           <a:bodyPr wrap="square" lIns="0" tIns="0" rIns="0" bIns="0" rtlCol="0" anchor="t"/>
           <a:lstStyle/>
           <a:p>
-            <a:pPr algn="l" indent="0" marL="0">
+            <a:pPr marL="0" indent="0" algn="l">
               <a:lnSpc>
                 <a:spcPct val="100000"/>
               </a:lnSpc>
@@ -3417,7 +3254,7 @@
           <a:bodyPr wrap="square" lIns="0" tIns="0" rIns="0" bIns="0" rtlCol="0" anchor="t"/>
           <a:lstStyle/>
           <a:p>
-            <a:pPr algn="l" indent="0" marL="0">
+            <a:pPr marL="0" indent="0" algn="l">
               <a:lnSpc>
                 <a:spcPct val="100000"/>
               </a:lnSpc>
@@ -3459,7 +3296,7 @@
           <a:bodyPr wrap="square" lIns="0" tIns="0" rIns="0" bIns="0" rtlCol="0" anchor="t"/>
           <a:lstStyle/>
           <a:p>
-            <a:pPr algn="l" indent="0" marL="0">
+            <a:pPr marL="0" indent="0" algn="l">
               <a:lnSpc>
                 <a:spcPct val="100000"/>
               </a:lnSpc>
@@ -3501,6 +3338,13 @@
           </a:solidFill>
           <a:ln/>
         </p:spPr>
+        <p:txBody>
+          <a:bodyPr/>
+          <a:lstStyle/>
+          <a:p>
+            <a:endParaRPr lang="es-PE"/>
+          </a:p>
+        </p:txBody>
       </p:sp>
       <p:sp>
         <p:nvSpPr>
@@ -3523,7 +3367,7 @@
           <a:bodyPr wrap="square" lIns="0" tIns="0" rIns="0" bIns="0" rtlCol="0" anchor="ctr"/>
           <a:lstStyle/>
           <a:p>
-            <a:pPr algn="l" indent="0" marL="0">
+            <a:pPr marL="0" indent="0" algn="l">
               <a:lnSpc>
                 <a:spcPct val="100000"/>
               </a:lnSpc>
@@ -3565,7 +3409,7 @@
           <a:bodyPr wrap="square" lIns="0" tIns="0" rIns="0" bIns="0" rtlCol="0" anchor="t"/>
           <a:lstStyle/>
           <a:p>
-            <a:pPr algn="l" indent="0" marL="0">
+            <a:pPr marL="0" indent="0" algn="l">
               <a:lnSpc>
                 <a:spcPct val="100000"/>
               </a:lnSpc>
@@ -3607,7 +3451,7 @@
           <a:bodyPr wrap="square" lIns="0" tIns="0" rIns="0" bIns="0" rtlCol="0" anchor="t"/>
           <a:lstStyle/>
           <a:p>
-            <a:pPr algn="l" indent="0" marL="0">
+            <a:pPr marL="0" indent="0" algn="l">
               <a:lnSpc>
                 <a:spcPct val="100000"/>
               </a:lnSpc>
@@ -3630,7 +3474,7 @@
       </p:sp>
       <p:graphicFrame>
         <p:nvGraphicFramePr>
-          <p:cNvPr id="11" name="Table 0"/>
+          <p:cNvPr id="13" name="Table 0"/>
           <p:cNvGraphicFramePr>
             <a:graphicFrameLocks noGrp="1"/>
           </p:cNvGraphicFramePr>
@@ -3644,16 +3488,34 @@
         </p:nvGraphicFramePr>
         <p:xfrm>
           <a:off x="4206240" y="1554480"/>
-          <a:ext cx="7434072" cy="914400"/>
+          <a:ext cx="7434072" cy="4483608"/>
         </p:xfrm>
         <a:graphic>
           <a:graphicData uri="http://schemas.openxmlformats.org/drawingml/2006/table">
             <a:tbl>
               <a:tblPr/>
               <a:tblGrid>
-                <a:gridCol w="2423160"/>
-                <a:gridCol w="685800"/>
-                <a:gridCol w="4325112"/>
+                <a:gridCol w="2423160">
+                  <a:extLst>
+                    <a:ext uri="{9D8B030D-6E8A-4147-A177-3AD203B41FA5}">
+                      <a16:colId xmlns:a16="http://schemas.microsoft.com/office/drawing/2014/main" val="20000"/>
+                    </a:ext>
+                  </a:extLst>
+                </a:gridCol>
+                <a:gridCol w="685800">
+                  <a:extLst>
+                    <a:ext uri="{9D8B030D-6E8A-4147-A177-3AD203B41FA5}">
+                      <a16:colId xmlns:a16="http://schemas.microsoft.com/office/drawing/2014/main" val="20001"/>
+                    </a:ext>
+                  </a:extLst>
+                </a:gridCol>
+                <a:gridCol w="4325112">
+                  <a:extLst>
+                    <a:ext uri="{9D8B030D-6E8A-4147-A177-3AD203B41FA5}">
+                      <a16:colId xmlns:a16="http://schemas.microsoft.com/office/drawing/2014/main" val="20002"/>
+                    </a:ext>
+                  </a:extLst>
+                </a:gridCol>
               </a:tblGrid>
               <a:tr h="384048">
                 <a:tc>
@@ -3661,7 +3523,7 @@
                     <a:bodyPr/>
                     <a:lstStyle/>
                     <a:p>
-                      <a:pPr algn="l" indent="0" marL="0">
+                      <a:pPr marL="0" indent="0" algn="l">
                         <a:lnSpc>
                           <a:spcPct val="100000"/>
                         </a:lnSpc>
@@ -3728,7 +3590,7 @@
                     <a:bodyPr/>
                     <a:lstStyle/>
                     <a:p>
-                      <a:pPr algn="ctr" indent="0" marL="0">
+                      <a:pPr marL="0" indent="0" algn="ctr">
                         <a:lnSpc>
                           <a:spcPct val="100000"/>
                         </a:lnSpc>
@@ -3795,7 +3657,7 @@
                     <a:bodyPr/>
                     <a:lstStyle/>
                     <a:p>
-                      <a:pPr algn="l" indent="0" marL="0">
+                      <a:pPr marL="0" indent="0" algn="l">
                         <a:lnSpc>
                           <a:spcPct val="100000"/>
                         </a:lnSpc>
@@ -3857,6 +3719,11 @@
                     </a:solidFill>
                   </a:tcPr>
                 </a:tc>
+                <a:extLst>
+                  <a:ext uri="{0D108BD9-81ED-4DB2-BD59-A6C34878D82A}">
+                    <a16:rowId xmlns:a16="http://schemas.microsoft.com/office/drawing/2014/main" val="10000"/>
+                  </a:ext>
+                </a:extLst>
               </a:tr>
               <a:tr h="502920">
                 <a:tc>
@@ -3864,7 +3731,7 @@
                     <a:bodyPr/>
                     <a:lstStyle/>
                     <a:p>
-                      <a:pPr algn="l" indent="0" marL="0">
+                      <a:pPr marL="0" indent="0" algn="l">
                         <a:lnSpc>
                           <a:spcPct val="100000"/>
                         </a:lnSpc>
@@ -3928,7 +3795,7 @@
                     <a:bodyPr/>
                     <a:lstStyle/>
                     <a:p>
-                      <a:pPr algn="ctr" indent="0" marL="0">
+                      <a:pPr marL="0" indent="0" algn="ctr">
                         <a:lnSpc>
                           <a:spcPct val="100000"/>
                         </a:lnSpc>
@@ -3992,7 +3859,7 @@
                     <a:bodyPr/>
                     <a:lstStyle/>
                     <a:p>
-                      <a:pPr algn="l" indent="0" marL="0">
+                      <a:pPr marL="0" indent="0" algn="l">
                         <a:lnSpc>
                           <a:spcPct val="100000"/>
                         </a:lnSpc>
@@ -4051,6 +3918,11 @@
                     </a:lnB>
                   </a:tcPr>
                 </a:tc>
+                <a:extLst>
+                  <a:ext uri="{0D108BD9-81ED-4DB2-BD59-A6C34878D82A}">
+                    <a16:rowId xmlns:a16="http://schemas.microsoft.com/office/drawing/2014/main" val="10001"/>
+                  </a:ext>
+                </a:extLst>
               </a:tr>
               <a:tr h="502920">
                 <a:tc>
@@ -4058,7 +3930,7 @@
                     <a:bodyPr/>
                     <a:lstStyle/>
                     <a:p>
-                      <a:pPr algn="l" indent="0" marL="0">
+                      <a:pPr marL="0" indent="0" algn="l">
                         <a:lnSpc>
                           <a:spcPct val="100000"/>
                         </a:lnSpc>
@@ -4122,7 +3994,7 @@
                     <a:bodyPr/>
                     <a:lstStyle/>
                     <a:p>
-                      <a:pPr algn="ctr" indent="0" marL="0">
+                      <a:pPr marL="0" indent="0" algn="ctr">
                         <a:lnSpc>
                           <a:spcPct val="100000"/>
                         </a:lnSpc>
@@ -4186,7 +4058,7 @@
                     <a:bodyPr/>
                     <a:lstStyle/>
                     <a:p>
-                      <a:pPr algn="l" indent="0" marL="0">
+                      <a:pPr marL="0" indent="0" algn="l">
                         <a:lnSpc>
                           <a:spcPct val="100000"/>
                         </a:lnSpc>
@@ -4245,6 +4117,11 @@
                     </a:lnB>
                   </a:tcPr>
                 </a:tc>
+                <a:extLst>
+                  <a:ext uri="{0D108BD9-81ED-4DB2-BD59-A6C34878D82A}">
+                    <a16:rowId xmlns:a16="http://schemas.microsoft.com/office/drawing/2014/main" val="10002"/>
+                  </a:ext>
+                </a:extLst>
               </a:tr>
               <a:tr h="868680">
                 <a:tc>
@@ -4252,7 +4129,7 @@
                     <a:bodyPr/>
                     <a:lstStyle/>
                     <a:p>
-                      <a:pPr algn="l" indent="0" marL="0">
+                      <a:pPr marL="0" indent="0" algn="l">
                         <a:lnSpc>
                           <a:spcPct val="100000"/>
                         </a:lnSpc>
@@ -4316,7 +4193,7 @@
                     <a:bodyPr/>
                     <a:lstStyle/>
                     <a:p>
-                      <a:pPr algn="ctr" indent="0" marL="0">
+                      <a:pPr marL="0" indent="0" algn="ctr">
                         <a:lnSpc>
                           <a:spcPct val="100000"/>
                         </a:lnSpc>
@@ -4380,7 +4257,7 @@
                     <a:bodyPr/>
                     <a:lstStyle/>
                     <a:p>
-                      <a:pPr algn="l" indent="0" marL="0">
+                      <a:pPr marL="0" indent="0" algn="l">
                         <a:lnSpc>
                           <a:spcPct val="100000"/>
                         </a:lnSpc>
@@ -4439,6 +4316,11 @@
                     </a:lnB>
                   </a:tcPr>
                 </a:tc>
+                <a:extLst>
+                  <a:ext uri="{0D108BD9-81ED-4DB2-BD59-A6C34878D82A}">
+                    <a16:rowId xmlns:a16="http://schemas.microsoft.com/office/drawing/2014/main" val="10003"/>
+                  </a:ext>
+                </a:extLst>
               </a:tr>
               <a:tr h="731520">
                 <a:tc>
@@ -4446,7 +4328,7 @@
                     <a:bodyPr/>
                     <a:lstStyle/>
                     <a:p>
-                      <a:pPr algn="l" indent="0" marL="0">
+                      <a:pPr marL="0" indent="0" algn="l">
                         <a:lnSpc>
                           <a:spcPct val="100000"/>
                         </a:lnSpc>
@@ -4510,7 +4392,7 @@
                     <a:bodyPr/>
                     <a:lstStyle/>
                     <a:p>
-                      <a:pPr algn="ctr" indent="0" marL="0">
+                      <a:pPr marL="0" indent="0" algn="ctr">
                         <a:lnSpc>
                           <a:spcPct val="100000"/>
                         </a:lnSpc>
@@ -4574,7 +4456,7 @@
                     <a:bodyPr/>
                     <a:lstStyle/>
                     <a:p>
-                      <a:pPr algn="l" indent="0" marL="0">
+                      <a:pPr marL="0" indent="0" algn="l">
                         <a:lnSpc>
                           <a:spcPct val="100000"/>
                         </a:lnSpc>
@@ -4633,6 +4515,11 @@
                     </a:lnB>
                   </a:tcPr>
                 </a:tc>
+                <a:extLst>
+                  <a:ext uri="{0D108BD9-81ED-4DB2-BD59-A6C34878D82A}">
+                    <a16:rowId xmlns:a16="http://schemas.microsoft.com/office/drawing/2014/main" val="10004"/>
+                  </a:ext>
+                </a:extLst>
               </a:tr>
               <a:tr h="566928">
                 <a:tc>
@@ -4640,7 +4527,7 @@
                     <a:bodyPr/>
                     <a:lstStyle/>
                     <a:p>
-                      <a:pPr algn="l" indent="0" marL="0">
+                      <a:pPr marL="0" indent="0" algn="l">
                         <a:lnSpc>
                           <a:spcPct val="100000"/>
                         </a:lnSpc>
@@ -4704,7 +4591,7 @@
                     <a:bodyPr/>
                     <a:lstStyle/>
                     <a:p>
-                      <a:pPr algn="ctr" indent="0" marL="0">
+                      <a:pPr marL="0" indent="0" algn="ctr">
                         <a:lnSpc>
                           <a:spcPct val="100000"/>
                         </a:lnSpc>
@@ -4768,7 +4655,7 @@
                     <a:bodyPr/>
                     <a:lstStyle/>
                     <a:p>
-                      <a:pPr algn="l" indent="0" marL="0">
+                      <a:pPr marL="0" indent="0" algn="l">
                         <a:lnSpc>
                           <a:spcPct val="100000"/>
                         </a:lnSpc>
@@ -4827,6 +4714,11 @@
                     </a:lnB>
                   </a:tcPr>
                 </a:tc>
+                <a:extLst>
+                  <a:ext uri="{0D108BD9-81ED-4DB2-BD59-A6C34878D82A}">
+                    <a16:rowId xmlns:a16="http://schemas.microsoft.com/office/drawing/2014/main" val="10005"/>
+                  </a:ext>
+                </a:extLst>
               </a:tr>
               <a:tr h="502920">
                 <a:tc>
@@ -4834,7 +4726,7 @@
                     <a:bodyPr/>
                     <a:lstStyle/>
                     <a:p>
-                      <a:pPr algn="l" indent="0" marL="0">
+                      <a:pPr marL="0" indent="0" algn="l">
                         <a:lnSpc>
                           <a:spcPct val="100000"/>
                         </a:lnSpc>
@@ -4898,7 +4790,7 @@
                     <a:bodyPr/>
                     <a:lstStyle/>
                     <a:p>
-                      <a:pPr algn="ctr" indent="0" marL="0">
+                      <a:pPr marL="0" indent="0" algn="ctr">
                         <a:lnSpc>
                           <a:spcPct val="100000"/>
                         </a:lnSpc>
@@ -4962,7 +4854,7 @@
                     <a:bodyPr/>
                     <a:lstStyle/>
                     <a:p>
-                      <a:pPr algn="l" indent="0" marL="0">
+                      <a:pPr marL="0" indent="0" algn="l">
                         <a:lnSpc>
                           <a:spcPct val="100000"/>
                         </a:lnSpc>
@@ -5021,6 +4913,11 @@
                     </a:lnB>
                   </a:tcPr>
                 </a:tc>
+                <a:extLst>
+                  <a:ext uri="{0D108BD9-81ED-4DB2-BD59-A6C34878D82A}">
+                    <a16:rowId xmlns:a16="http://schemas.microsoft.com/office/drawing/2014/main" val="10006"/>
+                  </a:ext>
+                </a:extLst>
               </a:tr>
               <a:tr h="365760">
                 <a:tc>
@@ -5028,7 +4925,7 @@
                     <a:bodyPr/>
                     <a:lstStyle/>
                     <a:p>
-                      <a:pPr algn="l" indent="0" marL="0">
+                      <a:pPr marL="0" indent="0" algn="l">
                         <a:lnSpc>
                           <a:spcPct val="100000"/>
                         </a:lnSpc>
@@ -5095,7 +4992,7 @@
                     <a:bodyPr/>
                     <a:lstStyle/>
                     <a:p>
-                      <a:pPr algn="ctr" indent="0" marL="0">
+                      <a:pPr marL="0" indent="0" algn="ctr">
                         <a:lnSpc>
                           <a:spcPct val="100000"/>
                         </a:lnSpc>
@@ -5162,7 +5059,7 @@
                     <a:bodyPr/>
                     <a:lstStyle/>
                     <a:p>
-                      <a:pPr algn="l" indent="0" marL="0">
+                      <a:pPr marL="0" indent="0" algn="l">
                         <a:lnSpc>
                           <a:spcPct val="100000"/>
                         </a:lnSpc>
@@ -5213,6 +5110,11 @@
                     </a:solidFill>
                   </a:tcPr>
                 </a:tc>
+                <a:extLst>
+                  <a:ext uri="{0D108BD9-81ED-4DB2-BD59-A6C34878D82A}">
+                    <a16:rowId xmlns:a16="http://schemas.microsoft.com/office/drawing/2014/main" val="10007"/>
+                  </a:ext>
+                </a:extLst>
               </a:tr>
             </a:tbl>
           </a:graphicData>
@@ -5238,7 +5140,7 @@
           </a:prstGeom>
           <a:extLst>
             <a:ext uri="{C572A759-6A51-4108-AA02-DFA0A04FC94B}">
-              <ma14:wrappingTextBoxFlag xmlns:ma14="http://schemas.microsoft.com/office/mac/drawingml/2011/main" val="0"/>
+              <ma14:wrappingTextBoxFlag xmlns:ma14="http://schemas.microsoft.com/office/mac/drawingml/2011/main" xmlns="" val="0"/>
             </a:ext>
           </a:extLst>
         </p:spPr>
@@ -5259,7 +5161,7 @@
           <a:p>
             <a:pPr algn="r"/>
             <a:fld id="{F7021451-1387-4CA6-816F-3879F97B5CBC}" type="slidenum">
-              <a:rPr b="0" lang="en-US"/>
+              <a:rPr lang="en-US" b="0"/>
               <a:t>10</a:t>
             </a:fld>
             <a:endParaRPr lang="en-US"/>
@@ -5294,9 +5196,11 @@
       <p:sp>
         <p:nvSpPr>
           <p:cNvPr id="2" name="Text 0"/>
-          <p:cNvSpPr/>
+          <p:cNvSpPr>
+            <a:spLocks noGrp="1"/>
+          </p:cNvSpPr>
           <p:nvPr>
-            <p:ph idx="100" type="title" hasCustomPrompt="1"/>
+            <p:ph type="title" idx="100" hasCustomPrompt="1"/>
           </p:nvPr>
         </p:nvSpPr>
         <p:spPr>
@@ -5314,7 +5218,7 @@
           <a:bodyPr wrap="square" lIns="0" tIns="0" rIns="0" bIns="0" rtlCol="0" anchor="t"/>
           <a:lstStyle/>
           <a:p>
-            <a:pPr algn="l" indent="0" marL="0">
+            <a:pPr marL="0" indent="0" algn="l">
               <a:buNone/>
             </a:pPr>
             <a:r>
@@ -5353,14 +5257,14 @@
           <a:bodyPr wrap="square" lIns="0" tIns="0" rIns="0" bIns="0" rtlCol="0" anchor="t"/>
           <a:lstStyle/>
           <a:p>
-            <a:pPr algn="l" indent="0" marL="0">
+            <a:pPr marL="0" indent="0" algn="l">
               <a:lnSpc>
                 <a:spcPct val="100000"/>
               </a:lnSpc>
               <a:buNone/>
             </a:pPr>
             <a:r>
-              <a:rPr lang="en-US" sz="1200" b="1" spc="200" kern="0" dirty="0">
+              <a:rPr lang="en-US" sz="1200" b="1" kern="0" spc="200" dirty="0">
                 <a:solidFill>
                   <a:srgbClr val="315C3D"/>
                 </a:solidFill>
@@ -5376,14 +5280,14 @@
       </p:sp>
       <p:pic>
         <p:nvPicPr>
-          <p:cNvPr id="4" name="Image 0" descr="Inicio de sesión del consumidor">    </p:cNvPr>
+          <p:cNvPr id="4" name="Image 0" descr="Inicio de sesión del consumidor"/>
           <p:cNvPicPr>
             <a:picLocks noChangeAspect="1"/>
           </p:cNvPicPr>
           <p:nvPr/>
         </p:nvPicPr>
         <p:blipFill>
-          <a:blip r:embed="rId1"/>
+          <a:blip r:embed="rId3"/>
           <a:stretch>
             <a:fillRect/>
           </a:stretch>
@@ -5419,6 +5323,13 @@
             <a:prstDash val="solid"/>
           </a:ln>
         </p:spPr>
+        <p:txBody>
+          <a:bodyPr/>
+          <a:lstStyle/>
+          <a:p>
+            <a:endParaRPr lang="es-PE"/>
+          </a:p>
+        </p:txBody>
       </p:sp>
       <p:sp>
         <p:nvSpPr>
@@ -5439,6 +5350,13 @@
           </a:solidFill>
           <a:ln/>
         </p:spPr>
+        <p:txBody>
+          <a:bodyPr/>
+          <a:lstStyle/>
+          <a:p>
+            <a:endParaRPr lang="es-PE"/>
+          </a:p>
+        </p:txBody>
       </p:sp>
       <p:sp>
         <p:nvSpPr>
@@ -5461,7 +5379,7 @@
           <a:bodyPr wrap="square" lIns="0" tIns="0" rIns="0" bIns="0" rtlCol="0" anchor="ctr"/>
           <a:lstStyle/>
           <a:p>
-            <a:pPr algn="ctr" indent="0" marL="0">
+            <a:pPr marL="0" indent="0" algn="ctr">
               <a:lnSpc>
                 <a:spcPct val="100000"/>
               </a:lnSpc>
@@ -5503,7 +5421,7 @@
           <a:bodyPr wrap="square" lIns="0" tIns="0" rIns="0" bIns="0" rtlCol="0" anchor="t"/>
           <a:lstStyle/>
           <a:p>
-            <a:pPr algn="l" indent="0" marL="0">
+            <a:pPr marL="0" indent="0" algn="l">
               <a:lnSpc>
                 <a:spcPct val="100000"/>
               </a:lnSpc>
@@ -5526,14 +5444,14 @@
       </p:sp>
       <p:pic>
         <p:nvPicPr>
-          <p:cNvPr id="9" name="Image 1" descr="Catálogo filtrado por distrito y precio">    </p:cNvPr>
+          <p:cNvPr id="9" name="Image 1" descr="Catálogo filtrado por distrito y precio"/>
           <p:cNvPicPr>
             <a:picLocks noChangeAspect="1"/>
           </p:cNvPicPr>
           <p:nvPr/>
         </p:nvPicPr>
         <p:blipFill>
-          <a:blip r:embed="rId2"/>
+          <a:blip r:embed="rId4"/>
           <a:stretch>
             <a:fillRect/>
           </a:stretch>
@@ -5569,6 +5487,13 @@
             <a:prstDash val="solid"/>
           </a:ln>
         </p:spPr>
+        <p:txBody>
+          <a:bodyPr/>
+          <a:lstStyle/>
+          <a:p>
+            <a:endParaRPr lang="es-PE"/>
+          </a:p>
+        </p:txBody>
       </p:sp>
       <p:sp>
         <p:nvSpPr>
@@ -5589,6 +5514,13 @@
           </a:solidFill>
           <a:ln/>
         </p:spPr>
+        <p:txBody>
+          <a:bodyPr/>
+          <a:lstStyle/>
+          <a:p>
+            <a:endParaRPr lang="es-PE"/>
+          </a:p>
+        </p:txBody>
       </p:sp>
       <p:sp>
         <p:nvSpPr>
@@ -5611,7 +5543,7 @@
           <a:bodyPr wrap="square" lIns="0" tIns="0" rIns="0" bIns="0" rtlCol="0" anchor="ctr"/>
           <a:lstStyle/>
           <a:p>
-            <a:pPr algn="ctr" indent="0" marL="0">
+            <a:pPr marL="0" indent="0" algn="ctr">
               <a:lnSpc>
                 <a:spcPct val="100000"/>
               </a:lnSpc>
@@ -5653,7 +5585,7 @@
           <a:bodyPr wrap="square" lIns="0" tIns="0" rIns="0" bIns="0" rtlCol="0" anchor="t"/>
           <a:lstStyle/>
           <a:p>
-            <a:pPr algn="l" indent="0" marL="0">
+            <a:pPr marL="0" indent="0" algn="l">
               <a:lnSpc>
                 <a:spcPct val="100000"/>
               </a:lnSpc>
@@ -5676,14 +5608,14 @@
       </p:sp>
       <p:pic>
         <p:nvPicPr>
-          <p:cNvPr id="14" name="Image 2" descr="Ficha del pack: alérgenos, tamaños y precios">    </p:cNvPr>
+          <p:cNvPr id="14" name="Image 2" descr="Ficha del pack: alérgenos, tamaños y precios"/>
           <p:cNvPicPr>
             <a:picLocks noChangeAspect="1"/>
           </p:cNvPicPr>
           <p:nvPr/>
         </p:nvPicPr>
         <p:blipFill>
-          <a:blip r:embed="rId3"/>
+          <a:blip r:embed="rId5"/>
           <a:stretch>
             <a:fillRect/>
           </a:stretch>
@@ -5719,6 +5651,13 @@
             <a:prstDash val="solid"/>
           </a:ln>
         </p:spPr>
+        <p:txBody>
+          <a:bodyPr/>
+          <a:lstStyle/>
+          <a:p>
+            <a:endParaRPr lang="es-PE"/>
+          </a:p>
+        </p:txBody>
       </p:sp>
       <p:sp>
         <p:nvSpPr>
@@ -5739,6 +5678,13 @@
           </a:solidFill>
           <a:ln/>
         </p:spPr>
+        <p:txBody>
+          <a:bodyPr/>
+          <a:lstStyle/>
+          <a:p>
+            <a:endParaRPr lang="es-PE"/>
+          </a:p>
+        </p:txBody>
       </p:sp>
       <p:sp>
         <p:nvSpPr>
@@ -5761,7 +5707,7 @@
           <a:bodyPr wrap="square" lIns="0" tIns="0" rIns="0" bIns="0" rtlCol="0" anchor="ctr"/>
           <a:lstStyle/>
           <a:p>
-            <a:pPr algn="ctr" indent="0" marL="0">
+            <a:pPr marL="0" indent="0" algn="ctr">
               <a:lnSpc>
                 <a:spcPct val="100000"/>
               </a:lnSpc>
@@ -5803,7 +5749,7 @@
           <a:bodyPr wrap="square" lIns="0" tIns="0" rIns="0" bIns="0" rtlCol="0" anchor="t"/>
           <a:lstStyle/>
           <a:p>
-            <a:pPr algn="l" indent="0" marL="0">
+            <a:pPr marL="0" indent="0" algn="l">
               <a:lnSpc>
                 <a:spcPct val="100000"/>
               </a:lnSpc>
@@ -5826,14 +5772,14 @@
       </p:sp>
       <p:pic>
         <p:nvPicPr>
-          <p:cNvPr id="19" name="Image 3" descr="Resumen y pago simulado con Yape">    </p:cNvPr>
+          <p:cNvPr id="19" name="Image 3" descr="Resumen y pago simulado con Yape"/>
           <p:cNvPicPr>
             <a:picLocks noChangeAspect="1"/>
           </p:cNvPicPr>
           <p:nvPr/>
         </p:nvPicPr>
         <p:blipFill>
-          <a:blip r:embed="rId4"/>
+          <a:blip r:embed="rId6"/>
           <a:stretch>
             <a:fillRect/>
           </a:stretch>
@@ -5869,6 +5815,13 @@
             <a:prstDash val="solid"/>
           </a:ln>
         </p:spPr>
+        <p:txBody>
+          <a:bodyPr/>
+          <a:lstStyle/>
+          <a:p>
+            <a:endParaRPr lang="es-PE"/>
+          </a:p>
+        </p:txBody>
       </p:sp>
       <p:sp>
         <p:nvSpPr>
@@ -5889,6 +5842,13 @@
           </a:solidFill>
           <a:ln/>
         </p:spPr>
+        <p:txBody>
+          <a:bodyPr/>
+          <a:lstStyle/>
+          <a:p>
+            <a:endParaRPr lang="es-PE"/>
+          </a:p>
+        </p:txBody>
       </p:sp>
       <p:sp>
         <p:nvSpPr>
@@ -5911,7 +5871,7 @@
           <a:bodyPr wrap="square" lIns="0" tIns="0" rIns="0" bIns="0" rtlCol="0" anchor="ctr"/>
           <a:lstStyle/>
           <a:p>
-            <a:pPr algn="ctr" indent="0" marL="0">
+            <a:pPr marL="0" indent="0" algn="ctr">
               <a:lnSpc>
                 <a:spcPct val="100000"/>
               </a:lnSpc>
@@ -5953,7 +5913,7 @@
           <a:bodyPr wrap="square" lIns="0" tIns="0" rIns="0" bIns="0" rtlCol="0" anchor="t"/>
           <a:lstStyle/>
           <a:p>
-            <a:pPr algn="l" indent="0" marL="0">
+            <a:pPr marL="0" indent="0" algn="l">
               <a:lnSpc>
                 <a:spcPct val="100000"/>
               </a:lnSpc>
@@ -5976,14 +5936,14 @@
       </p:sp>
       <p:pic>
         <p:nvPicPr>
-          <p:cNvPr id="24" name="Image 4" descr="Compra confirmada: boleta y código de recojo">    </p:cNvPr>
+          <p:cNvPr id="24" name="Image 4" descr="Compra confirmada: boleta y código de recojo"/>
           <p:cNvPicPr>
             <a:picLocks noChangeAspect="1"/>
           </p:cNvPicPr>
           <p:nvPr/>
         </p:nvPicPr>
         <p:blipFill>
-          <a:blip r:embed="rId5"/>
+          <a:blip r:embed="rId7"/>
           <a:stretch>
             <a:fillRect/>
           </a:stretch>
@@ -6019,6 +5979,13 @@
             <a:prstDash val="solid"/>
           </a:ln>
         </p:spPr>
+        <p:txBody>
+          <a:bodyPr/>
+          <a:lstStyle/>
+          <a:p>
+            <a:endParaRPr lang="es-PE"/>
+          </a:p>
+        </p:txBody>
       </p:sp>
       <p:sp>
         <p:nvSpPr>
@@ -6039,6 +6006,13 @@
           </a:solidFill>
           <a:ln/>
         </p:spPr>
+        <p:txBody>
+          <a:bodyPr/>
+          <a:lstStyle/>
+          <a:p>
+            <a:endParaRPr lang="es-PE"/>
+          </a:p>
+        </p:txBody>
       </p:sp>
       <p:sp>
         <p:nvSpPr>
@@ -6061,7 +6035,7 @@
           <a:bodyPr wrap="square" lIns="0" tIns="0" rIns="0" bIns="0" rtlCol="0" anchor="ctr"/>
           <a:lstStyle/>
           <a:p>
-            <a:pPr algn="ctr" indent="0" marL="0">
+            <a:pPr marL="0" indent="0" algn="ctr">
               <a:lnSpc>
                 <a:spcPct val="100000"/>
               </a:lnSpc>
@@ -6103,7 +6077,7 @@
           <a:bodyPr wrap="square" lIns="0" tIns="0" rIns="0" bIns="0" rtlCol="0" anchor="t"/>
           <a:lstStyle/>
           <a:p>
-            <a:pPr algn="l" indent="0" marL="0">
+            <a:pPr marL="0" indent="0" algn="l">
               <a:lnSpc>
                 <a:spcPct val="100000"/>
               </a:lnSpc>
@@ -6126,14 +6100,14 @@
       </p:sp>
       <p:pic>
         <p:nvPicPr>
-          <p:cNvPr id="29" name="Image 5" descr="El local valida el mismo código y confirma la entrega">    </p:cNvPr>
+          <p:cNvPr id="29" name="Image 5" descr="El local valida el mismo código y confirma la entrega"/>
           <p:cNvPicPr>
             <a:picLocks noChangeAspect="1"/>
           </p:cNvPicPr>
           <p:nvPr/>
         </p:nvPicPr>
         <p:blipFill>
-          <a:blip r:embed="rId6"/>
+          <a:blip r:embed="rId8"/>
           <a:stretch>
             <a:fillRect/>
           </a:stretch>
@@ -6169,6 +6143,13 @@
             <a:prstDash val="solid"/>
           </a:ln>
         </p:spPr>
+        <p:txBody>
+          <a:bodyPr/>
+          <a:lstStyle/>
+          <a:p>
+            <a:endParaRPr lang="es-PE"/>
+          </a:p>
+        </p:txBody>
       </p:sp>
       <p:sp>
         <p:nvSpPr>
@@ -6189,6 +6170,13 @@
           </a:solidFill>
           <a:ln/>
         </p:spPr>
+        <p:txBody>
+          <a:bodyPr/>
+          <a:lstStyle/>
+          <a:p>
+            <a:endParaRPr lang="es-PE"/>
+          </a:p>
+        </p:txBody>
       </p:sp>
       <p:sp>
         <p:nvSpPr>
@@ -6211,7 +6199,7 @@
           <a:bodyPr wrap="square" lIns="0" tIns="0" rIns="0" bIns="0" rtlCol="0" anchor="ctr"/>
           <a:lstStyle/>
           <a:p>
-            <a:pPr algn="ctr" indent="0" marL="0">
+            <a:pPr marL="0" indent="0" algn="ctr">
               <a:lnSpc>
                 <a:spcPct val="100000"/>
               </a:lnSpc>
@@ -6253,7 +6241,7 @@
           <a:bodyPr wrap="square" lIns="0" tIns="0" rIns="0" bIns="0" rtlCol="0" anchor="t"/>
           <a:lstStyle/>
           <a:p>
-            <a:pPr algn="l" indent="0" marL="0">
+            <a:pPr marL="0" indent="0" algn="l">
               <a:lnSpc>
                 <a:spcPct val="100000"/>
               </a:lnSpc>
@@ -6295,7 +6283,7 @@
           <a:bodyPr wrap="square" lIns="0" tIns="0" rIns="0" bIns="0" rtlCol="0" anchor="t"/>
           <a:lstStyle/>
           <a:p>
-            <a:pPr algn="l" indent="0" marL="0">
+            <a:pPr marL="0" indent="0" algn="l">
               <a:lnSpc>
                 <a:spcPct val="100000"/>
               </a:lnSpc>
@@ -6318,7 +6306,7 @@
       </p:sp>
       <p:sp>
         <p:nvSpPr>
-          <p:cNvPr id="25" name="Slide Number Placeholder 0"/>
+          <p:cNvPr id="35" name="Slide Number Placeholder 0"/>
           <p:cNvSpPr>
             <a:spLocks noGrp="1"/>
           </p:cNvSpPr>
@@ -6336,7 +6324,7 @@
           </a:prstGeom>
           <a:extLst>
             <a:ext uri="{C572A759-6A51-4108-AA02-DFA0A04FC94B}">
-              <ma14:wrappingTextBoxFlag xmlns:ma14="http://schemas.microsoft.com/office/mac/drawingml/2011/main" val="0"/>
+              <ma14:wrappingTextBoxFlag xmlns:ma14="http://schemas.microsoft.com/office/mac/drawingml/2011/main" xmlns="" val="0"/>
             </a:ext>
           </a:extLst>
         </p:spPr>
@@ -6357,7 +6345,7 @@
           <a:p>
             <a:pPr algn="r"/>
             <a:fld id="{F7021451-1387-4CA6-816F-3879F97B5CBC}" type="slidenum">
-              <a:rPr b="0" lang="en-US"/>
+              <a:rPr lang="en-US" b="0"/>
               <a:t>11</a:t>
             </a:fld>
             <a:endParaRPr lang="en-US"/>
@@ -6392,9 +6380,11 @@
       <p:sp>
         <p:nvSpPr>
           <p:cNvPr id="2" name="Text 0"/>
-          <p:cNvSpPr/>
+          <p:cNvSpPr>
+            <a:spLocks noGrp="1"/>
+          </p:cNvSpPr>
           <p:nvPr>
-            <p:ph idx="100" type="title" hasCustomPrompt="1"/>
+            <p:ph type="title" idx="100" hasCustomPrompt="1"/>
           </p:nvPr>
         </p:nvSpPr>
         <p:spPr>
@@ -6412,7 +6402,7 @@
           <a:bodyPr wrap="square" lIns="0" tIns="0" rIns="0" bIns="0" rtlCol="0" anchor="t"/>
           <a:lstStyle/>
           <a:p>
-            <a:pPr algn="l" indent="0" marL="0">
+            <a:pPr marL="0" indent="0" algn="l">
               <a:buNone/>
             </a:pPr>
             <a:r>
@@ -6451,14 +6441,14 @@
           <a:bodyPr wrap="square" lIns="0" tIns="0" rIns="0" bIns="0" rtlCol="0" anchor="t"/>
           <a:lstStyle/>
           <a:p>
-            <a:pPr algn="l" indent="0" marL="0">
+            <a:pPr marL="0" indent="0" algn="l">
               <a:lnSpc>
                 <a:spcPct val="100000"/>
               </a:lnSpc>
               <a:buNone/>
             </a:pPr>
             <a:r>
-              <a:rPr lang="en-US" sz="1200" b="1" spc="200" kern="0" dirty="0">
+              <a:rPr lang="en-US" sz="1200" b="1" kern="0" spc="200" dirty="0">
                 <a:solidFill>
                   <a:srgbClr val="315C3D"/>
                 </a:solidFill>
@@ -6493,7 +6483,7 @@
           <a:bodyPr wrap="square" lIns="0" tIns="0" rIns="0" bIns="0" rtlCol="0" anchor="t"/>
           <a:lstStyle/>
           <a:p>
-            <a:pPr algn="l" indent="0" marL="0">
+            <a:pPr marL="0" indent="0" algn="l">
               <a:lnSpc>
                 <a:spcPct val="100000"/>
               </a:lnSpc>
@@ -6535,6 +6525,13 @@
           </a:solidFill>
           <a:ln/>
         </p:spPr>
+        <p:txBody>
+          <a:bodyPr/>
+          <a:lstStyle/>
+          <a:p>
+            <a:endParaRPr lang="es-PE"/>
+          </a:p>
+        </p:txBody>
       </p:sp>
       <p:sp>
         <p:nvSpPr>
@@ -6557,7 +6554,7 @@
           <a:bodyPr wrap="square" lIns="0" tIns="0" rIns="0" bIns="0" rtlCol="0" anchor="t"/>
           <a:lstStyle/>
           <a:p>
-            <a:pPr algn="l" indent="0" marL="0">
+            <a:pPr marL="0" indent="0" algn="l">
               <a:lnSpc>
                 <a:spcPct val="100000"/>
               </a:lnSpc>
@@ -6597,6 +6594,13 @@
           </a:solidFill>
           <a:ln/>
         </p:spPr>
+        <p:txBody>
+          <a:bodyPr/>
+          <a:lstStyle/>
+          <a:p>
+            <a:endParaRPr lang="es-PE"/>
+          </a:p>
+        </p:txBody>
       </p:sp>
       <p:sp>
         <p:nvSpPr>
@@ -6619,7 +6623,7 @@
           <a:bodyPr wrap="square" lIns="0" tIns="0" rIns="0" bIns="0" rtlCol="0" anchor="ctr"/>
           <a:lstStyle/>
           <a:p>
-            <a:pPr algn="ctr" indent="0" marL="0">
+            <a:pPr marL="0" indent="0" algn="ctr">
               <a:lnSpc>
                 <a:spcPct val="100000"/>
               </a:lnSpc>
@@ -6661,7 +6665,7 @@
           <a:bodyPr wrap="square" lIns="0" tIns="0" rIns="0" bIns="0" rtlCol="0" anchor="t"/>
           <a:lstStyle/>
           <a:p>
-            <a:pPr algn="l" indent="0" marL="0">
+            <a:pPr marL="0" indent="0" algn="l">
               <a:lnSpc>
                 <a:spcPct val="100000"/>
               </a:lnSpc>
@@ -6701,6 +6705,13 @@
           </a:solidFill>
           <a:ln/>
         </p:spPr>
+        <p:txBody>
+          <a:bodyPr/>
+          <a:lstStyle/>
+          <a:p>
+            <a:endParaRPr lang="es-PE"/>
+          </a:p>
+        </p:txBody>
       </p:sp>
       <p:sp>
         <p:nvSpPr>
@@ -6723,7 +6734,7 @@
           <a:bodyPr wrap="square" lIns="0" tIns="0" rIns="0" bIns="0" rtlCol="0" anchor="ctr"/>
           <a:lstStyle/>
           <a:p>
-            <a:pPr algn="ctr" indent="0" marL="0">
+            <a:pPr marL="0" indent="0" algn="ctr">
               <a:lnSpc>
                 <a:spcPct val="100000"/>
               </a:lnSpc>
@@ -6765,7 +6776,7 @@
           <a:bodyPr wrap="square" lIns="0" tIns="0" rIns="0" bIns="0" rtlCol="0" anchor="t"/>
           <a:lstStyle/>
           <a:p>
-            <a:pPr algn="l" indent="0" marL="0">
+            <a:pPr marL="0" indent="0" algn="l">
               <a:lnSpc>
                 <a:spcPct val="100000"/>
               </a:lnSpc>
@@ -6805,6 +6816,13 @@
           </a:solidFill>
           <a:ln/>
         </p:spPr>
+        <p:txBody>
+          <a:bodyPr/>
+          <a:lstStyle/>
+          <a:p>
+            <a:endParaRPr lang="es-PE"/>
+          </a:p>
+        </p:txBody>
       </p:sp>
       <p:sp>
         <p:nvSpPr>
@@ -6827,7 +6845,7 @@
           <a:bodyPr wrap="square" lIns="0" tIns="0" rIns="0" bIns="0" rtlCol="0" anchor="ctr"/>
           <a:lstStyle/>
           <a:p>
-            <a:pPr algn="ctr" indent="0" marL="0">
+            <a:pPr marL="0" indent="0" algn="ctr">
               <a:lnSpc>
                 <a:spcPct val="100000"/>
               </a:lnSpc>
@@ -6869,7 +6887,7 @@
           <a:bodyPr wrap="square" lIns="0" tIns="0" rIns="0" bIns="0" rtlCol="0" anchor="t"/>
           <a:lstStyle/>
           <a:p>
-            <a:pPr algn="l" indent="0" marL="0">
+            <a:pPr marL="0" indent="0" algn="l">
               <a:lnSpc>
                 <a:spcPct val="100000"/>
               </a:lnSpc>
@@ -6909,6 +6927,13 @@
           </a:solidFill>
           <a:ln/>
         </p:spPr>
+        <p:txBody>
+          <a:bodyPr/>
+          <a:lstStyle/>
+          <a:p>
+            <a:endParaRPr lang="es-PE"/>
+          </a:p>
+        </p:txBody>
       </p:sp>
       <p:sp>
         <p:nvSpPr>
@@ -6931,7 +6956,7 @@
           <a:bodyPr wrap="square" lIns="0" tIns="0" rIns="0" bIns="0" rtlCol="0" anchor="ctr"/>
           <a:lstStyle/>
           <a:p>
-            <a:pPr algn="ctr" indent="0" marL="0">
+            <a:pPr marL="0" indent="0" algn="ctr">
               <a:lnSpc>
                 <a:spcPct val="100000"/>
               </a:lnSpc>
@@ -6973,7 +6998,7 @@
           <a:bodyPr wrap="square" lIns="0" tIns="0" rIns="0" bIns="0" rtlCol="0" anchor="t"/>
           <a:lstStyle/>
           <a:p>
-            <a:pPr algn="l" indent="0" marL="0">
+            <a:pPr marL="0" indent="0" algn="l">
               <a:lnSpc>
                 <a:spcPct val="100000"/>
               </a:lnSpc>
@@ -7013,6 +7038,13 @@
           </a:solidFill>
           <a:ln/>
         </p:spPr>
+        <p:txBody>
+          <a:bodyPr/>
+          <a:lstStyle/>
+          <a:p>
+            <a:endParaRPr lang="es-PE"/>
+          </a:p>
+        </p:txBody>
       </p:sp>
       <p:sp>
         <p:nvSpPr>
@@ -7035,7 +7067,7 @@
           <a:bodyPr wrap="square" lIns="0" tIns="0" rIns="0" bIns="0" rtlCol="0" anchor="ctr"/>
           <a:lstStyle/>
           <a:p>
-            <a:pPr algn="ctr" indent="0" marL="0">
+            <a:pPr marL="0" indent="0" algn="ctr">
               <a:lnSpc>
                 <a:spcPct val="100000"/>
               </a:lnSpc>
@@ -7077,7 +7109,7 @@
           <a:bodyPr wrap="square" lIns="0" tIns="0" rIns="0" bIns="0" rtlCol="0" anchor="t"/>
           <a:lstStyle/>
           <a:p>
-            <a:pPr algn="l" indent="0" marL="0">
+            <a:pPr marL="0" indent="0" algn="l">
               <a:lnSpc>
                 <a:spcPct val="100000"/>
               </a:lnSpc>
@@ -7117,6 +7149,13 @@
           </a:solidFill>
           <a:ln/>
         </p:spPr>
+        <p:txBody>
+          <a:bodyPr/>
+          <a:lstStyle/>
+          <a:p>
+            <a:endParaRPr lang="es-PE"/>
+          </a:p>
+        </p:txBody>
       </p:sp>
       <p:sp>
         <p:nvSpPr>
@@ -7139,7 +7178,7 @@
           <a:bodyPr wrap="square" lIns="0" tIns="0" rIns="0" bIns="0" rtlCol="0" anchor="ctr"/>
           <a:lstStyle/>
           <a:p>
-            <a:pPr algn="ctr" indent="0" marL="0">
+            <a:pPr marL="0" indent="0" algn="ctr">
               <a:lnSpc>
                 <a:spcPct val="100000"/>
               </a:lnSpc>
@@ -7181,7 +7220,7 @@
           <a:bodyPr wrap="square" lIns="0" tIns="0" rIns="0" bIns="0" rtlCol="0" anchor="t"/>
           <a:lstStyle/>
           <a:p>
-            <a:pPr algn="l" indent="0" marL="0">
+            <a:pPr marL="0" indent="0" algn="l">
               <a:lnSpc>
                 <a:spcPct val="100000"/>
               </a:lnSpc>
@@ -7221,6 +7260,13 @@
           </a:solidFill>
           <a:ln/>
         </p:spPr>
+        <p:txBody>
+          <a:bodyPr/>
+          <a:lstStyle/>
+          <a:p>
+            <a:endParaRPr lang="es-PE"/>
+          </a:p>
+        </p:txBody>
       </p:sp>
       <p:sp>
         <p:nvSpPr>
@@ -7243,7 +7289,7 @@
           <a:bodyPr wrap="square" lIns="0" tIns="0" rIns="0" bIns="0" rtlCol="0" anchor="ctr"/>
           <a:lstStyle/>
           <a:p>
-            <a:pPr algn="ctr" indent="0" marL="0">
+            <a:pPr marL="0" indent="0" algn="ctr">
               <a:lnSpc>
                 <a:spcPct val="100000"/>
               </a:lnSpc>
@@ -7285,7 +7331,7 @@
           <a:bodyPr wrap="square" lIns="0" tIns="0" rIns="0" bIns="0" rtlCol="0" anchor="t"/>
           <a:lstStyle/>
           <a:p>
-            <a:pPr algn="l" indent="0" marL="0">
+            <a:pPr marL="0" indent="0" algn="l">
               <a:lnSpc>
                 <a:spcPct val="100000"/>
               </a:lnSpc>
@@ -7325,6 +7371,13 @@
           </a:solidFill>
           <a:ln/>
         </p:spPr>
+        <p:txBody>
+          <a:bodyPr/>
+          <a:lstStyle/>
+          <a:p>
+            <a:endParaRPr lang="es-PE"/>
+          </a:p>
+        </p:txBody>
       </p:sp>
       <p:sp>
         <p:nvSpPr>
@@ -7347,7 +7400,7 @@
           <a:bodyPr wrap="square" lIns="0" tIns="0" rIns="0" bIns="0" rtlCol="0" anchor="ctr"/>
           <a:lstStyle/>
           <a:p>
-            <a:pPr algn="ctr" indent="0" marL="0">
+            <a:pPr marL="0" indent="0" algn="ctr">
               <a:lnSpc>
                 <a:spcPct val="100000"/>
               </a:lnSpc>
@@ -7389,7 +7442,7 @@
           <a:bodyPr wrap="square" lIns="0" tIns="0" rIns="0" bIns="0" rtlCol="0" anchor="t"/>
           <a:lstStyle/>
           <a:p>
-            <a:pPr algn="l" indent="0" marL="0">
+            <a:pPr marL="0" indent="0" algn="l">
               <a:lnSpc>
                 <a:spcPct val="100000"/>
               </a:lnSpc>
@@ -7429,6 +7482,13 @@
           </a:solidFill>
           <a:ln/>
         </p:spPr>
+        <p:txBody>
+          <a:bodyPr/>
+          <a:lstStyle/>
+          <a:p>
+            <a:endParaRPr lang="es-PE"/>
+          </a:p>
+        </p:txBody>
       </p:sp>
       <p:sp>
         <p:nvSpPr>
@@ -7451,7 +7511,7 @@
           <a:bodyPr wrap="square" lIns="0" tIns="0" rIns="0" bIns="0" rtlCol="0" anchor="ctr"/>
           <a:lstStyle/>
           <a:p>
-            <a:pPr algn="ctr" indent="0" marL="0">
+            <a:pPr marL="0" indent="0" algn="ctr">
               <a:lnSpc>
                 <a:spcPct val="100000"/>
               </a:lnSpc>
@@ -7493,7 +7553,7 @@
           <a:bodyPr wrap="square" lIns="0" tIns="0" rIns="0" bIns="0" rtlCol="0" anchor="t"/>
           <a:lstStyle/>
           <a:p>
-            <a:pPr algn="l" indent="0" marL="0">
+            <a:pPr marL="0" indent="0" algn="l">
               <a:lnSpc>
                 <a:spcPct val="100000"/>
               </a:lnSpc>
@@ -7533,6 +7593,13 @@
           </a:solidFill>
           <a:ln/>
         </p:spPr>
+        <p:txBody>
+          <a:bodyPr/>
+          <a:lstStyle/>
+          <a:p>
+            <a:endParaRPr lang="es-PE"/>
+          </a:p>
+        </p:txBody>
       </p:sp>
       <p:sp>
         <p:nvSpPr>
@@ -7555,7 +7622,7 @@
           <a:bodyPr wrap="square" lIns="0" tIns="0" rIns="0" bIns="0" rtlCol="0" anchor="ctr"/>
           <a:lstStyle/>
           <a:p>
-            <a:pPr algn="ctr" indent="0" marL="0">
+            <a:pPr marL="0" indent="0" algn="ctr">
               <a:lnSpc>
                 <a:spcPct val="100000"/>
               </a:lnSpc>
@@ -7597,7 +7664,7 @@
           <a:bodyPr wrap="square" lIns="0" tIns="0" rIns="0" bIns="0" rtlCol="0" anchor="t"/>
           <a:lstStyle/>
           <a:p>
-            <a:pPr algn="l" indent="0" marL="0">
+            <a:pPr marL="0" indent="0" algn="l">
               <a:lnSpc>
                 <a:spcPct val="100000"/>
               </a:lnSpc>
@@ -7637,6 +7704,13 @@
           </a:solidFill>
           <a:ln/>
         </p:spPr>
+        <p:txBody>
+          <a:bodyPr/>
+          <a:lstStyle/>
+          <a:p>
+            <a:endParaRPr lang="es-PE"/>
+          </a:p>
+        </p:txBody>
       </p:sp>
       <p:sp>
         <p:nvSpPr>
@@ -7659,7 +7733,7 @@
           <a:bodyPr wrap="square" lIns="0" tIns="0" rIns="0" bIns="0" rtlCol="0" anchor="ctr"/>
           <a:lstStyle/>
           <a:p>
-            <a:pPr algn="ctr" indent="0" marL="0">
+            <a:pPr marL="0" indent="0" algn="ctr">
               <a:lnSpc>
                 <a:spcPct val="100000"/>
               </a:lnSpc>
@@ -7701,7 +7775,7 @@
           <a:bodyPr wrap="square" lIns="0" tIns="0" rIns="0" bIns="0" rtlCol="0" anchor="t"/>
           <a:lstStyle/>
           <a:p>
-            <a:pPr algn="l" indent="0" marL="0">
+            <a:pPr marL="0" indent="0" algn="l">
               <a:lnSpc>
                 <a:spcPct val="100000"/>
               </a:lnSpc>
@@ -7724,7 +7798,7 @@
       </p:sp>
       <p:sp>
         <p:nvSpPr>
-          <p:cNvPr id="25" name="Slide Number Placeholder 0"/>
+          <p:cNvPr id="40" name="Slide Number Placeholder 0"/>
           <p:cNvSpPr>
             <a:spLocks noGrp="1"/>
           </p:cNvSpPr>
@@ -7742,7 +7816,7 @@
           </a:prstGeom>
           <a:extLst>
             <a:ext uri="{C572A759-6A51-4108-AA02-DFA0A04FC94B}">
-              <ma14:wrappingTextBoxFlag xmlns:ma14="http://schemas.microsoft.com/office/mac/drawingml/2011/main" val="0"/>
+              <ma14:wrappingTextBoxFlag xmlns:ma14="http://schemas.microsoft.com/office/mac/drawingml/2011/main" xmlns="" val="0"/>
             </a:ext>
           </a:extLst>
         </p:spPr>
@@ -7763,7 +7837,7 @@
           <a:p>
             <a:pPr algn="r"/>
             <a:fld id="{F7021451-1387-4CA6-816F-3879F97B5CBC}" type="slidenum">
-              <a:rPr b="0" lang="en-US"/>
+              <a:rPr lang="en-US" b="0"/>
               <a:t>12</a:t>
             </a:fld>
             <a:endParaRPr lang="en-US"/>
@@ -7798,9 +7872,11 @@
       <p:sp>
         <p:nvSpPr>
           <p:cNvPr id="2" name="Text 0"/>
-          <p:cNvSpPr/>
+          <p:cNvSpPr>
+            <a:spLocks noGrp="1"/>
+          </p:cNvSpPr>
           <p:nvPr>
-            <p:ph idx="100" type="title" hasCustomPrompt="1"/>
+            <p:ph type="title" idx="100" hasCustomPrompt="1"/>
           </p:nvPr>
         </p:nvSpPr>
         <p:spPr>
@@ -7818,7 +7894,7 @@
           <a:bodyPr wrap="square" lIns="0" tIns="0" rIns="0" bIns="0" rtlCol="0" anchor="t"/>
           <a:lstStyle/>
           <a:p>
-            <a:pPr algn="l" indent="0" marL="0">
+            <a:pPr marL="0" indent="0" algn="l">
               <a:buNone/>
             </a:pPr>
             <a:r>
@@ -7857,14 +7933,14 @@
           <a:bodyPr wrap="square" lIns="0" tIns="0" rIns="0" bIns="0" rtlCol="0" anchor="t"/>
           <a:lstStyle/>
           <a:p>
-            <a:pPr algn="l" indent="0" marL="0">
+            <a:pPr marL="0" indent="0" algn="l">
               <a:lnSpc>
                 <a:spcPct val="100000"/>
               </a:lnSpc>
               <a:buNone/>
             </a:pPr>
             <a:r>
-              <a:rPr lang="en-US" sz="1200" b="1" spc="200" kern="0" dirty="0">
+              <a:rPr lang="en-US" sz="1200" b="1" kern="0" spc="200" dirty="0">
                 <a:solidFill>
                   <a:srgbClr val="315C3D"/>
                 </a:solidFill>
@@ -7899,6 +7975,13 @@
           </a:solidFill>
           <a:ln/>
         </p:spPr>
+        <p:txBody>
+          <a:bodyPr/>
+          <a:lstStyle/>
+          <a:p>
+            <a:endParaRPr lang="es-PE"/>
+          </a:p>
+        </p:txBody>
       </p:sp>
       <p:sp>
         <p:nvSpPr>
@@ -7921,7 +8004,7 @@
           <a:bodyPr wrap="square" lIns="0" tIns="0" rIns="0" bIns="0" rtlCol="0" anchor="t"/>
           <a:lstStyle/>
           <a:p>
-            <a:pPr algn="l" indent="0" marL="0">
+            <a:pPr marL="0" indent="0" algn="l">
               <a:lnSpc>
                 <a:spcPct val="100000"/>
               </a:lnSpc>
@@ -7963,7 +8046,7 @@
           <a:bodyPr wrap="square" lIns="0" tIns="0" rIns="0" bIns="0" rtlCol="0" anchor="t"/>
           <a:lstStyle/>
           <a:p>
-            <a:pPr algn="l" indent="0" marL="0">
+            <a:pPr marL="0" indent="0" algn="l">
               <a:lnSpc>
                 <a:spcPct val="100000"/>
               </a:lnSpc>
@@ -8005,6 +8088,13 @@
           </a:solidFill>
           <a:ln/>
         </p:spPr>
+        <p:txBody>
+          <a:bodyPr/>
+          <a:lstStyle/>
+          <a:p>
+            <a:endParaRPr lang="es-PE"/>
+          </a:p>
+        </p:txBody>
       </p:sp>
       <p:sp>
         <p:nvSpPr>
@@ -8027,7 +8117,7 @@
           <a:bodyPr wrap="square" lIns="0" tIns="0" rIns="0" bIns="0" rtlCol="0" anchor="t"/>
           <a:lstStyle/>
           <a:p>
-            <a:pPr algn="l" indent="0" marL="0">
+            <a:pPr marL="0" indent="0" algn="l">
               <a:lnSpc>
                 <a:spcPct val="100000"/>
               </a:lnSpc>
@@ -8069,7 +8159,7 @@
           <a:bodyPr wrap="square" lIns="0" tIns="0" rIns="0" bIns="0" rtlCol="0" anchor="t"/>
           <a:lstStyle/>
           <a:p>
-            <a:pPr algn="l" indent="0" marL="0">
+            <a:pPr marL="0" indent="0" algn="l">
               <a:lnSpc>
                 <a:spcPct val="100000"/>
               </a:lnSpc>
@@ -8111,7 +8201,7 @@
           <a:bodyPr wrap="square" lIns="0" tIns="0" rIns="0" bIns="0" rtlCol="0" anchor="t"/>
           <a:lstStyle/>
           <a:p>
-            <a:pPr algn="l" indent="0" marL="0">
+            <a:pPr marL="0" indent="0" algn="l">
               <a:lnSpc>
                 <a:spcPct val="100000"/>
               </a:lnSpc>
@@ -8153,6 +8243,13 @@
           </a:solidFill>
           <a:ln/>
         </p:spPr>
+        <p:txBody>
+          <a:bodyPr/>
+          <a:lstStyle/>
+          <a:p>
+            <a:endParaRPr lang="es-PE"/>
+          </a:p>
+        </p:txBody>
       </p:sp>
       <p:sp>
         <p:nvSpPr>
@@ -8175,7 +8272,7 @@
           <a:bodyPr wrap="square" lIns="0" tIns="0" rIns="0" bIns="0" rtlCol="0" anchor="t"/>
           <a:lstStyle/>
           <a:p>
-            <a:pPr algn="l" indent="0" marL="0">
+            <a:pPr marL="0" indent="0" algn="l">
               <a:lnSpc>
                 <a:spcPct val="100000"/>
               </a:lnSpc>
@@ -8217,7 +8314,7 @@
           <a:bodyPr wrap="square" lIns="0" tIns="0" rIns="0" bIns="0" rtlCol="0" anchor="t"/>
           <a:lstStyle/>
           <a:p>
-            <a:pPr algn="l" indent="0" marL="0">
+            <a:pPr marL="0" indent="0" algn="l">
               <a:lnSpc>
                 <a:spcPct val="100000"/>
               </a:lnSpc>
@@ -8259,6 +8356,13 @@
           </a:solidFill>
           <a:ln/>
         </p:spPr>
+        <p:txBody>
+          <a:bodyPr/>
+          <a:lstStyle/>
+          <a:p>
+            <a:endParaRPr lang="es-PE"/>
+          </a:p>
+        </p:txBody>
       </p:sp>
       <p:sp>
         <p:nvSpPr>
@@ -8281,7 +8385,7 @@
           <a:bodyPr wrap="square" lIns="0" tIns="0" rIns="0" bIns="0" rtlCol="0" anchor="t"/>
           <a:lstStyle/>
           <a:p>
-            <a:pPr algn="l" indent="0" marL="0">
+            <a:pPr marL="0" indent="0" algn="l">
               <a:lnSpc>
                 <a:spcPct val="100000"/>
               </a:lnSpc>
@@ -8323,7 +8427,7 @@
           <a:bodyPr wrap="square" lIns="0" tIns="0" rIns="0" bIns="0" rtlCol="0" anchor="t"/>
           <a:lstStyle/>
           <a:p>
-            <a:pPr algn="l" indent="0" marL="0">
+            <a:pPr marL="0" indent="0" algn="l">
               <a:lnSpc>
                 <a:spcPct val="100000"/>
               </a:lnSpc>
@@ -8365,6 +8469,13 @@
           </a:solidFill>
           <a:ln/>
         </p:spPr>
+        <p:txBody>
+          <a:bodyPr/>
+          <a:lstStyle/>
+          <a:p>
+            <a:endParaRPr lang="es-PE"/>
+          </a:p>
+        </p:txBody>
       </p:sp>
       <p:sp>
         <p:nvSpPr>
@@ -8387,7 +8498,7 @@
           <a:bodyPr wrap="square" lIns="0" tIns="0" rIns="0" bIns="0" rtlCol="0" anchor="t"/>
           <a:lstStyle/>
           <a:p>
-            <a:pPr algn="l" indent="0" marL="0">
+            <a:pPr marL="0" indent="0" algn="l">
               <a:lnSpc>
                 <a:spcPct val="100000"/>
               </a:lnSpc>
@@ -8429,7 +8540,7 @@
           <a:bodyPr wrap="square" lIns="0" tIns="0" rIns="0" bIns="0" rtlCol="0" anchor="t"/>
           <a:lstStyle/>
           <a:p>
-            <a:pPr algn="l" indent="0" marL="0">
+            <a:pPr marL="0" indent="0" algn="l">
               <a:lnSpc>
                 <a:spcPct val="100000"/>
               </a:lnSpc>
@@ -8476,6 +8587,13 @@
             <a:prstDash val="solid"/>
           </a:ln>
         </p:spPr>
+        <p:txBody>
+          <a:bodyPr/>
+          <a:lstStyle/>
+          <a:p>
+            <a:endParaRPr lang="es-PE"/>
+          </a:p>
+        </p:txBody>
       </p:sp>
       <p:sp>
         <p:nvSpPr>
@@ -8498,14 +8616,14 @@
           <a:bodyPr wrap="square" lIns="0" tIns="0" rIns="0" bIns="0" rtlCol="0" anchor="t"/>
           <a:lstStyle/>
           <a:p>
-            <a:pPr algn="l" indent="0" marL="0">
+            <a:pPr marL="0" indent="0" algn="l">
               <a:lnSpc>
                 <a:spcPct val="100000"/>
               </a:lnSpc>
               <a:buNone/>
             </a:pPr>
             <a:r>
-              <a:rPr lang="en-US" sz="1100" b="1" spc="200" kern="0" dirty="0">
+              <a:rPr lang="en-US" sz="1100" b="1" kern="0" spc="200" dirty="0">
                 <a:solidFill>
                   <a:srgbClr val="C96A39"/>
                 </a:solidFill>
@@ -8540,7 +8658,7 @@
           <a:bodyPr wrap="square" lIns="0" tIns="0" rIns="0" bIns="0" rtlCol="0" anchor="t"/>
           <a:lstStyle/>
           <a:p>
-            <a:pPr algn="l" indent="0" marL="0">
+            <a:pPr marL="0" indent="0" algn="l">
               <a:lnSpc>
                 <a:spcPct val="100000"/>
               </a:lnSpc>
@@ -8582,7 +8700,7 @@
           <a:bodyPr wrap="square" lIns="0" tIns="0" rIns="0" bIns="0" rtlCol="0" anchor="t"/>
           <a:lstStyle/>
           <a:p>
-            <a:pPr algn="l" indent="0" marL="0">
+            <a:pPr marL="0" indent="0" algn="l">
               <a:lnSpc>
                 <a:spcPct val="100000"/>
               </a:lnSpc>
@@ -8623,7 +8741,7 @@
           </a:prstGeom>
           <a:extLst>
             <a:ext uri="{C572A759-6A51-4108-AA02-DFA0A04FC94B}">
-              <ma14:wrappingTextBoxFlag xmlns:ma14="http://schemas.microsoft.com/office/mac/drawingml/2011/main" val="0"/>
+              <ma14:wrappingTextBoxFlag xmlns:ma14="http://schemas.microsoft.com/office/mac/drawingml/2011/main" xmlns="" val="0"/>
             </a:ext>
           </a:extLst>
         </p:spPr>
@@ -8644,7 +8762,7 @@
           <a:p>
             <a:pPr algn="r"/>
             <a:fld id="{F7021451-1387-4CA6-816F-3879F97B5CBC}" type="slidenum">
-              <a:rPr b="0" lang="en-US"/>
+              <a:rPr lang="en-US" b="0"/>
               <a:t>2</a:t>
             </a:fld>
             <a:endParaRPr lang="en-US"/>
@@ -8679,9 +8797,11 @@
       <p:sp>
         <p:nvSpPr>
           <p:cNvPr id="2" name="Text 0"/>
-          <p:cNvSpPr/>
+          <p:cNvSpPr>
+            <a:spLocks noGrp="1"/>
+          </p:cNvSpPr>
           <p:nvPr>
-            <p:ph idx="100" type="title" hasCustomPrompt="1"/>
+            <p:ph type="title" idx="100" hasCustomPrompt="1"/>
           </p:nvPr>
         </p:nvSpPr>
         <p:spPr>
@@ -8699,7 +8819,7 @@
           <a:bodyPr wrap="square" lIns="0" tIns="0" rIns="0" bIns="0" rtlCol="0" anchor="t"/>
           <a:lstStyle/>
           <a:p>
-            <a:pPr algn="l" indent="0" marL="0">
+            <a:pPr marL="0" indent="0" algn="l">
               <a:buNone/>
             </a:pPr>
             <a:r>
@@ -8738,14 +8858,14 @@
           <a:bodyPr wrap="square" lIns="0" tIns="0" rIns="0" bIns="0" rtlCol="0" anchor="t"/>
           <a:lstStyle/>
           <a:p>
-            <a:pPr algn="l" indent="0" marL="0">
+            <a:pPr marL="0" indent="0" algn="l">
               <a:lnSpc>
                 <a:spcPct val="100000"/>
               </a:lnSpc>
               <a:buNone/>
             </a:pPr>
             <a:r>
-              <a:rPr lang="en-US" sz="1200" b="1" spc="200" kern="0" dirty="0">
+              <a:rPr lang="en-US" sz="1200" b="1" kern="0" spc="200" dirty="0">
                 <a:solidFill>
                   <a:srgbClr val="315C3D"/>
                 </a:solidFill>
@@ -8780,7 +8900,7 @@
           <a:bodyPr wrap="square" lIns="0" tIns="0" rIns="0" bIns="0" rtlCol="0" anchor="t"/>
           <a:lstStyle/>
           <a:p>
-            <a:pPr algn="l" indent="0" marL="0">
+            <a:pPr marL="0" indent="0" algn="l">
               <a:lnSpc>
                 <a:spcPct val="100000"/>
               </a:lnSpc>
@@ -8827,6 +8947,13 @@
             <a:prstDash val="solid"/>
           </a:ln>
         </p:spPr>
+        <p:txBody>
+          <a:bodyPr/>
+          <a:lstStyle/>
+          <a:p>
+            <a:endParaRPr lang="es-PE"/>
+          </a:p>
+        </p:txBody>
       </p:sp>
       <p:sp>
         <p:nvSpPr>
@@ -8847,6 +8974,13 @@
           </a:solidFill>
           <a:ln/>
         </p:spPr>
+        <p:txBody>
+          <a:bodyPr/>
+          <a:lstStyle/>
+          <a:p>
+            <a:endParaRPr lang="es-PE"/>
+          </a:p>
+        </p:txBody>
       </p:sp>
       <p:sp>
         <p:nvSpPr>
@@ -8869,7 +9003,7 @@
           <a:bodyPr wrap="square" lIns="0" tIns="0" rIns="0" bIns="0" rtlCol="0" anchor="ctr"/>
           <a:lstStyle/>
           <a:p>
-            <a:pPr algn="ctr" indent="0" marL="0">
+            <a:pPr marL="0" indent="0" algn="ctr">
               <a:lnSpc>
                 <a:spcPct val="100000"/>
               </a:lnSpc>
@@ -8911,7 +9045,7 @@
           <a:bodyPr wrap="square" lIns="0" tIns="0" rIns="0" bIns="0" rtlCol="0" anchor="ctr"/>
           <a:lstStyle/>
           <a:p>
-            <a:pPr algn="l" indent="0" marL="0">
+            <a:pPr marL="0" indent="0" algn="l">
               <a:lnSpc>
                 <a:spcPct val="100000"/>
               </a:lnSpc>
@@ -8953,7 +9087,7 @@
           <a:bodyPr wrap="square" lIns="0" tIns="0" rIns="0" bIns="0" rtlCol="0" anchor="t"/>
           <a:lstStyle/>
           <a:p>
-            <a:pPr algn="l" indent="0" marL="0">
+            <a:pPr marL="0" indent="0" algn="l">
               <a:lnSpc>
                 <a:spcPct val="100000"/>
               </a:lnSpc>
@@ -9000,6 +9134,13 @@
             <a:prstDash val="solid"/>
           </a:ln>
         </p:spPr>
+        <p:txBody>
+          <a:bodyPr/>
+          <a:lstStyle/>
+          <a:p>
+            <a:endParaRPr lang="es-PE"/>
+          </a:p>
+        </p:txBody>
       </p:sp>
       <p:sp>
         <p:nvSpPr>
@@ -9020,6 +9161,13 @@
           </a:solidFill>
           <a:ln/>
         </p:spPr>
+        <p:txBody>
+          <a:bodyPr/>
+          <a:lstStyle/>
+          <a:p>
+            <a:endParaRPr lang="es-PE"/>
+          </a:p>
+        </p:txBody>
       </p:sp>
       <p:sp>
         <p:nvSpPr>
@@ -9042,7 +9190,7 @@
           <a:bodyPr wrap="square" lIns="0" tIns="0" rIns="0" bIns="0" rtlCol="0" anchor="ctr"/>
           <a:lstStyle/>
           <a:p>
-            <a:pPr algn="ctr" indent="0" marL="0">
+            <a:pPr marL="0" indent="0" algn="ctr">
               <a:lnSpc>
                 <a:spcPct val="100000"/>
               </a:lnSpc>
@@ -9084,7 +9232,7 @@
           <a:bodyPr wrap="square" lIns="0" tIns="0" rIns="0" bIns="0" rtlCol="0" anchor="ctr"/>
           <a:lstStyle/>
           <a:p>
-            <a:pPr algn="l" indent="0" marL="0">
+            <a:pPr marL="0" indent="0" algn="l">
               <a:lnSpc>
                 <a:spcPct val="100000"/>
               </a:lnSpc>
@@ -9126,7 +9274,7 @@
           <a:bodyPr wrap="square" lIns="0" tIns="0" rIns="0" bIns="0" rtlCol="0" anchor="t"/>
           <a:lstStyle/>
           <a:p>
-            <a:pPr algn="l" indent="0" marL="0">
+            <a:pPr marL="0" indent="0" algn="l">
               <a:lnSpc>
                 <a:spcPct val="100000"/>
               </a:lnSpc>
@@ -9173,6 +9321,13 @@
             <a:prstDash val="solid"/>
           </a:ln>
         </p:spPr>
+        <p:txBody>
+          <a:bodyPr/>
+          <a:lstStyle/>
+          <a:p>
+            <a:endParaRPr lang="es-PE"/>
+          </a:p>
+        </p:txBody>
       </p:sp>
       <p:sp>
         <p:nvSpPr>
@@ -9193,6 +9348,13 @@
           </a:solidFill>
           <a:ln/>
         </p:spPr>
+        <p:txBody>
+          <a:bodyPr/>
+          <a:lstStyle/>
+          <a:p>
+            <a:endParaRPr lang="es-PE"/>
+          </a:p>
+        </p:txBody>
       </p:sp>
       <p:sp>
         <p:nvSpPr>
@@ -9215,7 +9377,7 @@
           <a:bodyPr wrap="square" lIns="0" tIns="0" rIns="0" bIns="0" rtlCol="0" anchor="ctr"/>
           <a:lstStyle/>
           <a:p>
-            <a:pPr algn="ctr" indent="0" marL="0">
+            <a:pPr marL="0" indent="0" algn="ctr">
               <a:lnSpc>
                 <a:spcPct val="100000"/>
               </a:lnSpc>
@@ -9257,7 +9419,7 @@
           <a:bodyPr wrap="square" lIns="0" tIns="0" rIns="0" bIns="0" rtlCol="0" anchor="ctr"/>
           <a:lstStyle/>
           <a:p>
-            <a:pPr algn="l" indent="0" marL="0">
+            <a:pPr marL="0" indent="0" algn="l">
               <a:lnSpc>
                 <a:spcPct val="100000"/>
               </a:lnSpc>
@@ -9299,7 +9461,7 @@
           <a:bodyPr wrap="square" lIns="0" tIns="0" rIns="0" bIns="0" rtlCol="0" anchor="t"/>
           <a:lstStyle/>
           <a:p>
-            <a:pPr algn="l" indent="0" marL="0">
+            <a:pPr marL="0" indent="0" algn="l">
               <a:lnSpc>
                 <a:spcPct val="100000"/>
               </a:lnSpc>
@@ -9346,6 +9508,13 @@
             <a:prstDash val="solid"/>
           </a:ln>
         </p:spPr>
+        <p:txBody>
+          <a:bodyPr/>
+          <a:lstStyle/>
+          <a:p>
+            <a:endParaRPr lang="es-PE"/>
+          </a:p>
+        </p:txBody>
       </p:sp>
       <p:sp>
         <p:nvSpPr>
@@ -9366,6 +9535,13 @@
           </a:solidFill>
           <a:ln/>
         </p:spPr>
+        <p:txBody>
+          <a:bodyPr/>
+          <a:lstStyle/>
+          <a:p>
+            <a:endParaRPr lang="es-PE"/>
+          </a:p>
+        </p:txBody>
       </p:sp>
       <p:sp>
         <p:nvSpPr>
@@ -9388,7 +9564,7 @@
           <a:bodyPr wrap="square" lIns="0" tIns="0" rIns="0" bIns="0" rtlCol="0" anchor="ctr"/>
           <a:lstStyle/>
           <a:p>
-            <a:pPr algn="ctr" indent="0" marL="0">
+            <a:pPr marL="0" indent="0" algn="ctr">
               <a:lnSpc>
                 <a:spcPct val="100000"/>
               </a:lnSpc>
@@ -9430,7 +9606,7 @@
           <a:bodyPr wrap="square" lIns="0" tIns="0" rIns="0" bIns="0" rtlCol="0" anchor="ctr"/>
           <a:lstStyle/>
           <a:p>
-            <a:pPr algn="l" indent="0" marL="0">
+            <a:pPr marL="0" indent="0" algn="l">
               <a:lnSpc>
                 <a:spcPct val="100000"/>
               </a:lnSpc>
@@ -9472,7 +9648,7 @@
           <a:bodyPr wrap="square" lIns="0" tIns="0" rIns="0" bIns="0" rtlCol="0" anchor="t"/>
           <a:lstStyle/>
           <a:p>
-            <a:pPr algn="l" indent="0" marL="0">
+            <a:pPr marL="0" indent="0" algn="l">
               <a:lnSpc>
                 <a:spcPct val="100000"/>
               </a:lnSpc>
@@ -9514,14 +9690,14 @@
           <a:bodyPr wrap="square" lIns="0" tIns="0" rIns="0" bIns="0" rtlCol="0" anchor="t"/>
           <a:lstStyle/>
           <a:p>
-            <a:pPr algn="l" indent="0" marL="0">
+            <a:pPr marL="0" indent="0" algn="l">
               <a:lnSpc>
                 <a:spcPct val="100000"/>
               </a:lnSpc>
               <a:buNone/>
             </a:pPr>
             <a:r>
-              <a:rPr lang="en-US" sz="1100" b="1" spc="200" kern="0" dirty="0">
+              <a:rPr lang="en-US" sz="1100" b="1" kern="0" spc="200" dirty="0">
                 <a:solidFill>
                   <a:srgbClr val="C96A39"/>
                 </a:solidFill>
@@ -9556,6 +9732,13 @@
           </a:solidFill>
           <a:ln/>
         </p:spPr>
+        <p:txBody>
+          <a:bodyPr/>
+          <a:lstStyle/>
+          <a:p>
+            <a:endParaRPr lang="es-PE"/>
+          </a:p>
+        </p:txBody>
       </p:sp>
       <p:sp>
         <p:nvSpPr>
@@ -9578,7 +9761,7 @@
           <a:bodyPr wrap="square" lIns="0" tIns="0" rIns="0" bIns="0" rtlCol="0" anchor="ctr"/>
           <a:lstStyle/>
           <a:p>
-            <a:pPr algn="l" indent="0" marL="0">
+            <a:pPr marL="0" indent="0" algn="l">
               <a:lnSpc>
                 <a:spcPct val="100000"/>
               </a:lnSpc>
@@ -9620,6 +9803,13 @@
           </a:solidFill>
           <a:ln/>
         </p:spPr>
+        <p:txBody>
+          <a:bodyPr/>
+          <a:lstStyle/>
+          <a:p>
+            <a:endParaRPr lang="es-PE"/>
+          </a:p>
+        </p:txBody>
       </p:sp>
       <p:sp>
         <p:nvSpPr>
@@ -9642,7 +9832,7 @@
           <a:bodyPr wrap="square" lIns="0" tIns="0" rIns="0" bIns="0" rtlCol="0" anchor="ctr"/>
           <a:lstStyle/>
           <a:p>
-            <a:pPr algn="l" indent="0" marL="0">
+            <a:pPr marL="0" indent="0" algn="l">
               <a:lnSpc>
                 <a:spcPct val="100000"/>
               </a:lnSpc>
@@ -9684,6 +9874,13 @@
           </a:solidFill>
           <a:ln/>
         </p:spPr>
+        <p:txBody>
+          <a:bodyPr/>
+          <a:lstStyle/>
+          <a:p>
+            <a:endParaRPr lang="es-PE"/>
+          </a:p>
+        </p:txBody>
       </p:sp>
       <p:sp>
         <p:nvSpPr>
@@ -9706,7 +9903,7 @@
           <a:bodyPr wrap="square" lIns="0" tIns="0" rIns="0" bIns="0" rtlCol="0" anchor="ctr"/>
           <a:lstStyle/>
           <a:p>
-            <a:pPr algn="l" indent="0" marL="0">
+            <a:pPr marL="0" indent="0" algn="l">
               <a:lnSpc>
                 <a:spcPct val="100000"/>
               </a:lnSpc>
@@ -9748,6 +9945,13 @@
           </a:solidFill>
           <a:ln/>
         </p:spPr>
+        <p:txBody>
+          <a:bodyPr/>
+          <a:lstStyle/>
+          <a:p>
+            <a:endParaRPr lang="es-PE"/>
+          </a:p>
+        </p:txBody>
       </p:sp>
       <p:sp>
         <p:nvSpPr>
@@ -9770,7 +9974,7 @@
           <a:bodyPr wrap="square" lIns="0" tIns="0" rIns="0" bIns="0" rtlCol="0" anchor="ctr"/>
           <a:lstStyle/>
           <a:p>
-            <a:pPr algn="l" indent="0" marL="0">
+            <a:pPr marL="0" indent="0" algn="l">
               <a:lnSpc>
                 <a:spcPct val="100000"/>
               </a:lnSpc>
@@ -9793,7 +9997,7 @@
       </p:sp>
       <p:sp>
         <p:nvSpPr>
-          <p:cNvPr id="25" name="Slide Number Placeholder 0"/>
+          <p:cNvPr id="34" name="Slide Number Placeholder 0"/>
           <p:cNvSpPr>
             <a:spLocks noGrp="1"/>
           </p:cNvSpPr>
@@ -9811,7 +10015,7 @@
           </a:prstGeom>
           <a:extLst>
             <a:ext uri="{C572A759-6A51-4108-AA02-DFA0A04FC94B}">
-              <ma14:wrappingTextBoxFlag xmlns:ma14="http://schemas.microsoft.com/office/mac/drawingml/2011/main" val="0"/>
+              <ma14:wrappingTextBoxFlag xmlns:ma14="http://schemas.microsoft.com/office/mac/drawingml/2011/main" xmlns="" val="0"/>
             </a:ext>
           </a:extLst>
         </p:spPr>
@@ -9832,7 +10036,7 @@
           <a:p>
             <a:pPr algn="r"/>
             <a:fld id="{F7021451-1387-4CA6-816F-3879F97B5CBC}" type="slidenum">
-              <a:rPr b="0" lang="en-US"/>
+              <a:rPr lang="en-US" b="0"/>
               <a:t>3</a:t>
             </a:fld>
             <a:endParaRPr lang="en-US"/>
@@ -9867,9 +10071,11 @@
       <p:sp>
         <p:nvSpPr>
           <p:cNvPr id="2" name="Text 0"/>
-          <p:cNvSpPr/>
+          <p:cNvSpPr>
+            <a:spLocks noGrp="1"/>
+          </p:cNvSpPr>
           <p:nvPr>
-            <p:ph idx="100" type="title" hasCustomPrompt="1"/>
+            <p:ph type="title" idx="100" hasCustomPrompt="1"/>
           </p:nvPr>
         </p:nvSpPr>
         <p:spPr>
@@ -9887,7 +10093,7 @@
           <a:bodyPr wrap="square" lIns="0" tIns="0" rIns="0" bIns="0" rtlCol="0" anchor="t"/>
           <a:lstStyle/>
           <a:p>
-            <a:pPr algn="l" indent="0" marL="0">
+            <a:pPr marL="0" indent="0" algn="l">
               <a:buNone/>
             </a:pPr>
             <a:r>
@@ -9926,14 +10132,14 @@
           <a:bodyPr wrap="square" lIns="0" tIns="0" rIns="0" bIns="0" rtlCol="0" anchor="t"/>
           <a:lstStyle/>
           <a:p>
-            <a:pPr algn="l" indent="0" marL="0">
+            <a:pPr marL="0" indent="0" algn="l">
               <a:lnSpc>
                 <a:spcPct val="100000"/>
               </a:lnSpc>
               <a:buNone/>
             </a:pPr>
             <a:r>
-              <a:rPr lang="en-US" sz="1200" b="1" spc="200" kern="0" dirty="0">
+              <a:rPr lang="en-US" sz="1200" b="1" kern="0" spc="200" dirty="0">
                 <a:solidFill>
                   <a:srgbClr val="315C3D"/>
                 </a:solidFill>
@@ -9966,6 +10172,13 @@
           </a:solidFill>
           <a:ln/>
         </p:spPr>
+        <p:txBody>
+          <a:bodyPr/>
+          <a:lstStyle/>
+          <a:p>
+            <a:endParaRPr lang="es-PE"/>
+          </a:p>
+        </p:txBody>
       </p:sp>
       <p:sp>
         <p:nvSpPr>
@@ -9988,7 +10201,7 @@
           <a:bodyPr wrap="square" lIns="0" tIns="0" rIns="0" bIns="0" rtlCol="0" anchor="ctr"/>
           <a:lstStyle/>
           <a:p>
-            <a:pPr algn="ctr" indent="0" marL="0">
+            <a:pPr marL="0" indent="0" algn="ctr">
               <a:lnSpc>
                 <a:spcPct val="100000"/>
               </a:lnSpc>
@@ -10030,7 +10243,7 @@
           <a:bodyPr wrap="square" lIns="0" tIns="0" rIns="0" bIns="0" rtlCol="0" anchor="t"/>
           <a:lstStyle/>
           <a:p>
-            <a:pPr algn="l" indent="0" marL="0">
+            <a:pPr marL="0" indent="0" algn="l">
               <a:lnSpc>
                 <a:spcPct val="100000"/>
               </a:lnSpc>
@@ -10072,7 +10285,7 @@
           <a:bodyPr wrap="square" lIns="0" tIns="0" rIns="0" bIns="0" rtlCol="0" anchor="t"/>
           <a:lstStyle/>
           <a:p>
-            <a:pPr algn="l" indent="0" marL="0">
+            <a:pPr marL="0" indent="0" algn="l">
               <a:lnSpc>
                 <a:spcPct val="100000"/>
               </a:lnSpc>
@@ -10112,6 +10325,13 @@
           </a:solidFill>
           <a:ln/>
         </p:spPr>
+        <p:txBody>
+          <a:bodyPr/>
+          <a:lstStyle/>
+          <a:p>
+            <a:endParaRPr lang="es-PE"/>
+          </a:p>
+        </p:txBody>
       </p:sp>
       <p:sp>
         <p:nvSpPr>
@@ -10134,7 +10354,7 @@
           <a:bodyPr wrap="square" lIns="0" tIns="0" rIns="0" bIns="0" rtlCol="0" anchor="ctr"/>
           <a:lstStyle/>
           <a:p>
-            <a:pPr algn="ctr" indent="0" marL="0">
+            <a:pPr marL="0" indent="0" algn="ctr">
               <a:lnSpc>
                 <a:spcPct val="100000"/>
               </a:lnSpc>
@@ -10176,7 +10396,7 @@
           <a:bodyPr wrap="square" lIns="0" tIns="0" rIns="0" bIns="0" rtlCol="0" anchor="t"/>
           <a:lstStyle/>
           <a:p>
-            <a:pPr algn="l" indent="0" marL="0">
+            <a:pPr marL="0" indent="0" algn="l">
               <a:lnSpc>
                 <a:spcPct val="100000"/>
               </a:lnSpc>
@@ -10218,7 +10438,7 @@
           <a:bodyPr wrap="square" lIns="0" tIns="0" rIns="0" bIns="0" rtlCol="0" anchor="t"/>
           <a:lstStyle/>
           <a:p>
-            <a:pPr algn="l" indent="0" marL="0">
+            <a:pPr marL="0" indent="0" algn="l">
               <a:lnSpc>
                 <a:spcPct val="100000"/>
               </a:lnSpc>
@@ -10258,6 +10478,13 @@
           </a:solidFill>
           <a:ln/>
         </p:spPr>
+        <p:txBody>
+          <a:bodyPr/>
+          <a:lstStyle/>
+          <a:p>
+            <a:endParaRPr lang="es-PE"/>
+          </a:p>
+        </p:txBody>
       </p:sp>
       <p:sp>
         <p:nvSpPr>
@@ -10280,7 +10507,7 @@
           <a:bodyPr wrap="square" lIns="0" tIns="0" rIns="0" bIns="0" rtlCol="0" anchor="ctr"/>
           <a:lstStyle/>
           <a:p>
-            <a:pPr algn="ctr" indent="0" marL="0">
+            <a:pPr marL="0" indent="0" algn="ctr">
               <a:lnSpc>
                 <a:spcPct val="100000"/>
               </a:lnSpc>
@@ -10322,7 +10549,7 @@
           <a:bodyPr wrap="square" lIns="0" tIns="0" rIns="0" bIns="0" rtlCol="0" anchor="t"/>
           <a:lstStyle/>
           <a:p>
-            <a:pPr algn="l" indent="0" marL="0">
+            <a:pPr marL="0" indent="0" algn="l">
               <a:lnSpc>
                 <a:spcPct val="100000"/>
               </a:lnSpc>
@@ -10364,7 +10591,7 @@
           <a:bodyPr wrap="square" lIns="0" tIns="0" rIns="0" bIns="0" rtlCol="0" anchor="t"/>
           <a:lstStyle/>
           <a:p>
-            <a:pPr algn="l" indent="0" marL="0">
+            <a:pPr marL="0" indent="0" algn="l">
               <a:lnSpc>
                 <a:spcPct val="100000"/>
               </a:lnSpc>
@@ -10404,6 +10631,13 @@
           </a:solidFill>
           <a:ln/>
         </p:spPr>
+        <p:txBody>
+          <a:bodyPr/>
+          <a:lstStyle/>
+          <a:p>
+            <a:endParaRPr lang="es-PE"/>
+          </a:p>
+        </p:txBody>
       </p:sp>
       <p:sp>
         <p:nvSpPr>
@@ -10426,7 +10660,7 @@
           <a:bodyPr wrap="square" lIns="0" tIns="0" rIns="0" bIns="0" rtlCol="0" anchor="ctr"/>
           <a:lstStyle/>
           <a:p>
-            <a:pPr algn="ctr" indent="0" marL="0">
+            <a:pPr marL="0" indent="0" algn="ctr">
               <a:lnSpc>
                 <a:spcPct val="100000"/>
               </a:lnSpc>
@@ -10468,7 +10702,7 @@
           <a:bodyPr wrap="square" lIns="0" tIns="0" rIns="0" bIns="0" rtlCol="0" anchor="t"/>
           <a:lstStyle/>
           <a:p>
-            <a:pPr algn="l" indent="0" marL="0">
+            <a:pPr marL="0" indent="0" algn="l">
               <a:lnSpc>
                 <a:spcPct val="100000"/>
               </a:lnSpc>
@@ -10510,7 +10744,7 @@
           <a:bodyPr wrap="square" lIns="0" tIns="0" rIns="0" bIns="0" rtlCol="0" anchor="t"/>
           <a:lstStyle/>
           <a:p>
-            <a:pPr algn="l" indent="0" marL="0">
+            <a:pPr marL="0" indent="0" algn="l">
               <a:lnSpc>
                 <a:spcPct val="100000"/>
               </a:lnSpc>
@@ -10550,6 +10784,13 @@
           </a:solidFill>
           <a:ln/>
         </p:spPr>
+        <p:txBody>
+          <a:bodyPr/>
+          <a:lstStyle/>
+          <a:p>
+            <a:endParaRPr lang="es-PE"/>
+          </a:p>
+        </p:txBody>
       </p:sp>
       <p:sp>
         <p:nvSpPr>
@@ -10572,7 +10813,7 @@
           <a:bodyPr wrap="square" lIns="0" tIns="0" rIns="0" bIns="0" rtlCol="0" anchor="ctr"/>
           <a:lstStyle/>
           <a:p>
-            <a:pPr algn="ctr" indent="0" marL="0">
+            <a:pPr marL="0" indent="0" algn="ctr">
               <a:lnSpc>
                 <a:spcPct val="100000"/>
               </a:lnSpc>
@@ -10614,7 +10855,7 @@
           <a:bodyPr wrap="square" lIns="0" tIns="0" rIns="0" bIns="0" rtlCol="0" anchor="t"/>
           <a:lstStyle/>
           <a:p>
-            <a:pPr algn="l" indent="0" marL="0">
+            <a:pPr marL="0" indent="0" algn="l">
               <a:lnSpc>
                 <a:spcPct val="100000"/>
               </a:lnSpc>
@@ -10656,7 +10897,7 @@
           <a:bodyPr wrap="square" lIns="0" tIns="0" rIns="0" bIns="0" rtlCol="0" anchor="t"/>
           <a:lstStyle/>
           <a:p>
-            <a:pPr algn="l" indent="0" marL="0">
+            <a:pPr marL="0" indent="0" algn="l">
               <a:lnSpc>
                 <a:spcPct val="100000"/>
               </a:lnSpc>
@@ -10698,6 +10939,13 @@
           </a:solidFill>
           <a:ln/>
         </p:spPr>
+        <p:txBody>
+          <a:bodyPr/>
+          <a:lstStyle/>
+          <a:p>
+            <a:endParaRPr lang="es-PE"/>
+          </a:p>
+        </p:txBody>
       </p:sp>
       <p:sp>
         <p:nvSpPr>
@@ -10720,7 +10968,7 @@
           <a:bodyPr wrap="square" lIns="0" tIns="0" rIns="0" bIns="0" rtlCol="0" anchor="t"/>
           <a:lstStyle/>
           <a:p>
-            <a:pPr algn="l" indent="0" marL="0">
+            <a:pPr marL="0" indent="0" algn="l">
               <a:lnSpc>
                 <a:spcPct val="100000"/>
               </a:lnSpc>
@@ -10762,7 +11010,7 @@
           <a:bodyPr wrap="square" lIns="0" tIns="0" rIns="0" bIns="0" rtlCol="0" anchor="t"/>
           <a:lstStyle/>
           <a:p>
-            <a:pPr algn="l" indent="0" marL="0">
+            <a:pPr marL="0" indent="0" algn="l">
               <a:lnSpc>
                 <a:spcPct val="100000"/>
               </a:lnSpc>
@@ -10804,7 +11052,7 @@
           <a:bodyPr wrap="square" lIns="0" tIns="0" rIns="0" bIns="0" rtlCol="0" anchor="t"/>
           <a:lstStyle/>
           <a:p>
-            <a:pPr algn="l" indent="0" marL="0">
+            <a:pPr marL="0" indent="0" algn="l">
               <a:lnSpc>
                 <a:spcPct val="100000"/>
               </a:lnSpc>
@@ -10846,7 +11094,7 @@
           <a:bodyPr wrap="square" lIns="0" tIns="0" rIns="0" bIns="0" rtlCol="0" anchor="t"/>
           <a:lstStyle/>
           <a:p>
-            <a:pPr algn="l" indent="0" marL="0">
+            <a:pPr marL="0" indent="0" algn="l">
               <a:lnSpc>
                 <a:spcPct val="100000"/>
               </a:lnSpc>
@@ -10888,7 +11136,7 @@
           <a:bodyPr wrap="square" lIns="0" tIns="0" rIns="0" bIns="0" rtlCol="0" anchor="t"/>
           <a:lstStyle/>
           <a:p>
-            <a:pPr algn="l" indent="0" marL="0">
+            <a:pPr marL="0" indent="0" algn="l">
               <a:lnSpc>
                 <a:spcPct val="100000"/>
               </a:lnSpc>
@@ -10930,7 +11178,7 @@
           <a:bodyPr wrap="square" lIns="0" tIns="0" rIns="0" bIns="0" rtlCol="0" anchor="t"/>
           <a:lstStyle/>
           <a:p>
-            <a:pPr algn="l" indent="0" marL="0">
+            <a:pPr marL="0" indent="0" algn="l">
               <a:lnSpc>
                 <a:spcPct val="100000"/>
               </a:lnSpc>
@@ -10972,7 +11220,7 @@
           <a:bodyPr wrap="square" lIns="0" tIns="0" rIns="0" bIns="0" rtlCol="0" anchor="t"/>
           <a:lstStyle/>
           <a:p>
-            <a:pPr algn="l" indent="0" marL="0">
+            <a:pPr marL="0" indent="0" algn="l">
               <a:lnSpc>
                 <a:spcPct val="100000"/>
               </a:lnSpc>
@@ -11014,7 +11262,7 @@
           <a:bodyPr wrap="square" lIns="0" tIns="0" rIns="0" bIns="0" rtlCol="0" anchor="t"/>
           <a:lstStyle/>
           <a:p>
-            <a:pPr algn="l" indent="0" marL="0">
+            <a:pPr marL="0" indent="0" algn="l">
               <a:lnSpc>
                 <a:spcPct val="100000"/>
               </a:lnSpc>
@@ -11056,7 +11304,7 @@
           <a:bodyPr wrap="square" lIns="0" tIns="0" rIns="0" bIns="0" rtlCol="0" anchor="t"/>
           <a:lstStyle/>
           <a:p>
-            <a:pPr algn="l" indent="0" marL="0">
+            <a:pPr marL="0" indent="0" algn="l">
               <a:lnSpc>
                 <a:spcPct val="100000"/>
               </a:lnSpc>
@@ -11098,7 +11346,7 @@
           <a:bodyPr wrap="square" lIns="0" tIns="0" rIns="0" bIns="0" rtlCol="0" anchor="t"/>
           <a:lstStyle/>
           <a:p>
-            <a:pPr algn="l" indent="0" marL="0">
+            <a:pPr marL="0" indent="0" algn="l">
               <a:lnSpc>
                 <a:spcPct val="100000"/>
               </a:lnSpc>
@@ -11140,7 +11388,7 @@
           <a:bodyPr wrap="square" lIns="0" tIns="0" rIns="0" bIns="0" rtlCol="0" anchor="t"/>
           <a:lstStyle/>
           <a:p>
-            <a:pPr algn="l" indent="0" marL="0">
+            <a:pPr marL="0" indent="0" algn="l">
               <a:lnSpc>
                 <a:spcPct val="100000"/>
               </a:lnSpc>
@@ -11182,7 +11430,7 @@
           <a:bodyPr wrap="square" lIns="0" tIns="0" rIns="0" bIns="0" rtlCol="0" anchor="t"/>
           <a:lstStyle/>
           <a:p>
-            <a:pPr algn="l" indent="0" marL="0">
+            <a:pPr marL="0" indent="0" algn="l">
               <a:lnSpc>
                 <a:spcPct val="100000"/>
               </a:lnSpc>
@@ -11224,7 +11472,7 @@
           <a:bodyPr wrap="square" lIns="0" tIns="0" rIns="0" bIns="0" rtlCol="0" anchor="t"/>
           <a:lstStyle/>
           <a:p>
-            <a:pPr algn="l" indent="0" marL="0">
+            <a:pPr marL="0" indent="0" algn="l">
               <a:lnSpc>
                 <a:spcPct val="100000"/>
               </a:lnSpc>
@@ -11247,7 +11495,7 @@
       </p:sp>
       <p:sp>
         <p:nvSpPr>
-          <p:cNvPr id="25" name="Slide Number Placeholder 0"/>
+          <p:cNvPr id="38" name="Slide Number Placeholder 0"/>
           <p:cNvSpPr>
             <a:spLocks noGrp="1"/>
           </p:cNvSpPr>
@@ -11265,7 +11513,7 @@
           </a:prstGeom>
           <a:extLst>
             <a:ext uri="{C572A759-6A51-4108-AA02-DFA0A04FC94B}">
-              <ma14:wrappingTextBoxFlag xmlns:ma14="http://schemas.microsoft.com/office/mac/drawingml/2011/main" val="0"/>
+              <ma14:wrappingTextBoxFlag xmlns:ma14="http://schemas.microsoft.com/office/mac/drawingml/2011/main" xmlns="" val="0"/>
             </a:ext>
           </a:extLst>
         </p:spPr>
@@ -11286,7 +11534,7 @@
           <a:p>
             <a:pPr algn="r"/>
             <a:fld id="{F7021451-1387-4CA6-816F-3879F97B5CBC}" type="slidenum">
-              <a:rPr b="0" lang="en-US"/>
+              <a:rPr lang="en-US" b="0"/>
               <a:t>4</a:t>
             </a:fld>
             <a:endParaRPr lang="en-US"/>
@@ -11321,9 +11569,11 @@
       <p:sp>
         <p:nvSpPr>
           <p:cNvPr id="2" name="Text 0"/>
-          <p:cNvSpPr/>
+          <p:cNvSpPr>
+            <a:spLocks noGrp="1"/>
+          </p:cNvSpPr>
           <p:nvPr>
-            <p:ph idx="100" type="title" hasCustomPrompt="1"/>
+            <p:ph type="title" idx="100" hasCustomPrompt="1"/>
           </p:nvPr>
         </p:nvSpPr>
         <p:spPr>
@@ -11341,7 +11591,7 @@
           <a:bodyPr wrap="square" lIns="0" tIns="0" rIns="0" bIns="0" rtlCol="0" anchor="t"/>
           <a:lstStyle/>
           <a:p>
-            <a:pPr algn="l" indent="0" marL="0">
+            <a:pPr marL="0" indent="0" algn="l">
               <a:buNone/>
             </a:pPr>
             <a:r>
@@ -11380,14 +11630,14 @@
           <a:bodyPr wrap="square" lIns="0" tIns="0" rIns="0" bIns="0" rtlCol="0" anchor="t"/>
           <a:lstStyle/>
           <a:p>
-            <a:pPr algn="l" indent="0" marL="0">
+            <a:pPr marL="0" indent="0" algn="l">
               <a:lnSpc>
                 <a:spcPct val="100000"/>
               </a:lnSpc>
               <a:buNone/>
             </a:pPr>
             <a:r>
-              <a:rPr lang="en-US" sz="1200" b="1" spc="200" kern="0" dirty="0">
+              <a:rPr lang="en-US" sz="1200" b="1" kern="0" spc="200" dirty="0">
                 <a:solidFill>
                   <a:srgbClr val="315C3D"/>
                 </a:solidFill>
@@ -11422,6 +11672,13 @@
           </a:solidFill>
           <a:ln/>
         </p:spPr>
+        <p:txBody>
+          <a:bodyPr/>
+          <a:lstStyle/>
+          <a:p>
+            <a:endParaRPr lang="es-PE"/>
+          </a:p>
+        </p:txBody>
       </p:sp>
       <p:sp>
         <p:nvSpPr>
@@ -11444,7 +11701,7 @@
           <a:bodyPr wrap="square" lIns="0" tIns="0" rIns="0" bIns="0" rtlCol="0" anchor="t"/>
           <a:lstStyle/>
           <a:p>
-            <a:pPr algn="l" indent="0" marL="0">
+            <a:pPr marL="0" indent="0" algn="l">
               <a:lnSpc>
                 <a:spcPct val="100000"/>
               </a:lnSpc>
@@ -11491,6 +11748,13 @@
             <a:prstDash val="solid"/>
           </a:ln>
         </p:spPr>
+        <p:txBody>
+          <a:bodyPr/>
+          <a:lstStyle/>
+          <a:p>
+            <a:endParaRPr lang="es-PE"/>
+          </a:p>
+        </p:txBody>
       </p:sp>
       <p:sp>
         <p:nvSpPr>
@@ -11513,7 +11777,7 @@
           <a:bodyPr wrap="square" lIns="0" tIns="0" rIns="0" bIns="0" rtlCol="0" anchor="ctr"/>
           <a:lstStyle/>
           <a:p>
-            <a:pPr algn="ctr" indent="0" marL="0">
+            <a:pPr marL="0" indent="0" algn="ctr">
               <a:lnSpc>
                 <a:spcPct val="100000"/>
               </a:lnSpc>
@@ -11560,6 +11824,13 @@
             <a:prstDash val="solid"/>
           </a:ln>
         </p:spPr>
+        <p:txBody>
+          <a:bodyPr/>
+          <a:lstStyle/>
+          <a:p>
+            <a:endParaRPr lang="es-PE"/>
+          </a:p>
+        </p:txBody>
       </p:sp>
       <p:sp>
         <p:nvSpPr>
@@ -11582,7 +11853,7 @@
           <a:bodyPr wrap="square" lIns="0" tIns="0" rIns="0" bIns="0" rtlCol="0" anchor="ctr"/>
           <a:lstStyle/>
           <a:p>
-            <a:pPr algn="ctr" indent="0" marL="0">
+            <a:pPr marL="0" indent="0" algn="ctr">
               <a:lnSpc>
                 <a:spcPct val="100000"/>
               </a:lnSpc>
@@ -11629,6 +11900,13 @@
             <a:prstDash val="solid"/>
           </a:ln>
         </p:spPr>
+        <p:txBody>
+          <a:bodyPr/>
+          <a:lstStyle/>
+          <a:p>
+            <a:endParaRPr lang="es-PE"/>
+          </a:p>
+        </p:txBody>
       </p:sp>
       <p:sp>
         <p:nvSpPr>
@@ -11651,7 +11929,7 @@
           <a:bodyPr wrap="square" lIns="0" tIns="0" rIns="0" bIns="0" rtlCol="0" anchor="ctr"/>
           <a:lstStyle/>
           <a:p>
-            <a:pPr algn="ctr" indent="0" marL="0">
+            <a:pPr marL="0" indent="0" algn="ctr">
               <a:lnSpc>
                 <a:spcPct val="100000"/>
               </a:lnSpc>
@@ -11698,6 +11976,13 @@
             <a:prstDash val="solid"/>
           </a:ln>
         </p:spPr>
+        <p:txBody>
+          <a:bodyPr/>
+          <a:lstStyle/>
+          <a:p>
+            <a:endParaRPr lang="es-PE"/>
+          </a:p>
+        </p:txBody>
       </p:sp>
       <p:sp>
         <p:nvSpPr>
@@ -11720,7 +12005,7 @@
           <a:bodyPr wrap="square" lIns="0" tIns="0" rIns="0" bIns="0" rtlCol="0" anchor="ctr"/>
           <a:lstStyle/>
           <a:p>
-            <a:pPr algn="ctr" indent="0" marL="0">
+            <a:pPr marL="0" indent="0" algn="ctr">
               <a:lnSpc>
                 <a:spcPct val="100000"/>
               </a:lnSpc>
@@ -11767,6 +12052,13 @@
             <a:prstDash val="solid"/>
           </a:ln>
         </p:spPr>
+        <p:txBody>
+          <a:bodyPr/>
+          <a:lstStyle/>
+          <a:p>
+            <a:endParaRPr lang="es-PE"/>
+          </a:p>
+        </p:txBody>
       </p:sp>
       <p:sp>
         <p:nvSpPr>
@@ -11789,7 +12081,7 @@
           <a:bodyPr wrap="square" lIns="0" tIns="0" rIns="0" bIns="0" rtlCol="0" anchor="ctr"/>
           <a:lstStyle/>
           <a:p>
-            <a:pPr algn="ctr" indent="0" marL="0">
+            <a:pPr marL="0" indent="0" algn="ctr">
               <a:lnSpc>
                 <a:spcPct val="100000"/>
               </a:lnSpc>
@@ -11833,6 +12125,13 @@
             <a:tailEnd type="triangle"/>
           </a:ln>
         </p:spPr>
+        <p:txBody>
+          <a:bodyPr/>
+          <a:lstStyle/>
+          <a:p>
+            <a:endParaRPr lang="es-PE"/>
+          </a:p>
+        </p:txBody>
       </p:sp>
       <p:sp>
         <p:nvSpPr>
@@ -11855,7 +12154,7 @@
           <a:bodyPr wrap="square" lIns="0" tIns="0" rIns="0" bIns="0" rtlCol="0" anchor="t"/>
           <a:lstStyle/>
           <a:p>
-            <a:pPr algn="l" indent="0" marL="0">
+            <a:pPr marL="0" indent="0" algn="l">
               <a:lnSpc>
                 <a:spcPct val="100000"/>
               </a:lnSpc>
@@ -11902,6 +12201,13 @@
             <a:prstDash val="solid"/>
           </a:ln>
         </p:spPr>
+        <p:txBody>
+          <a:bodyPr/>
+          <a:lstStyle/>
+          <a:p>
+            <a:endParaRPr lang="es-PE"/>
+          </a:p>
+        </p:txBody>
       </p:sp>
       <p:sp>
         <p:nvSpPr>
@@ -11924,7 +12230,7 @@
           <a:bodyPr wrap="square" lIns="0" tIns="0" rIns="0" bIns="0" rtlCol="0" anchor="t"/>
           <a:lstStyle/>
           <a:p>
-            <a:pPr algn="l" indent="0" marL="0">
+            <a:pPr marL="0" indent="0" algn="l">
               <a:lnSpc>
                 <a:spcPct val="100000"/>
               </a:lnSpc>
@@ -11966,6 +12272,13 @@
           </a:solidFill>
           <a:ln/>
         </p:spPr>
+        <p:txBody>
+          <a:bodyPr/>
+          <a:lstStyle/>
+          <a:p>
+            <a:endParaRPr lang="es-PE"/>
+          </a:p>
+        </p:txBody>
       </p:sp>
       <p:sp>
         <p:nvSpPr>
@@ -11988,7 +12301,7 @@
           <a:bodyPr wrap="square" lIns="0" tIns="0" rIns="0" bIns="0" rtlCol="0" anchor="ctr"/>
           <a:lstStyle/>
           <a:p>
-            <a:pPr algn="l" indent="0" marL="0">
+            <a:pPr marL="0" indent="0" algn="l">
               <a:lnSpc>
                 <a:spcPct val="100000"/>
               </a:lnSpc>
@@ -12030,6 +12343,13 @@
           </a:solidFill>
           <a:ln/>
         </p:spPr>
+        <p:txBody>
+          <a:bodyPr/>
+          <a:lstStyle/>
+          <a:p>
+            <a:endParaRPr lang="es-PE"/>
+          </a:p>
+        </p:txBody>
       </p:sp>
       <p:sp>
         <p:nvSpPr>
@@ -12052,7 +12372,7 @@
           <a:bodyPr wrap="square" lIns="0" tIns="0" rIns="0" bIns="0" rtlCol="0" anchor="ctr"/>
           <a:lstStyle/>
           <a:p>
-            <a:pPr algn="l" indent="0" marL="0">
+            <a:pPr marL="0" indent="0" algn="l">
               <a:lnSpc>
                 <a:spcPct val="100000"/>
               </a:lnSpc>
@@ -12094,6 +12414,13 @@
           </a:solidFill>
           <a:ln/>
         </p:spPr>
+        <p:txBody>
+          <a:bodyPr/>
+          <a:lstStyle/>
+          <a:p>
+            <a:endParaRPr lang="es-PE"/>
+          </a:p>
+        </p:txBody>
       </p:sp>
       <p:sp>
         <p:nvSpPr>
@@ -12116,7 +12443,7 @@
           <a:bodyPr wrap="square" lIns="0" tIns="0" rIns="0" bIns="0" rtlCol="0" anchor="ctr"/>
           <a:lstStyle/>
           <a:p>
-            <a:pPr algn="l" indent="0" marL="0">
+            <a:pPr marL="0" indent="0" algn="l">
               <a:lnSpc>
                 <a:spcPct val="100000"/>
               </a:lnSpc>
@@ -12158,6 +12485,13 @@
           </a:solidFill>
           <a:ln/>
         </p:spPr>
+        <p:txBody>
+          <a:bodyPr/>
+          <a:lstStyle/>
+          <a:p>
+            <a:endParaRPr lang="es-PE"/>
+          </a:p>
+        </p:txBody>
       </p:sp>
       <p:sp>
         <p:nvSpPr>
@@ -12180,7 +12514,7 @@
           <a:bodyPr wrap="square" lIns="0" tIns="0" rIns="0" bIns="0" rtlCol="0" anchor="ctr"/>
           <a:lstStyle/>
           <a:p>
-            <a:pPr algn="l" indent="0" marL="0">
+            <a:pPr marL="0" indent="0" algn="l">
               <a:lnSpc>
                 <a:spcPct val="100000"/>
               </a:lnSpc>
@@ -12222,14 +12556,14 @@
           <a:bodyPr wrap="square" lIns="0" tIns="0" rIns="0" bIns="0" rtlCol="0" anchor="t"/>
           <a:lstStyle/>
           <a:p>
-            <a:pPr algn="l" indent="0" marL="0">
+            <a:pPr marL="0" indent="0" algn="l">
               <a:lnSpc>
                 <a:spcPct val="100000"/>
               </a:lnSpc>
               <a:buNone/>
             </a:pPr>
             <a:r>
-              <a:rPr lang="en-US" sz="1100" b="1" spc="100" kern="0" dirty="0">
+              <a:rPr lang="en-US" sz="1100" b="1" kern="0" spc="100" dirty="0">
                 <a:solidFill>
                   <a:srgbClr val="C96A39"/>
                 </a:solidFill>
@@ -12264,6 +12598,13 @@
           </a:solidFill>
           <a:ln/>
         </p:spPr>
+        <p:txBody>
+          <a:bodyPr/>
+          <a:lstStyle/>
+          <a:p>
+            <a:endParaRPr lang="es-PE"/>
+          </a:p>
+        </p:txBody>
       </p:sp>
       <p:sp>
         <p:nvSpPr>
@@ -12286,7 +12627,7 @@
           <a:bodyPr wrap="square" lIns="0" tIns="0" rIns="0" bIns="0" rtlCol="0" anchor="ctr"/>
           <a:lstStyle/>
           <a:p>
-            <a:pPr algn="ctr" indent="0" marL="0">
+            <a:pPr marL="0" indent="0" algn="ctr">
               <a:lnSpc>
                 <a:spcPct val="100000"/>
               </a:lnSpc>
@@ -12328,6 +12669,13 @@
           </a:solidFill>
           <a:ln/>
         </p:spPr>
+        <p:txBody>
+          <a:bodyPr/>
+          <a:lstStyle/>
+          <a:p>
+            <a:endParaRPr lang="es-PE"/>
+          </a:p>
+        </p:txBody>
       </p:sp>
       <p:sp>
         <p:nvSpPr>
@@ -12350,7 +12698,7 @@
           <a:bodyPr wrap="square" lIns="0" tIns="0" rIns="0" bIns="0" rtlCol="0" anchor="ctr"/>
           <a:lstStyle/>
           <a:p>
-            <a:pPr algn="ctr" indent="0" marL="0">
+            <a:pPr marL="0" indent="0" algn="ctr">
               <a:lnSpc>
                 <a:spcPct val="100000"/>
               </a:lnSpc>
@@ -12392,6 +12740,13 @@
           </a:solidFill>
           <a:ln/>
         </p:spPr>
+        <p:txBody>
+          <a:bodyPr/>
+          <a:lstStyle/>
+          <a:p>
+            <a:endParaRPr lang="es-PE"/>
+          </a:p>
+        </p:txBody>
       </p:sp>
       <p:sp>
         <p:nvSpPr>
@@ -12414,7 +12769,7 @@
           <a:bodyPr wrap="square" lIns="0" tIns="0" rIns="0" bIns="0" rtlCol="0" anchor="ctr"/>
           <a:lstStyle/>
           <a:p>
-            <a:pPr algn="ctr" indent="0" marL="0">
+            <a:pPr marL="0" indent="0" algn="ctr">
               <a:lnSpc>
                 <a:spcPct val="100000"/>
               </a:lnSpc>
@@ -12456,6 +12811,13 @@
           </a:solidFill>
           <a:ln/>
         </p:spPr>
+        <p:txBody>
+          <a:bodyPr/>
+          <a:lstStyle/>
+          <a:p>
+            <a:endParaRPr lang="es-PE"/>
+          </a:p>
+        </p:txBody>
       </p:sp>
       <p:sp>
         <p:nvSpPr>
@@ -12478,7 +12840,7 @@
           <a:bodyPr wrap="square" lIns="0" tIns="0" rIns="0" bIns="0" rtlCol="0" anchor="ctr"/>
           <a:lstStyle/>
           <a:p>
-            <a:pPr algn="ctr" indent="0" marL="0">
+            <a:pPr marL="0" indent="0" algn="ctr">
               <a:lnSpc>
                 <a:spcPct val="100000"/>
               </a:lnSpc>
@@ -12520,6 +12882,13 @@
           </a:solidFill>
           <a:ln/>
         </p:spPr>
+        <p:txBody>
+          <a:bodyPr/>
+          <a:lstStyle/>
+          <a:p>
+            <a:endParaRPr lang="es-PE"/>
+          </a:p>
+        </p:txBody>
       </p:sp>
       <p:sp>
         <p:nvSpPr>
@@ -12542,7 +12911,7 @@
           <a:bodyPr wrap="square" lIns="0" tIns="0" rIns="0" bIns="0" rtlCol="0" anchor="ctr"/>
           <a:lstStyle/>
           <a:p>
-            <a:pPr algn="ctr" indent="0" marL="0">
+            <a:pPr marL="0" indent="0" algn="ctr">
               <a:lnSpc>
                 <a:spcPct val="100000"/>
               </a:lnSpc>
@@ -12584,6 +12953,13 @@
           </a:solidFill>
           <a:ln/>
         </p:spPr>
+        <p:txBody>
+          <a:bodyPr/>
+          <a:lstStyle/>
+          <a:p>
+            <a:endParaRPr lang="es-PE"/>
+          </a:p>
+        </p:txBody>
       </p:sp>
       <p:sp>
         <p:nvSpPr>
@@ -12606,7 +12982,7 @@
           <a:bodyPr wrap="square" lIns="0" tIns="0" rIns="0" bIns="0" rtlCol="0" anchor="ctr"/>
           <a:lstStyle/>
           <a:p>
-            <a:pPr algn="ctr" indent="0" marL="0">
+            <a:pPr marL="0" indent="0" algn="ctr">
               <a:lnSpc>
                 <a:spcPct val="100000"/>
               </a:lnSpc>
@@ -12648,6 +13024,13 @@
           </a:solidFill>
           <a:ln/>
         </p:spPr>
+        <p:txBody>
+          <a:bodyPr/>
+          <a:lstStyle/>
+          <a:p>
+            <a:endParaRPr lang="es-PE"/>
+          </a:p>
+        </p:txBody>
       </p:sp>
       <p:sp>
         <p:nvSpPr>
@@ -12670,7 +13053,7 @@
           <a:bodyPr wrap="square" lIns="0" tIns="0" rIns="0" bIns="0" rtlCol="0" anchor="ctr"/>
           <a:lstStyle/>
           <a:p>
-            <a:pPr algn="ctr" indent="0" marL="0">
+            <a:pPr marL="0" indent="0" algn="ctr">
               <a:lnSpc>
                 <a:spcPct val="100000"/>
               </a:lnSpc>
@@ -12712,7 +13095,7 @@
           <a:bodyPr wrap="square" lIns="0" tIns="0" rIns="0" bIns="0" rtlCol="0" anchor="ctr"/>
           <a:lstStyle/>
           <a:p>
-            <a:pPr algn="l" indent="0" marL="0">
+            <a:pPr marL="0" indent="0" algn="l">
               <a:lnSpc>
                 <a:spcPct val="100000"/>
               </a:lnSpc>
@@ -12754,7 +13137,7 @@
           <a:bodyPr wrap="square" lIns="0" tIns="0" rIns="0" bIns="0" rtlCol="0" anchor="t"/>
           <a:lstStyle/>
           <a:p>
-            <a:pPr algn="l" indent="0" marL="0">
+            <a:pPr marL="0" indent="0" algn="l">
               <a:lnSpc>
                 <a:spcPct val="100000"/>
               </a:lnSpc>
@@ -12798,6 +13181,13 @@
             <a:tailEnd type="triangle"/>
           </a:ln>
         </p:spPr>
+        <p:txBody>
+          <a:bodyPr/>
+          <a:lstStyle/>
+          <a:p>
+            <a:endParaRPr lang="es-PE"/>
+          </a:p>
+        </p:txBody>
       </p:sp>
       <p:sp>
         <p:nvSpPr>
@@ -12820,7 +13210,7 @@
           <a:bodyPr wrap="square" lIns="0" tIns="0" rIns="0" bIns="0" rtlCol="0" anchor="t"/>
           <a:lstStyle/>
           <a:p>
-            <a:pPr algn="l" indent="0" marL="0">
+            <a:pPr marL="0" indent="0" algn="l">
               <a:lnSpc>
                 <a:spcPct val="100000"/>
               </a:lnSpc>
@@ -12862,6 +13252,13 @@
           </a:solidFill>
           <a:ln/>
         </p:spPr>
+        <p:txBody>
+          <a:bodyPr/>
+          <a:lstStyle/>
+          <a:p>
+            <a:endParaRPr lang="es-PE"/>
+          </a:p>
+        </p:txBody>
       </p:sp>
       <p:sp>
         <p:nvSpPr>
@@ -12884,7 +13281,7 @@
           <a:bodyPr wrap="square" lIns="0" tIns="0" rIns="0" bIns="0" rtlCol="0" anchor="ctr"/>
           <a:lstStyle/>
           <a:p>
-            <a:pPr algn="ctr" indent="0" marL="0">
+            <a:pPr marL="0" indent="0" algn="ctr">
               <a:lnSpc>
                 <a:spcPct val="100000"/>
               </a:lnSpc>
@@ -12907,7 +13304,7 @@
       </p:sp>
       <p:sp>
         <p:nvSpPr>
-          <p:cNvPr id="25" name="Slide Number Placeholder 0"/>
+          <p:cNvPr id="49" name="Slide Number Placeholder 0"/>
           <p:cNvSpPr>
             <a:spLocks noGrp="1"/>
           </p:cNvSpPr>
@@ -12925,7 +13322,7 @@
           </a:prstGeom>
           <a:extLst>
             <a:ext uri="{C572A759-6A51-4108-AA02-DFA0A04FC94B}">
-              <ma14:wrappingTextBoxFlag xmlns:ma14="http://schemas.microsoft.com/office/mac/drawingml/2011/main" val="0"/>
+              <ma14:wrappingTextBoxFlag xmlns:ma14="http://schemas.microsoft.com/office/mac/drawingml/2011/main" xmlns="" val="0"/>
             </a:ext>
           </a:extLst>
         </p:spPr>
@@ -12946,7 +13343,7 @@
           <a:p>
             <a:pPr algn="r"/>
             <a:fld id="{F7021451-1387-4CA6-816F-3879F97B5CBC}" type="slidenum">
-              <a:rPr b="0" lang="en-US"/>
+              <a:rPr lang="en-US" b="0"/>
               <a:t>5</a:t>
             </a:fld>
             <a:endParaRPr lang="en-US"/>
@@ -12981,9 +13378,11 @@
       <p:sp>
         <p:nvSpPr>
           <p:cNvPr id="2" name="Text 0"/>
-          <p:cNvSpPr/>
+          <p:cNvSpPr>
+            <a:spLocks noGrp="1"/>
+          </p:cNvSpPr>
           <p:nvPr>
-            <p:ph idx="100" type="title" hasCustomPrompt="1"/>
+            <p:ph type="title" idx="100" hasCustomPrompt="1"/>
           </p:nvPr>
         </p:nvSpPr>
         <p:spPr>
@@ -13001,7 +13400,7 @@
           <a:bodyPr wrap="square" lIns="0" tIns="0" rIns="0" bIns="0" rtlCol="0" anchor="t"/>
           <a:lstStyle/>
           <a:p>
-            <a:pPr algn="l" indent="0" marL="0">
+            <a:pPr marL="0" indent="0" algn="l">
               <a:buNone/>
             </a:pPr>
             <a:r>
@@ -13040,14 +13439,14 @@
           <a:bodyPr wrap="square" lIns="0" tIns="0" rIns="0" bIns="0" rtlCol="0" anchor="t"/>
           <a:lstStyle/>
           <a:p>
-            <a:pPr algn="l" indent="0" marL="0">
+            <a:pPr marL="0" indent="0" algn="l">
               <a:lnSpc>
                 <a:spcPct val="100000"/>
               </a:lnSpc>
               <a:buNone/>
             </a:pPr>
             <a:r>
-              <a:rPr lang="en-US" sz="1200" b="1" spc="200" kern="0" dirty="0">
+              <a:rPr lang="en-US" sz="1200" b="1" kern="0" spc="200" dirty="0">
                 <a:solidFill>
                   <a:srgbClr val="315C3D"/>
                 </a:solidFill>
@@ -13063,14 +13462,14 @@
       </p:sp>
       <p:pic>
         <p:nvPicPr>
-          <p:cNvPr id="4" name="Image 0" descr="Diagrama de clases de Sazloop">    </p:cNvPr>
+          <p:cNvPr id="4" name="Image 0" descr="Diagrama de clases de Sazloop"/>
           <p:cNvPicPr>
             <a:picLocks noChangeAspect="1"/>
           </p:cNvPicPr>
           <p:nvPr/>
         </p:nvPicPr>
         <p:blipFill>
-          <a:blip r:embed="rId1"/>
+          <a:blip r:embed="rId3"/>
           <a:stretch>
             <a:fillRect/>
           </a:stretch>
@@ -13106,6 +13505,13 @@
             <a:prstDash val="solid"/>
           </a:ln>
         </p:spPr>
+        <p:txBody>
+          <a:bodyPr/>
+          <a:lstStyle/>
+          <a:p>
+            <a:endParaRPr lang="es-PE"/>
+          </a:p>
+        </p:txBody>
       </p:sp>
       <p:sp>
         <p:nvSpPr>
@@ -13126,6 +13532,13 @@
           </a:solidFill>
           <a:ln/>
         </p:spPr>
+        <p:txBody>
+          <a:bodyPr/>
+          <a:lstStyle/>
+          <a:p>
+            <a:endParaRPr lang="es-PE"/>
+          </a:p>
+        </p:txBody>
       </p:sp>
       <p:sp>
         <p:nvSpPr>
@@ -13148,7 +13561,7 @@
           <a:bodyPr wrap="square" lIns="0" tIns="0" rIns="0" bIns="0" rtlCol="0" anchor="t"/>
           <a:lstStyle/>
           <a:p>
-            <a:pPr algn="l" indent="0" marL="0">
+            <a:pPr marL="0" indent="0" algn="l">
               <a:lnSpc>
                 <a:spcPct val="100000"/>
               </a:lnSpc>
@@ -13190,7 +13603,7 @@
           <a:bodyPr wrap="square" lIns="0" tIns="0" rIns="0" bIns="0" rtlCol="0" anchor="t"/>
           <a:lstStyle/>
           <a:p>
-            <a:pPr algn="l" indent="0" marL="0">
+            <a:pPr marL="0" indent="0" algn="l">
               <a:lnSpc>
                 <a:spcPct val="100000"/>
               </a:lnSpc>
@@ -13230,6 +13643,13 @@
           </a:solidFill>
           <a:ln/>
         </p:spPr>
+        <p:txBody>
+          <a:bodyPr/>
+          <a:lstStyle/>
+          <a:p>
+            <a:endParaRPr lang="es-PE"/>
+          </a:p>
+        </p:txBody>
       </p:sp>
       <p:sp>
         <p:nvSpPr>
@@ -13252,7 +13672,7 @@
           <a:bodyPr wrap="square" lIns="0" tIns="0" rIns="0" bIns="0" rtlCol="0" anchor="t"/>
           <a:lstStyle/>
           <a:p>
-            <a:pPr algn="l" indent="0" marL="0">
+            <a:pPr marL="0" indent="0" algn="l">
               <a:lnSpc>
                 <a:spcPct val="100000"/>
               </a:lnSpc>
@@ -13294,7 +13714,7 @@
           <a:bodyPr wrap="square" lIns="0" tIns="0" rIns="0" bIns="0" rtlCol="0" anchor="t"/>
           <a:lstStyle/>
           <a:p>
-            <a:pPr algn="l" indent="0" marL="0">
+            <a:pPr marL="0" indent="0" algn="l">
               <a:lnSpc>
                 <a:spcPct val="100000"/>
               </a:lnSpc>
@@ -13334,6 +13754,13 @@
           </a:solidFill>
           <a:ln/>
         </p:spPr>
+        <p:txBody>
+          <a:bodyPr/>
+          <a:lstStyle/>
+          <a:p>
+            <a:endParaRPr lang="es-PE"/>
+          </a:p>
+        </p:txBody>
       </p:sp>
       <p:sp>
         <p:nvSpPr>
@@ -13356,7 +13783,7 @@
           <a:bodyPr wrap="square" lIns="0" tIns="0" rIns="0" bIns="0" rtlCol="0" anchor="t"/>
           <a:lstStyle/>
           <a:p>
-            <a:pPr algn="l" indent="0" marL="0">
+            <a:pPr marL="0" indent="0" algn="l">
               <a:lnSpc>
                 <a:spcPct val="100000"/>
               </a:lnSpc>
@@ -13398,7 +13825,7 @@
           <a:bodyPr wrap="square" lIns="0" tIns="0" rIns="0" bIns="0" rtlCol="0" anchor="t"/>
           <a:lstStyle/>
           <a:p>
-            <a:pPr algn="l" indent="0" marL="0">
+            <a:pPr marL="0" indent="0" algn="l">
               <a:lnSpc>
                 <a:spcPct val="100000"/>
               </a:lnSpc>
@@ -13438,6 +13865,13 @@
           </a:solidFill>
           <a:ln/>
         </p:spPr>
+        <p:txBody>
+          <a:bodyPr/>
+          <a:lstStyle/>
+          <a:p>
+            <a:endParaRPr lang="es-PE"/>
+          </a:p>
+        </p:txBody>
       </p:sp>
       <p:sp>
         <p:nvSpPr>
@@ -13460,7 +13894,7 @@
           <a:bodyPr wrap="square" lIns="0" tIns="0" rIns="0" bIns="0" rtlCol="0" anchor="t"/>
           <a:lstStyle/>
           <a:p>
-            <a:pPr algn="l" indent="0" marL="0">
+            <a:pPr marL="0" indent="0" algn="l">
               <a:lnSpc>
                 <a:spcPct val="100000"/>
               </a:lnSpc>
@@ -13502,7 +13936,7 @@
           <a:bodyPr wrap="square" lIns="0" tIns="0" rIns="0" bIns="0" rtlCol="0" anchor="t"/>
           <a:lstStyle/>
           <a:p>
-            <a:pPr algn="l" indent="0" marL="0">
+            <a:pPr marL="0" indent="0" algn="l">
               <a:lnSpc>
                 <a:spcPct val="100000"/>
               </a:lnSpc>
@@ -13542,6 +13976,13 @@
           </a:solidFill>
           <a:ln/>
         </p:spPr>
+        <p:txBody>
+          <a:bodyPr/>
+          <a:lstStyle/>
+          <a:p>
+            <a:endParaRPr lang="es-PE"/>
+          </a:p>
+        </p:txBody>
       </p:sp>
       <p:sp>
         <p:nvSpPr>
@@ -13564,7 +14005,7 @@
           <a:bodyPr wrap="square" lIns="0" tIns="0" rIns="0" bIns="0" rtlCol="0" anchor="t"/>
           <a:lstStyle/>
           <a:p>
-            <a:pPr algn="l" indent="0" marL="0">
+            <a:pPr marL="0" indent="0" algn="l">
               <a:lnSpc>
                 <a:spcPct val="100000"/>
               </a:lnSpc>
@@ -13606,7 +14047,7 @@
           <a:bodyPr wrap="square" lIns="0" tIns="0" rIns="0" bIns="0" rtlCol="0" anchor="t"/>
           <a:lstStyle/>
           <a:p>
-            <a:pPr algn="l" indent="0" marL="0">
+            <a:pPr marL="0" indent="0" algn="l">
               <a:lnSpc>
                 <a:spcPct val="100000"/>
               </a:lnSpc>
@@ -13646,6 +14087,13 @@
           </a:solidFill>
           <a:ln/>
         </p:spPr>
+        <p:txBody>
+          <a:bodyPr/>
+          <a:lstStyle/>
+          <a:p>
+            <a:endParaRPr lang="es-PE"/>
+          </a:p>
+        </p:txBody>
       </p:sp>
       <p:sp>
         <p:nvSpPr>
@@ -13668,7 +14116,7 @@
           <a:bodyPr wrap="square" lIns="0" tIns="0" rIns="0" bIns="0" rtlCol="0" anchor="t"/>
           <a:lstStyle/>
           <a:p>
-            <a:pPr algn="l" indent="0" marL="0">
+            <a:pPr marL="0" indent="0" algn="l">
               <a:lnSpc>
                 <a:spcPct val="100000"/>
               </a:lnSpc>
@@ -13710,7 +14158,7 @@
           <a:bodyPr wrap="square" lIns="0" tIns="0" rIns="0" bIns="0" rtlCol="0" anchor="t"/>
           <a:lstStyle/>
           <a:p>
-            <a:pPr algn="l" indent="0" marL="0">
+            <a:pPr marL="0" indent="0" algn="l">
               <a:lnSpc>
                 <a:spcPct val="100000"/>
               </a:lnSpc>
@@ -13751,7 +14199,7 @@
           </a:prstGeom>
           <a:extLst>
             <a:ext uri="{C572A759-6A51-4108-AA02-DFA0A04FC94B}">
-              <ma14:wrappingTextBoxFlag xmlns:ma14="http://schemas.microsoft.com/office/mac/drawingml/2011/main" val="0"/>
+              <ma14:wrappingTextBoxFlag xmlns:ma14="http://schemas.microsoft.com/office/mac/drawingml/2011/main" xmlns="" val="0"/>
             </a:ext>
           </a:extLst>
         </p:spPr>
@@ -13772,7 +14220,7 @@
           <a:p>
             <a:pPr algn="r"/>
             <a:fld id="{F7021451-1387-4CA6-816F-3879F97B5CBC}" type="slidenum">
-              <a:rPr b="0" lang="en-US"/>
+              <a:rPr lang="en-US" b="0"/>
               <a:t>6</a:t>
             </a:fld>
             <a:endParaRPr lang="en-US"/>
@@ -13807,9 +14255,11 @@
       <p:sp>
         <p:nvSpPr>
           <p:cNvPr id="2" name="Text 0"/>
-          <p:cNvSpPr/>
+          <p:cNvSpPr>
+            <a:spLocks noGrp="1"/>
+          </p:cNvSpPr>
           <p:nvPr>
-            <p:ph idx="100" type="title" hasCustomPrompt="1"/>
+            <p:ph type="title" idx="100" hasCustomPrompt="1"/>
           </p:nvPr>
         </p:nvSpPr>
         <p:spPr>
@@ -13827,7 +14277,7 @@
           <a:bodyPr wrap="square" lIns="0" tIns="0" rIns="0" bIns="0" rtlCol="0" anchor="t"/>
           <a:lstStyle/>
           <a:p>
-            <a:pPr algn="l" indent="0" marL="0">
+            <a:pPr marL="0" indent="0" algn="l">
               <a:buNone/>
             </a:pPr>
             <a:r>
@@ -13866,14 +14316,14 @@
           <a:bodyPr wrap="square" lIns="0" tIns="0" rIns="0" bIns="0" rtlCol="0" anchor="t"/>
           <a:lstStyle/>
           <a:p>
-            <a:pPr algn="l" indent="0" marL="0">
+            <a:pPr marL="0" indent="0" algn="l">
               <a:lnSpc>
                 <a:spcPct val="100000"/>
               </a:lnSpc>
               <a:buNone/>
             </a:pPr>
             <a:r>
-              <a:rPr lang="en-US" sz="1200" b="1" spc="200" kern="0" dirty="0">
+              <a:rPr lang="en-US" sz="1200" b="1" kern="0" spc="200" dirty="0">
                 <a:solidFill>
                   <a:srgbClr val="315C3D"/>
                 </a:solidFill>
@@ -13889,14 +14339,14 @@
       </p:sp>
       <p:pic>
         <p:nvPicPr>
-          <p:cNvPr id="4" name="Image 0" descr="Diagrama entidad-relación de Sazloop">    </p:cNvPr>
+          <p:cNvPr id="4" name="Image 0" descr="Diagrama entidad-relación de Sazloop"/>
           <p:cNvPicPr>
             <a:picLocks noChangeAspect="1"/>
           </p:cNvPicPr>
           <p:nvPr/>
         </p:nvPicPr>
         <p:blipFill>
-          <a:blip r:embed="rId1"/>
+          <a:blip r:embed="rId3"/>
           <a:stretch>
             <a:fillRect/>
           </a:stretch>
@@ -13932,6 +14382,13 @@
             <a:prstDash val="solid"/>
           </a:ln>
         </p:spPr>
+        <p:txBody>
+          <a:bodyPr/>
+          <a:lstStyle/>
+          <a:p>
+            <a:endParaRPr lang="es-PE"/>
+          </a:p>
+        </p:txBody>
       </p:sp>
       <p:graphicFrame>
         <p:nvGraphicFramePr>
@@ -13949,16 +14406,34 @@
         </p:nvGraphicFramePr>
         <p:xfrm>
           <a:off x="8503920" y="1600200"/>
-          <a:ext cx="3136392" cy="914400"/>
+          <a:ext cx="3136392" cy="2990088"/>
         </p:xfrm>
         <a:graphic>
           <a:graphicData uri="http://schemas.openxmlformats.org/drawingml/2006/table">
             <a:tbl>
               <a:tblPr/>
               <a:tblGrid>
-                <a:gridCol w="1371600"/>
-                <a:gridCol w="868680"/>
-                <a:gridCol w="896112"/>
+                <a:gridCol w="1371600">
+                  <a:extLst>
+                    <a:ext uri="{9D8B030D-6E8A-4147-A177-3AD203B41FA5}">
+                      <a16:colId xmlns:a16="http://schemas.microsoft.com/office/drawing/2014/main" val="20000"/>
+                    </a:ext>
+                  </a:extLst>
+                </a:gridCol>
+                <a:gridCol w="868680">
+                  <a:extLst>
+                    <a:ext uri="{9D8B030D-6E8A-4147-A177-3AD203B41FA5}">
+                      <a16:colId xmlns:a16="http://schemas.microsoft.com/office/drawing/2014/main" val="20001"/>
+                    </a:ext>
+                  </a:extLst>
+                </a:gridCol>
+                <a:gridCol w="896112">
+                  <a:extLst>
+                    <a:ext uri="{9D8B030D-6E8A-4147-A177-3AD203B41FA5}">
+                      <a16:colId xmlns:a16="http://schemas.microsoft.com/office/drawing/2014/main" val="20002"/>
+                    </a:ext>
+                  </a:extLst>
+                </a:gridCol>
               </a:tblGrid>
               <a:tr h="411480">
                 <a:tc>
@@ -13966,7 +14441,7 @@
                     <a:bodyPr/>
                     <a:lstStyle/>
                     <a:p>
-                      <a:pPr algn="l" indent="0" marL="0">
+                      <a:pPr marL="0" indent="0" algn="l">
                         <a:lnSpc>
                           <a:spcPct val="100000"/>
                         </a:lnSpc>
@@ -14033,7 +14508,7 @@
                     <a:bodyPr/>
                     <a:lstStyle/>
                     <a:p>
-                      <a:pPr algn="ctr" indent="0" marL="0">
+                      <a:pPr marL="0" indent="0" algn="ctr">
                         <a:lnSpc>
                           <a:spcPct val="100000"/>
                         </a:lnSpc>
@@ -14100,7 +14575,7 @@
                     <a:bodyPr/>
                     <a:lstStyle/>
                     <a:p>
-                      <a:pPr algn="ctr" indent="0" marL="0">
+                      <a:pPr marL="0" indent="0" algn="ctr">
                         <a:lnSpc>
                           <a:spcPct val="100000"/>
                         </a:lnSpc>
@@ -14162,6 +14637,11 @@
                     </a:solidFill>
                   </a:tcPr>
                 </a:tc>
+                <a:extLst>
+                  <a:ext uri="{0D108BD9-81ED-4DB2-BD59-A6C34878D82A}">
+                    <a16:rowId xmlns:a16="http://schemas.microsoft.com/office/drawing/2014/main" val="10000"/>
+                  </a:ext>
+                </a:extLst>
               </a:tr>
               <a:tr h="365760">
                 <a:tc>
@@ -14169,7 +14649,7 @@
                     <a:bodyPr/>
                     <a:lstStyle/>
                     <a:p>
-                      <a:pPr algn="l" indent="0" marL="0">
+                      <a:pPr marL="0" indent="0" algn="l">
                         <a:lnSpc>
                           <a:spcPct val="100000"/>
                         </a:lnSpc>
@@ -14233,7 +14713,7 @@
                     <a:bodyPr/>
                     <a:lstStyle/>
                     <a:p>
-                      <a:pPr algn="ctr" indent="0" marL="0">
+                      <a:pPr marL="0" indent="0" algn="ctr">
                         <a:lnSpc>
                           <a:spcPct val="100000"/>
                         </a:lnSpc>
@@ -14297,7 +14777,7 @@
                     <a:bodyPr/>
                     <a:lstStyle/>
                     <a:p>
-                      <a:pPr algn="ctr" indent="0" marL="0">
+                      <a:pPr marL="0" indent="0" algn="ctr">
                         <a:lnSpc>
                           <a:spcPct val="100000"/>
                         </a:lnSpc>
@@ -14356,6 +14836,11 @@
                     </a:lnB>
                   </a:tcPr>
                 </a:tc>
+                <a:extLst>
+                  <a:ext uri="{0D108BD9-81ED-4DB2-BD59-A6C34878D82A}">
+                    <a16:rowId xmlns:a16="http://schemas.microsoft.com/office/drawing/2014/main" val="10001"/>
+                  </a:ext>
+                </a:extLst>
               </a:tr>
               <a:tr h="365760">
                 <a:tc>
@@ -14363,7 +14848,7 @@
                     <a:bodyPr/>
                     <a:lstStyle/>
                     <a:p>
-                      <a:pPr algn="l" indent="0" marL="0">
+                      <a:pPr marL="0" indent="0" algn="l">
                         <a:lnSpc>
                           <a:spcPct val="100000"/>
                         </a:lnSpc>
@@ -14427,7 +14912,7 @@
                     <a:bodyPr/>
                     <a:lstStyle/>
                     <a:p>
-                      <a:pPr algn="ctr" indent="0" marL="0">
+                      <a:pPr marL="0" indent="0" algn="ctr">
                         <a:lnSpc>
                           <a:spcPct val="100000"/>
                         </a:lnSpc>
@@ -14491,7 +14976,7 @@
                     <a:bodyPr/>
                     <a:lstStyle/>
                     <a:p>
-                      <a:pPr algn="ctr" indent="0" marL="0">
+                      <a:pPr marL="0" indent="0" algn="ctr">
                         <a:lnSpc>
                           <a:spcPct val="100000"/>
                         </a:lnSpc>
@@ -14550,6 +15035,11 @@
                     </a:lnB>
                   </a:tcPr>
                 </a:tc>
+                <a:extLst>
+                  <a:ext uri="{0D108BD9-81ED-4DB2-BD59-A6C34878D82A}">
+                    <a16:rowId xmlns:a16="http://schemas.microsoft.com/office/drawing/2014/main" val="10002"/>
+                  </a:ext>
+                </a:extLst>
               </a:tr>
               <a:tr h="365760">
                 <a:tc>
@@ -14557,7 +15047,7 @@
                     <a:bodyPr/>
                     <a:lstStyle/>
                     <a:p>
-                      <a:pPr algn="l" indent="0" marL="0">
+                      <a:pPr marL="0" indent="0" algn="l">
                         <a:lnSpc>
                           <a:spcPct val="100000"/>
                         </a:lnSpc>
@@ -14621,7 +15111,7 @@
                     <a:bodyPr/>
                     <a:lstStyle/>
                     <a:p>
-                      <a:pPr algn="ctr" indent="0" marL="0">
+                      <a:pPr marL="0" indent="0" algn="ctr">
                         <a:lnSpc>
                           <a:spcPct val="100000"/>
                         </a:lnSpc>
@@ -14685,7 +15175,7 @@
                     <a:bodyPr/>
                     <a:lstStyle/>
                     <a:p>
-                      <a:pPr algn="ctr" indent="0" marL="0">
+                      <a:pPr marL="0" indent="0" algn="ctr">
                         <a:lnSpc>
                           <a:spcPct val="100000"/>
                         </a:lnSpc>
@@ -14744,6 +15234,11 @@
                     </a:lnB>
                   </a:tcPr>
                 </a:tc>
+                <a:extLst>
+                  <a:ext uri="{0D108BD9-81ED-4DB2-BD59-A6C34878D82A}">
+                    <a16:rowId xmlns:a16="http://schemas.microsoft.com/office/drawing/2014/main" val="10003"/>
+                  </a:ext>
+                </a:extLst>
               </a:tr>
               <a:tr h="365760">
                 <a:tc>
@@ -14751,7 +15246,7 @@
                     <a:bodyPr/>
                     <a:lstStyle/>
                     <a:p>
-                      <a:pPr algn="l" indent="0" marL="0">
+                      <a:pPr marL="0" indent="0" algn="l">
                         <a:lnSpc>
                           <a:spcPct val="100000"/>
                         </a:lnSpc>
@@ -14815,7 +15310,7 @@
                     <a:bodyPr/>
                     <a:lstStyle/>
                     <a:p>
-                      <a:pPr algn="ctr" indent="0" marL="0">
+                      <a:pPr marL="0" indent="0" algn="ctr">
                         <a:lnSpc>
                           <a:spcPct val="100000"/>
                         </a:lnSpc>
@@ -14879,7 +15374,7 @@
                     <a:bodyPr/>
                     <a:lstStyle/>
                     <a:p>
-                      <a:pPr algn="ctr" indent="0" marL="0">
+                      <a:pPr marL="0" indent="0" algn="ctr">
                         <a:lnSpc>
                           <a:spcPct val="100000"/>
                         </a:lnSpc>
@@ -14938,6 +15433,11 @@
                     </a:lnB>
                   </a:tcPr>
                 </a:tc>
+                <a:extLst>
+                  <a:ext uri="{0D108BD9-81ED-4DB2-BD59-A6C34878D82A}">
+                    <a16:rowId xmlns:a16="http://schemas.microsoft.com/office/drawing/2014/main" val="10004"/>
+                  </a:ext>
+                </a:extLst>
               </a:tr>
               <a:tr h="365760">
                 <a:tc>
@@ -14945,7 +15445,7 @@
                     <a:bodyPr/>
                     <a:lstStyle/>
                     <a:p>
-                      <a:pPr algn="l" indent="0" marL="0">
+                      <a:pPr marL="0" indent="0" algn="l">
                         <a:lnSpc>
                           <a:spcPct val="100000"/>
                         </a:lnSpc>
@@ -15009,7 +15509,7 @@
                     <a:bodyPr/>
                     <a:lstStyle/>
                     <a:p>
-                      <a:pPr algn="ctr" indent="0" marL="0">
+                      <a:pPr marL="0" indent="0" algn="ctr">
                         <a:lnSpc>
                           <a:spcPct val="100000"/>
                         </a:lnSpc>
@@ -15073,7 +15573,7 @@
                     <a:bodyPr/>
                     <a:lstStyle/>
                     <a:p>
-                      <a:pPr algn="ctr" indent="0" marL="0">
+                      <a:pPr marL="0" indent="0" algn="ctr">
                         <a:lnSpc>
                           <a:spcPct val="100000"/>
                         </a:lnSpc>
@@ -15132,6 +15632,11 @@
                     </a:lnB>
                   </a:tcPr>
                 </a:tc>
+                <a:extLst>
+                  <a:ext uri="{0D108BD9-81ED-4DB2-BD59-A6C34878D82A}">
+                    <a16:rowId xmlns:a16="http://schemas.microsoft.com/office/drawing/2014/main" val="10005"/>
+                  </a:ext>
+                </a:extLst>
               </a:tr>
               <a:tr h="365760">
                 <a:tc>
@@ -15139,7 +15644,7 @@
                     <a:bodyPr/>
                     <a:lstStyle/>
                     <a:p>
-                      <a:pPr algn="l" indent="0" marL="0">
+                      <a:pPr marL="0" indent="0" algn="l">
                         <a:lnSpc>
                           <a:spcPct val="100000"/>
                         </a:lnSpc>
@@ -15203,7 +15708,7 @@
                     <a:bodyPr/>
                     <a:lstStyle/>
                     <a:p>
-                      <a:pPr algn="ctr" indent="0" marL="0">
+                      <a:pPr marL="0" indent="0" algn="ctr">
                         <a:lnSpc>
                           <a:spcPct val="100000"/>
                         </a:lnSpc>
@@ -15267,7 +15772,7 @@
                     <a:bodyPr/>
                     <a:lstStyle/>
                     <a:p>
-                      <a:pPr algn="ctr" indent="0" marL="0">
+                      <a:pPr marL="0" indent="0" algn="ctr">
                         <a:lnSpc>
                           <a:spcPct val="100000"/>
                         </a:lnSpc>
@@ -15326,6 +15831,11 @@
                     </a:lnB>
                   </a:tcPr>
                 </a:tc>
+                <a:extLst>
+                  <a:ext uri="{0D108BD9-81ED-4DB2-BD59-A6C34878D82A}">
+                    <a16:rowId xmlns:a16="http://schemas.microsoft.com/office/drawing/2014/main" val="10006"/>
+                  </a:ext>
+                </a:extLst>
               </a:tr>
               <a:tr h="384048">
                 <a:tc>
@@ -15333,7 +15843,7 @@
                     <a:bodyPr/>
                     <a:lstStyle/>
                     <a:p>
-                      <a:pPr algn="l" indent="0" marL="0">
+                      <a:pPr marL="0" indent="0" algn="l">
                         <a:lnSpc>
                           <a:spcPct val="100000"/>
                         </a:lnSpc>
@@ -15400,7 +15910,7 @@
                     <a:bodyPr/>
                     <a:lstStyle/>
                     <a:p>
-                      <a:pPr algn="ctr" indent="0" marL="0">
+                      <a:pPr marL="0" indent="0" algn="ctr">
                         <a:lnSpc>
                           <a:spcPct val="100000"/>
                         </a:lnSpc>
@@ -15467,7 +15977,7 @@
                     <a:bodyPr/>
                     <a:lstStyle/>
                     <a:p>
-                      <a:pPr algn="ctr" indent="0" marL="0">
+                      <a:pPr marL="0" indent="0" algn="ctr">
                         <a:lnSpc>
                           <a:spcPct val="100000"/>
                         </a:lnSpc>
@@ -15529,6 +16039,11 @@
                     </a:solidFill>
                   </a:tcPr>
                 </a:tc>
+                <a:extLst>
+                  <a:ext uri="{0D108BD9-81ED-4DB2-BD59-A6C34878D82A}">
+                    <a16:rowId xmlns:a16="http://schemas.microsoft.com/office/drawing/2014/main" val="10007"/>
+                  </a:ext>
+                </a:extLst>
               </a:tr>
             </a:tbl>
           </a:graphicData>
@@ -15555,7 +16070,7 @@
           <a:bodyPr wrap="square" lIns="0" tIns="0" rIns="0" bIns="0" rtlCol="0" anchor="t"/>
           <a:lstStyle/>
           <a:p>
-            <a:pPr algn="l" indent="0" marL="0">
+            <a:pPr marL="0" indent="0" algn="l">
               <a:lnSpc>
                 <a:spcPct val="100000"/>
               </a:lnSpc>
@@ -15596,7 +16111,7 @@
           </a:prstGeom>
           <a:extLst>
             <a:ext uri="{C572A759-6A51-4108-AA02-DFA0A04FC94B}">
-              <ma14:wrappingTextBoxFlag xmlns:ma14="http://schemas.microsoft.com/office/mac/drawingml/2011/main" val="0"/>
+              <ma14:wrappingTextBoxFlag xmlns:ma14="http://schemas.microsoft.com/office/mac/drawingml/2011/main" xmlns="" val="0"/>
             </a:ext>
           </a:extLst>
         </p:spPr>
@@ -15617,7 +16132,7 @@
           <a:p>
             <a:pPr algn="r"/>
             <a:fld id="{F7021451-1387-4CA6-816F-3879F97B5CBC}" type="slidenum">
-              <a:rPr b="0" lang="en-US"/>
+              <a:rPr lang="en-US" b="0"/>
               <a:t>7</a:t>
             </a:fld>
             <a:endParaRPr lang="en-US"/>
@@ -15652,9 +16167,11 @@
       <p:sp>
         <p:nvSpPr>
           <p:cNvPr id="2" name="Text 0"/>
-          <p:cNvSpPr/>
+          <p:cNvSpPr>
+            <a:spLocks noGrp="1"/>
+          </p:cNvSpPr>
           <p:nvPr>
-            <p:ph idx="100" type="title" hasCustomPrompt="1"/>
+            <p:ph type="title" idx="100" hasCustomPrompt="1"/>
           </p:nvPr>
         </p:nvSpPr>
         <p:spPr>
@@ -15672,7 +16189,7 @@
           <a:bodyPr wrap="square" lIns="0" tIns="0" rIns="0" bIns="0" rtlCol="0" anchor="t"/>
           <a:lstStyle/>
           <a:p>
-            <a:pPr algn="l" indent="0" marL="0">
+            <a:pPr marL="0" indent="0" algn="l">
               <a:buNone/>
             </a:pPr>
             <a:r>
@@ -15711,14 +16228,14 @@
           <a:bodyPr wrap="square" lIns="0" tIns="0" rIns="0" bIns="0" rtlCol="0" anchor="t"/>
           <a:lstStyle/>
           <a:p>
-            <a:pPr algn="l" indent="0" marL="0">
+            <a:pPr marL="0" indent="0" algn="l">
               <a:lnSpc>
                 <a:spcPct val="100000"/>
               </a:lnSpc>
               <a:buNone/>
             </a:pPr>
             <a:r>
-              <a:rPr lang="en-US" sz="1200" b="1" spc="200" kern="0" dirty="0">
+              <a:rPr lang="en-US" sz="1200" b="1" kern="0" spc="200" dirty="0">
                 <a:solidFill>
                   <a:srgbClr val="315C3D"/>
                 </a:solidFill>
@@ -15748,16 +16265,34 @@
         </p:nvGraphicFramePr>
         <p:xfrm>
           <a:off x="548640" y="1554480"/>
-          <a:ext cx="6949440" cy="914400"/>
+          <a:ext cx="6949440" cy="4151376"/>
         </p:xfrm>
         <a:graphic>
           <a:graphicData uri="http://schemas.openxmlformats.org/drawingml/2006/table">
             <a:tbl>
               <a:tblPr/>
               <a:tblGrid>
-                <a:gridCol w="1463040"/>
-                <a:gridCol w="2103120"/>
-                <a:gridCol w="3383280"/>
+                <a:gridCol w="1463040">
+                  <a:extLst>
+                    <a:ext uri="{9D8B030D-6E8A-4147-A177-3AD203B41FA5}">
+                      <a16:colId xmlns:a16="http://schemas.microsoft.com/office/drawing/2014/main" val="20000"/>
+                    </a:ext>
+                  </a:extLst>
+                </a:gridCol>
+                <a:gridCol w="2103120">
+                  <a:extLst>
+                    <a:ext uri="{9D8B030D-6E8A-4147-A177-3AD203B41FA5}">
+                      <a16:colId xmlns:a16="http://schemas.microsoft.com/office/drawing/2014/main" val="20001"/>
+                    </a:ext>
+                  </a:extLst>
+                </a:gridCol>
+                <a:gridCol w="3383280">
+                  <a:extLst>
+                    <a:ext uri="{9D8B030D-6E8A-4147-A177-3AD203B41FA5}">
+                      <a16:colId xmlns:a16="http://schemas.microsoft.com/office/drawing/2014/main" val="20002"/>
+                    </a:ext>
+                  </a:extLst>
+                </a:gridCol>
               </a:tblGrid>
               <a:tr h="384048">
                 <a:tc>
@@ -15765,7 +16300,7 @@
                     <a:bodyPr/>
                     <a:lstStyle/>
                     <a:p>
-                      <a:pPr algn="l" indent="0" marL="0">
+                      <a:pPr marL="0" indent="0" algn="l">
                         <a:lnSpc>
                           <a:spcPct val="100000"/>
                         </a:lnSpc>
@@ -15832,7 +16367,7 @@
                     <a:bodyPr/>
                     <a:lstStyle/>
                     <a:p>
-                      <a:pPr algn="l" indent="0" marL="0">
+                      <a:pPr marL="0" indent="0" algn="l">
                         <a:lnSpc>
                           <a:spcPct val="100000"/>
                         </a:lnSpc>
@@ -15899,7 +16434,7 @@
                     <a:bodyPr/>
                     <a:lstStyle/>
                     <a:p>
-                      <a:pPr algn="l" indent="0" marL="0">
+                      <a:pPr marL="0" indent="0" algn="l">
                         <a:lnSpc>
                           <a:spcPct val="100000"/>
                         </a:lnSpc>
@@ -15961,6 +16496,11 @@
                     </a:solidFill>
                   </a:tcPr>
                 </a:tc>
+                <a:extLst>
+                  <a:ext uri="{0D108BD9-81ED-4DB2-BD59-A6C34878D82A}">
+                    <a16:rowId xmlns:a16="http://schemas.microsoft.com/office/drawing/2014/main" val="10000"/>
+                  </a:ext>
+                </a:extLst>
               </a:tr>
               <a:tr h="713232">
                 <a:tc>
@@ -15968,7 +16508,7 @@
                     <a:bodyPr/>
                     <a:lstStyle/>
                     <a:p>
-                      <a:pPr algn="l" indent="0" marL="0">
+                      <a:pPr marL="0" indent="0" algn="l">
                         <a:lnSpc>
                           <a:spcPct val="100000"/>
                         </a:lnSpc>
@@ -16032,7 +16572,7 @@
                     <a:bodyPr/>
                     <a:lstStyle/>
                     <a:p>
-                      <a:pPr algn="l" indent="0" marL="0">
+                      <a:pPr marL="0" indent="0" algn="l">
                         <a:lnSpc>
                           <a:spcPct val="100000"/>
                         </a:lnSpc>
@@ -16096,7 +16636,7 @@
                     <a:bodyPr/>
                     <a:lstStyle/>
                     <a:p>
-                      <a:pPr algn="l" indent="0" marL="0">
+                      <a:pPr marL="0" indent="0" algn="l">
                         <a:lnSpc>
                           <a:spcPct val="100000"/>
                         </a:lnSpc>
@@ -16155,6 +16695,11 @@
                     </a:lnB>
                   </a:tcPr>
                 </a:tc>
+                <a:extLst>
+                  <a:ext uri="{0D108BD9-81ED-4DB2-BD59-A6C34878D82A}">
+                    <a16:rowId xmlns:a16="http://schemas.microsoft.com/office/drawing/2014/main" val="10001"/>
+                  </a:ext>
+                </a:extLst>
               </a:tr>
               <a:tr h="713232">
                 <a:tc>
@@ -16162,7 +16707,7 @@
                     <a:bodyPr/>
                     <a:lstStyle/>
                     <a:p>
-                      <a:pPr algn="l" indent="0" marL="0">
+                      <a:pPr marL="0" indent="0" algn="l">
                         <a:lnSpc>
                           <a:spcPct val="100000"/>
                         </a:lnSpc>
@@ -16226,7 +16771,7 @@
                     <a:bodyPr/>
                     <a:lstStyle/>
                     <a:p>
-                      <a:pPr algn="l" indent="0" marL="0">
+                      <a:pPr marL="0" indent="0" algn="l">
                         <a:lnSpc>
                           <a:spcPct val="100000"/>
                         </a:lnSpc>
@@ -16290,7 +16835,7 @@
                     <a:bodyPr/>
                     <a:lstStyle/>
                     <a:p>
-                      <a:pPr algn="l" indent="0" marL="0">
+                      <a:pPr marL="0" indent="0" algn="l">
                         <a:lnSpc>
                           <a:spcPct val="100000"/>
                         </a:lnSpc>
@@ -16349,6 +16894,11 @@
                     </a:lnB>
                   </a:tcPr>
                 </a:tc>
+                <a:extLst>
+                  <a:ext uri="{0D108BD9-81ED-4DB2-BD59-A6C34878D82A}">
+                    <a16:rowId xmlns:a16="http://schemas.microsoft.com/office/drawing/2014/main" val="10002"/>
+                  </a:ext>
+                </a:extLst>
               </a:tr>
               <a:tr h="914400">
                 <a:tc>
@@ -16356,7 +16906,7 @@
                     <a:bodyPr/>
                     <a:lstStyle/>
                     <a:p>
-                      <a:pPr algn="l" indent="0" marL="0">
+                      <a:pPr marL="0" indent="0" algn="l">
                         <a:lnSpc>
                           <a:spcPct val="100000"/>
                         </a:lnSpc>
@@ -16420,7 +16970,7 @@
                     <a:bodyPr/>
                     <a:lstStyle/>
                     <a:p>
-                      <a:pPr algn="l" indent="0" marL="0">
+                      <a:pPr marL="0" indent="0" algn="l">
                         <a:lnSpc>
                           <a:spcPct val="100000"/>
                         </a:lnSpc>
@@ -16484,7 +17034,7 @@
                     <a:bodyPr/>
                     <a:lstStyle/>
                     <a:p>
-                      <a:pPr algn="l" indent="0" marL="0">
+                      <a:pPr marL="0" indent="0" algn="l">
                         <a:lnSpc>
                           <a:spcPct val="100000"/>
                         </a:lnSpc>
@@ -16543,6 +17093,11 @@
                     </a:lnB>
                   </a:tcPr>
                 </a:tc>
+                <a:extLst>
+                  <a:ext uri="{0D108BD9-81ED-4DB2-BD59-A6C34878D82A}">
+                    <a16:rowId xmlns:a16="http://schemas.microsoft.com/office/drawing/2014/main" val="10003"/>
+                  </a:ext>
+                </a:extLst>
               </a:tr>
               <a:tr h="713232">
                 <a:tc>
@@ -16550,7 +17105,7 @@
                     <a:bodyPr/>
                     <a:lstStyle/>
                     <a:p>
-                      <a:pPr algn="l" indent="0" marL="0">
+                      <a:pPr marL="0" indent="0" algn="l">
                         <a:lnSpc>
                           <a:spcPct val="100000"/>
                         </a:lnSpc>
@@ -16614,7 +17169,7 @@
                     <a:bodyPr/>
                     <a:lstStyle/>
                     <a:p>
-                      <a:pPr algn="l" indent="0" marL="0">
+                      <a:pPr marL="0" indent="0" algn="l">
                         <a:lnSpc>
                           <a:spcPct val="100000"/>
                         </a:lnSpc>
@@ -16678,7 +17233,7 @@
                     <a:bodyPr/>
                     <a:lstStyle/>
                     <a:p>
-                      <a:pPr algn="l" indent="0" marL="0">
+                      <a:pPr marL="0" indent="0" algn="l">
                         <a:lnSpc>
                           <a:spcPct val="100000"/>
                         </a:lnSpc>
@@ -16737,6 +17292,11 @@
                     </a:lnB>
                   </a:tcPr>
                 </a:tc>
+                <a:extLst>
+                  <a:ext uri="{0D108BD9-81ED-4DB2-BD59-A6C34878D82A}">
+                    <a16:rowId xmlns:a16="http://schemas.microsoft.com/office/drawing/2014/main" val="10004"/>
+                  </a:ext>
+                </a:extLst>
               </a:tr>
               <a:tr h="713232">
                 <a:tc>
@@ -16744,7 +17304,7 @@
                     <a:bodyPr/>
                     <a:lstStyle/>
                     <a:p>
-                      <a:pPr algn="l" indent="0" marL="0">
+                      <a:pPr marL="0" indent="0" algn="l">
                         <a:lnSpc>
                           <a:spcPct val="100000"/>
                         </a:lnSpc>
@@ -16808,7 +17368,7 @@
                     <a:bodyPr/>
                     <a:lstStyle/>
                     <a:p>
-                      <a:pPr algn="l" indent="0" marL="0">
+                      <a:pPr marL="0" indent="0" algn="l">
                         <a:lnSpc>
                           <a:spcPct val="100000"/>
                         </a:lnSpc>
@@ -16872,7 +17432,7 @@
                     <a:bodyPr/>
                     <a:lstStyle/>
                     <a:p>
-                      <a:pPr algn="l" indent="0" marL="0">
+                      <a:pPr marL="0" indent="0" algn="l">
                         <a:lnSpc>
                           <a:spcPct val="100000"/>
                         </a:lnSpc>
@@ -16931,6 +17491,11 @@
                     </a:lnB>
                   </a:tcPr>
                 </a:tc>
+                <a:extLst>
+                  <a:ext uri="{0D108BD9-81ED-4DB2-BD59-A6C34878D82A}">
+                    <a16:rowId xmlns:a16="http://schemas.microsoft.com/office/drawing/2014/main" val="10005"/>
+                  </a:ext>
+                </a:extLst>
               </a:tr>
             </a:tbl>
           </a:graphicData>
@@ -16952,20 +17517,62 @@
         </p:nvGraphicFramePr>
         <p:xfrm>
           <a:off x="7818120" y="1554480"/>
-          <a:ext cx="3822192" cy="914400"/>
+          <a:ext cx="3822192" cy="2816352"/>
         </p:xfrm>
         <a:graphic>
           <a:graphicData uri="http://schemas.openxmlformats.org/drawingml/2006/table">
             <a:tbl>
               <a:tblPr/>
               <a:tblGrid>
-                <a:gridCol w="1170432"/>
-                <a:gridCol w="457200"/>
-                <a:gridCol w="457200"/>
-                <a:gridCol w="457200"/>
-                <a:gridCol w="457200"/>
-                <a:gridCol w="411480"/>
-                <a:gridCol w="411480"/>
+                <a:gridCol w="1170432">
+                  <a:extLst>
+                    <a:ext uri="{9D8B030D-6E8A-4147-A177-3AD203B41FA5}">
+                      <a16:colId xmlns:a16="http://schemas.microsoft.com/office/drawing/2014/main" val="20000"/>
+                    </a:ext>
+                  </a:extLst>
+                </a:gridCol>
+                <a:gridCol w="457200">
+                  <a:extLst>
+                    <a:ext uri="{9D8B030D-6E8A-4147-A177-3AD203B41FA5}">
+                      <a16:colId xmlns:a16="http://schemas.microsoft.com/office/drawing/2014/main" val="20001"/>
+                    </a:ext>
+                  </a:extLst>
+                </a:gridCol>
+                <a:gridCol w="457200">
+                  <a:extLst>
+                    <a:ext uri="{9D8B030D-6E8A-4147-A177-3AD203B41FA5}">
+                      <a16:colId xmlns:a16="http://schemas.microsoft.com/office/drawing/2014/main" val="20002"/>
+                    </a:ext>
+                  </a:extLst>
+                </a:gridCol>
+                <a:gridCol w="457200">
+                  <a:extLst>
+                    <a:ext uri="{9D8B030D-6E8A-4147-A177-3AD203B41FA5}">
+                      <a16:colId xmlns:a16="http://schemas.microsoft.com/office/drawing/2014/main" val="20003"/>
+                    </a:ext>
+                  </a:extLst>
+                </a:gridCol>
+                <a:gridCol w="457200">
+                  <a:extLst>
+                    <a:ext uri="{9D8B030D-6E8A-4147-A177-3AD203B41FA5}">
+                      <a16:colId xmlns:a16="http://schemas.microsoft.com/office/drawing/2014/main" val="20004"/>
+                    </a:ext>
+                  </a:extLst>
+                </a:gridCol>
+                <a:gridCol w="411480">
+                  <a:extLst>
+                    <a:ext uri="{9D8B030D-6E8A-4147-A177-3AD203B41FA5}">
+                      <a16:colId xmlns:a16="http://schemas.microsoft.com/office/drawing/2014/main" val="20005"/>
+                    </a:ext>
+                  </a:extLst>
+                </a:gridCol>
+                <a:gridCol w="411480">
+                  <a:extLst>
+                    <a:ext uri="{9D8B030D-6E8A-4147-A177-3AD203B41FA5}">
+                      <a16:colId xmlns:a16="http://schemas.microsoft.com/office/drawing/2014/main" val="20006"/>
+                    </a:ext>
+                  </a:extLst>
+                </a:gridCol>
               </a:tblGrid>
               <a:tr h="365760">
                 <a:tc>
@@ -16973,7 +17580,7 @@
                     <a:bodyPr/>
                     <a:lstStyle/>
                     <a:p>
-                      <a:pPr algn="l" indent="0" marL="0">
+                      <a:pPr marL="0" indent="0" algn="l">
                         <a:lnSpc>
                           <a:spcPct val="100000"/>
                         </a:lnSpc>
@@ -17040,7 +17647,7 @@
                     <a:bodyPr/>
                     <a:lstStyle/>
                     <a:p>
-                      <a:pPr algn="ctr" indent="0" marL="0">
+                      <a:pPr marL="0" indent="0" algn="ctr">
                         <a:lnSpc>
                           <a:spcPct val="100000"/>
                         </a:lnSpc>
@@ -17107,7 +17714,7 @@
                     <a:bodyPr/>
                     <a:lstStyle/>
                     <a:p>
-                      <a:pPr algn="ctr" indent="0" marL="0">
+                      <a:pPr marL="0" indent="0" algn="ctr">
                         <a:lnSpc>
                           <a:spcPct val="100000"/>
                         </a:lnSpc>
@@ -17174,7 +17781,7 @@
                     <a:bodyPr/>
                     <a:lstStyle/>
                     <a:p>
-                      <a:pPr algn="ctr" indent="0" marL="0">
+                      <a:pPr marL="0" indent="0" algn="ctr">
                         <a:lnSpc>
                           <a:spcPct val="100000"/>
                         </a:lnSpc>
@@ -17241,7 +17848,7 @@
                     <a:bodyPr/>
                     <a:lstStyle/>
                     <a:p>
-                      <a:pPr algn="ctr" indent="0" marL="0">
+                      <a:pPr marL="0" indent="0" algn="ctr">
                         <a:lnSpc>
                           <a:spcPct val="100000"/>
                         </a:lnSpc>
@@ -17308,7 +17915,7 @@
                     <a:bodyPr/>
                     <a:lstStyle/>
                     <a:p>
-                      <a:pPr algn="ctr" indent="0" marL="0">
+                      <a:pPr marL="0" indent="0" algn="ctr">
                         <a:lnSpc>
                           <a:spcPct val="100000"/>
                         </a:lnSpc>
@@ -17375,7 +17982,7 @@
                     <a:bodyPr/>
                     <a:lstStyle/>
                     <a:p>
-                      <a:pPr algn="ctr" indent="0" marL="0">
+                      <a:pPr marL="0" indent="0" algn="ctr">
                         <a:lnSpc>
                           <a:spcPct val="100000"/>
                         </a:lnSpc>
@@ -17437,6 +18044,11 @@
                     </a:solidFill>
                   </a:tcPr>
                 </a:tc>
+                <a:extLst>
+                  <a:ext uri="{0D108BD9-81ED-4DB2-BD59-A6C34878D82A}">
+                    <a16:rowId xmlns:a16="http://schemas.microsoft.com/office/drawing/2014/main" val="10000"/>
+                  </a:ext>
+                </a:extLst>
               </a:tr>
               <a:tr h="347472">
                 <a:tc>
@@ -17444,7 +18056,7 @@
                     <a:bodyPr/>
                     <a:lstStyle/>
                     <a:p>
-                      <a:pPr algn="l" indent="0" marL="0">
+                      <a:pPr marL="0" indent="0" algn="l">
                         <a:lnSpc>
                           <a:spcPct val="100000"/>
                         </a:lnSpc>
@@ -17508,7 +18120,7 @@
                     <a:bodyPr/>
                     <a:lstStyle/>
                     <a:p>
-                      <a:pPr algn="ctr" indent="0" marL="0">
+                      <a:pPr marL="0" indent="0" algn="ctr">
                         <a:lnSpc>
                           <a:spcPct val="100000"/>
                         </a:lnSpc>
@@ -17572,7 +18184,7 @@
                     <a:bodyPr/>
                     <a:lstStyle/>
                     <a:p>
-                      <a:pPr algn="ctr" indent="0" marL="0">
+                      <a:pPr marL="0" indent="0" algn="ctr">
                         <a:lnSpc>
                           <a:spcPct val="100000"/>
                         </a:lnSpc>
@@ -17636,7 +18248,7 @@
                     <a:bodyPr/>
                     <a:lstStyle/>
                     <a:p>
-                      <a:pPr algn="ctr" indent="0" marL="0">
+                      <a:pPr marL="0" indent="0" algn="ctr">
                         <a:lnSpc>
                           <a:spcPct val="100000"/>
                         </a:lnSpc>
@@ -17700,7 +18312,7 @@
                     <a:bodyPr/>
                     <a:lstStyle/>
                     <a:p>
-                      <a:pPr algn="ctr" indent="0" marL="0">
+                      <a:pPr marL="0" indent="0" algn="ctr">
                         <a:lnSpc>
                           <a:spcPct val="100000"/>
                         </a:lnSpc>
@@ -17764,7 +18376,7 @@
                     <a:bodyPr/>
                     <a:lstStyle/>
                     <a:p>
-                      <a:pPr algn="ctr" indent="0" marL="0">
+                      <a:pPr marL="0" indent="0" algn="ctr">
                         <a:lnSpc>
                           <a:spcPct val="100000"/>
                         </a:lnSpc>
@@ -17828,7 +18440,7 @@
                     <a:bodyPr/>
                     <a:lstStyle/>
                     <a:p>
-                      <a:pPr algn="ctr" indent="0" marL="0">
+                      <a:pPr marL="0" indent="0" algn="ctr">
                         <a:lnSpc>
                           <a:spcPct val="100000"/>
                         </a:lnSpc>
@@ -17887,6 +18499,11 @@
                     </a:lnB>
                   </a:tcPr>
                 </a:tc>
+                <a:extLst>
+                  <a:ext uri="{0D108BD9-81ED-4DB2-BD59-A6C34878D82A}">
+                    <a16:rowId xmlns:a16="http://schemas.microsoft.com/office/drawing/2014/main" val="10001"/>
+                  </a:ext>
+                </a:extLst>
               </a:tr>
               <a:tr h="347472">
                 <a:tc>
@@ -17894,7 +18511,7 @@
                     <a:bodyPr/>
                     <a:lstStyle/>
                     <a:p>
-                      <a:pPr algn="l" indent="0" marL="0">
+                      <a:pPr marL="0" indent="0" algn="l">
                         <a:lnSpc>
                           <a:spcPct val="100000"/>
                         </a:lnSpc>
@@ -17958,7 +18575,7 @@
                     <a:bodyPr/>
                     <a:lstStyle/>
                     <a:p>
-                      <a:pPr algn="ctr" indent="0" marL="0">
+                      <a:pPr marL="0" indent="0" algn="ctr">
                         <a:lnSpc>
                           <a:spcPct val="100000"/>
                         </a:lnSpc>
@@ -18022,7 +18639,7 @@
                     <a:bodyPr/>
                     <a:lstStyle/>
                     <a:p>
-                      <a:pPr algn="ctr" indent="0" marL="0">
+                      <a:pPr marL="0" indent="0" algn="ctr">
                         <a:lnSpc>
                           <a:spcPct val="100000"/>
                         </a:lnSpc>
@@ -18086,7 +18703,7 @@
                     <a:bodyPr/>
                     <a:lstStyle/>
                     <a:p>
-                      <a:pPr algn="ctr" indent="0" marL="0">
+                      <a:pPr marL="0" indent="0" algn="ctr">
                         <a:lnSpc>
                           <a:spcPct val="100000"/>
                         </a:lnSpc>
@@ -18150,7 +18767,7 @@
                     <a:bodyPr/>
                     <a:lstStyle/>
                     <a:p>
-                      <a:pPr algn="ctr" indent="0" marL="0">
+                      <a:pPr marL="0" indent="0" algn="ctr">
                         <a:lnSpc>
                           <a:spcPct val="100000"/>
                         </a:lnSpc>
@@ -18214,7 +18831,7 @@
                     <a:bodyPr/>
                     <a:lstStyle/>
                     <a:p>
-                      <a:pPr algn="ctr" indent="0" marL="0">
+                      <a:pPr marL="0" indent="0" algn="ctr">
                         <a:lnSpc>
                           <a:spcPct val="100000"/>
                         </a:lnSpc>
@@ -18278,7 +18895,7 @@
                     <a:bodyPr/>
                     <a:lstStyle/>
                     <a:p>
-                      <a:pPr algn="ctr" indent="0" marL="0">
+                      <a:pPr marL="0" indent="0" algn="ctr">
                         <a:lnSpc>
                           <a:spcPct val="100000"/>
                         </a:lnSpc>
@@ -18337,6 +18954,11 @@
                     </a:lnB>
                   </a:tcPr>
                 </a:tc>
+                <a:extLst>
+                  <a:ext uri="{0D108BD9-81ED-4DB2-BD59-A6C34878D82A}">
+                    <a16:rowId xmlns:a16="http://schemas.microsoft.com/office/drawing/2014/main" val="10002"/>
+                  </a:ext>
+                </a:extLst>
               </a:tr>
               <a:tr h="347472">
                 <a:tc>
@@ -18344,7 +18966,7 @@
                     <a:bodyPr/>
                     <a:lstStyle/>
                     <a:p>
-                      <a:pPr algn="l" indent="0" marL="0">
+                      <a:pPr marL="0" indent="0" algn="l">
                         <a:lnSpc>
                           <a:spcPct val="100000"/>
                         </a:lnSpc>
@@ -18408,7 +19030,7 @@
                     <a:bodyPr/>
                     <a:lstStyle/>
                     <a:p>
-                      <a:pPr algn="ctr" indent="0" marL="0">
+                      <a:pPr marL="0" indent="0" algn="ctr">
                         <a:lnSpc>
                           <a:spcPct val="100000"/>
                         </a:lnSpc>
@@ -18472,7 +19094,7 @@
                     <a:bodyPr/>
                     <a:lstStyle/>
                     <a:p>
-                      <a:pPr algn="ctr" indent="0" marL="0">
+                      <a:pPr marL="0" indent="0" algn="ctr">
                         <a:lnSpc>
                           <a:spcPct val="100000"/>
                         </a:lnSpc>
@@ -18536,7 +19158,7 @@
                     <a:bodyPr/>
                     <a:lstStyle/>
                     <a:p>
-                      <a:pPr algn="ctr" indent="0" marL="0">
+                      <a:pPr marL="0" indent="0" algn="ctr">
                         <a:lnSpc>
                           <a:spcPct val="100000"/>
                         </a:lnSpc>
@@ -18600,7 +19222,7 @@
                     <a:bodyPr/>
                     <a:lstStyle/>
                     <a:p>
-                      <a:pPr algn="ctr" indent="0" marL="0">
+                      <a:pPr marL="0" indent="0" algn="ctr">
                         <a:lnSpc>
                           <a:spcPct val="100000"/>
                         </a:lnSpc>
@@ -18664,7 +19286,7 @@
                     <a:bodyPr/>
                     <a:lstStyle/>
                     <a:p>
-                      <a:pPr algn="ctr" indent="0" marL="0">
+                      <a:pPr marL="0" indent="0" algn="ctr">
                         <a:lnSpc>
                           <a:spcPct val="100000"/>
                         </a:lnSpc>
@@ -18728,7 +19350,7 @@
                     <a:bodyPr/>
                     <a:lstStyle/>
                     <a:p>
-                      <a:pPr algn="ctr" indent="0" marL="0">
+                      <a:pPr marL="0" indent="0" algn="ctr">
                         <a:lnSpc>
                           <a:spcPct val="100000"/>
                         </a:lnSpc>
@@ -18787,6 +19409,11 @@
                     </a:lnB>
                   </a:tcPr>
                 </a:tc>
+                <a:extLst>
+                  <a:ext uri="{0D108BD9-81ED-4DB2-BD59-A6C34878D82A}">
+                    <a16:rowId xmlns:a16="http://schemas.microsoft.com/office/drawing/2014/main" val="10003"/>
+                  </a:ext>
+                </a:extLst>
               </a:tr>
               <a:tr h="347472">
                 <a:tc>
@@ -18794,7 +19421,7 @@
                     <a:bodyPr/>
                     <a:lstStyle/>
                     <a:p>
-                      <a:pPr algn="l" indent="0" marL="0">
+                      <a:pPr marL="0" indent="0" algn="l">
                         <a:lnSpc>
                           <a:spcPct val="100000"/>
                         </a:lnSpc>
@@ -18858,7 +19485,7 @@
                     <a:bodyPr/>
                     <a:lstStyle/>
                     <a:p>
-                      <a:pPr algn="ctr" indent="0" marL="0">
+                      <a:pPr marL="0" indent="0" algn="ctr">
                         <a:lnSpc>
                           <a:spcPct val="100000"/>
                         </a:lnSpc>
@@ -18922,7 +19549,7 @@
                     <a:bodyPr/>
                     <a:lstStyle/>
                     <a:p>
-                      <a:pPr algn="ctr" indent="0" marL="0">
+                      <a:pPr marL="0" indent="0" algn="ctr">
                         <a:lnSpc>
                           <a:spcPct val="100000"/>
                         </a:lnSpc>
@@ -18986,7 +19613,7 @@
                     <a:bodyPr/>
                     <a:lstStyle/>
                     <a:p>
-                      <a:pPr algn="ctr" indent="0" marL="0">
+                      <a:pPr marL="0" indent="0" algn="ctr">
                         <a:lnSpc>
                           <a:spcPct val="100000"/>
                         </a:lnSpc>
@@ -19050,7 +19677,7 @@
                     <a:bodyPr/>
                     <a:lstStyle/>
                     <a:p>
-                      <a:pPr algn="ctr" indent="0" marL="0">
+                      <a:pPr marL="0" indent="0" algn="ctr">
                         <a:lnSpc>
                           <a:spcPct val="100000"/>
                         </a:lnSpc>
@@ -19114,7 +19741,7 @@
                     <a:bodyPr/>
                     <a:lstStyle/>
                     <a:p>
-                      <a:pPr algn="ctr" indent="0" marL="0">
+                      <a:pPr marL="0" indent="0" algn="ctr">
                         <a:lnSpc>
                           <a:spcPct val="100000"/>
                         </a:lnSpc>
@@ -19178,7 +19805,7 @@
                     <a:bodyPr/>
                     <a:lstStyle/>
                     <a:p>
-                      <a:pPr algn="ctr" indent="0" marL="0">
+                      <a:pPr marL="0" indent="0" algn="ctr">
                         <a:lnSpc>
                           <a:spcPct val="100000"/>
                         </a:lnSpc>
@@ -19237,6 +19864,11 @@
                     </a:lnB>
                   </a:tcPr>
                 </a:tc>
+                <a:extLst>
+                  <a:ext uri="{0D108BD9-81ED-4DB2-BD59-A6C34878D82A}">
+                    <a16:rowId xmlns:a16="http://schemas.microsoft.com/office/drawing/2014/main" val="10004"/>
+                  </a:ext>
+                </a:extLst>
               </a:tr>
               <a:tr h="347472">
                 <a:tc>
@@ -19244,7 +19876,7 @@
                     <a:bodyPr/>
                     <a:lstStyle/>
                     <a:p>
-                      <a:pPr algn="l" indent="0" marL="0">
+                      <a:pPr marL="0" indent="0" algn="l">
                         <a:lnSpc>
                           <a:spcPct val="100000"/>
                         </a:lnSpc>
@@ -19308,7 +19940,7 @@
                     <a:bodyPr/>
                     <a:lstStyle/>
                     <a:p>
-                      <a:pPr algn="ctr" indent="0" marL="0">
+                      <a:pPr marL="0" indent="0" algn="ctr">
                         <a:lnSpc>
                           <a:spcPct val="100000"/>
                         </a:lnSpc>
@@ -19372,7 +20004,7 @@
                     <a:bodyPr/>
                     <a:lstStyle/>
                     <a:p>
-                      <a:pPr algn="ctr" indent="0" marL="0">
+                      <a:pPr marL="0" indent="0" algn="ctr">
                         <a:lnSpc>
                           <a:spcPct val="100000"/>
                         </a:lnSpc>
@@ -19436,7 +20068,7 @@
                     <a:bodyPr/>
                     <a:lstStyle/>
                     <a:p>
-                      <a:pPr algn="ctr" indent="0" marL="0">
+                      <a:pPr marL="0" indent="0" algn="ctr">
                         <a:lnSpc>
                           <a:spcPct val="100000"/>
                         </a:lnSpc>
@@ -19500,7 +20132,7 @@
                     <a:bodyPr/>
                     <a:lstStyle/>
                     <a:p>
-                      <a:pPr algn="ctr" indent="0" marL="0">
+                      <a:pPr marL="0" indent="0" algn="ctr">
                         <a:lnSpc>
                           <a:spcPct val="100000"/>
                         </a:lnSpc>
@@ -19564,7 +20196,7 @@
                     <a:bodyPr/>
                     <a:lstStyle/>
                     <a:p>
-                      <a:pPr algn="ctr" indent="0" marL="0">
+                      <a:pPr marL="0" indent="0" algn="ctr">
                         <a:lnSpc>
                           <a:spcPct val="100000"/>
                         </a:lnSpc>
@@ -19628,7 +20260,7 @@
                     <a:bodyPr/>
                     <a:lstStyle/>
                     <a:p>
-                      <a:pPr algn="ctr" indent="0" marL="0">
+                      <a:pPr marL="0" indent="0" algn="ctr">
                         <a:lnSpc>
                           <a:spcPct val="100000"/>
                         </a:lnSpc>
@@ -19687,6 +20319,11 @@
                     </a:lnB>
                   </a:tcPr>
                 </a:tc>
+                <a:extLst>
+                  <a:ext uri="{0D108BD9-81ED-4DB2-BD59-A6C34878D82A}">
+                    <a16:rowId xmlns:a16="http://schemas.microsoft.com/office/drawing/2014/main" val="10005"/>
+                  </a:ext>
+                </a:extLst>
               </a:tr>
               <a:tr h="347472">
                 <a:tc>
@@ -19694,7 +20331,7 @@
                     <a:bodyPr/>
                     <a:lstStyle/>
                     <a:p>
-                      <a:pPr algn="l" indent="0" marL="0">
+                      <a:pPr marL="0" indent="0" algn="l">
                         <a:lnSpc>
                           <a:spcPct val="100000"/>
                         </a:lnSpc>
@@ -19758,7 +20395,7 @@
                     <a:bodyPr/>
                     <a:lstStyle/>
                     <a:p>
-                      <a:pPr algn="ctr" indent="0" marL="0">
+                      <a:pPr marL="0" indent="0" algn="ctr">
                         <a:lnSpc>
                           <a:spcPct val="100000"/>
                         </a:lnSpc>
@@ -19822,7 +20459,7 @@
                     <a:bodyPr/>
                     <a:lstStyle/>
                     <a:p>
-                      <a:pPr algn="ctr" indent="0" marL="0">
+                      <a:pPr marL="0" indent="0" algn="ctr">
                         <a:lnSpc>
                           <a:spcPct val="100000"/>
                         </a:lnSpc>
@@ -19886,7 +20523,7 @@
                     <a:bodyPr/>
                     <a:lstStyle/>
                     <a:p>
-                      <a:pPr algn="ctr" indent="0" marL="0">
+                      <a:pPr marL="0" indent="0" algn="ctr">
                         <a:lnSpc>
                           <a:spcPct val="100000"/>
                         </a:lnSpc>
@@ -19950,7 +20587,7 @@
                     <a:bodyPr/>
                     <a:lstStyle/>
                     <a:p>
-                      <a:pPr algn="ctr" indent="0" marL="0">
+                      <a:pPr marL="0" indent="0" algn="ctr">
                         <a:lnSpc>
                           <a:spcPct val="100000"/>
                         </a:lnSpc>
@@ -20014,7 +20651,7 @@
                     <a:bodyPr/>
                     <a:lstStyle/>
                     <a:p>
-                      <a:pPr algn="ctr" indent="0" marL="0">
+                      <a:pPr marL="0" indent="0" algn="ctr">
                         <a:lnSpc>
                           <a:spcPct val="100000"/>
                         </a:lnSpc>
@@ -20078,7 +20715,7 @@
                     <a:bodyPr/>
                     <a:lstStyle/>
                     <a:p>
-                      <a:pPr algn="ctr" indent="0" marL="0">
+                      <a:pPr marL="0" indent="0" algn="ctr">
                         <a:lnSpc>
                           <a:spcPct val="100000"/>
                         </a:lnSpc>
@@ -20137,6 +20774,11 @@
                     </a:lnB>
                   </a:tcPr>
                 </a:tc>
+                <a:extLst>
+                  <a:ext uri="{0D108BD9-81ED-4DB2-BD59-A6C34878D82A}">
+                    <a16:rowId xmlns:a16="http://schemas.microsoft.com/office/drawing/2014/main" val="10006"/>
+                  </a:ext>
+                </a:extLst>
               </a:tr>
               <a:tr h="365760">
                 <a:tc>
@@ -20144,7 +20786,7 @@
                     <a:bodyPr/>
                     <a:lstStyle/>
                     <a:p>
-                      <a:pPr algn="l" indent="0" marL="0">
+                      <a:pPr marL="0" indent="0" algn="l">
                         <a:lnSpc>
                           <a:spcPct val="100000"/>
                         </a:lnSpc>
@@ -20211,7 +20853,7 @@
                     <a:bodyPr/>
                     <a:lstStyle/>
                     <a:p>
-                      <a:pPr algn="ctr" indent="0" marL="0">
+                      <a:pPr marL="0" indent="0" algn="ctr">
                         <a:lnSpc>
                           <a:spcPct val="100000"/>
                         </a:lnSpc>
@@ -20278,7 +20920,7 @@
                     <a:bodyPr/>
                     <a:lstStyle/>
                     <a:p>
-                      <a:pPr algn="ctr" indent="0" marL="0">
+                      <a:pPr marL="0" indent="0" algn="ctr">
                         <a:lnSpc>
                           <a:spcPct val="100000"/>
                         </a:lnSpc>
@@ -20345,7 +20987,7 @@
                     <a:bodyPr/>
                     <a:lstStyle/>
                     <a:p>
-                      <a:pPr algn="ctr" indent="0" marL="0">
+                      <a:pPr marL="0" indent="0" algn="ctr">
                         <a:lnSpc>
                           <a:spcPct val="100000"/>
                         </a:lnSpc>
@@ -20412,7 +21054,7 @@
                     <a:bodyPr/>
                     <a:lstStyle/>
                     <a:p>
-                      <a:pPr algn="ctr" indent="0" marL="0">
+                      <a:pPr marL="0" indent="0" algn="ctr">
                         <a:lnSpc>
                           <a:spcPct val="100000"/>
                         </a:lnSpc>
@@ -20479,7 +21121,7 @@
                     <a:bodyPr/>
                     <a:lstStyle/>
                     <a:p>
-                      <a:pPr algn="ctr" indent="0" marL="0">
+                      <a:pPr marL="0" indent="0" algn="ctr">
                         <a:lnSpc>
                           <a:spcPct val="100000"/>
                         </a:lnSpc>
@@ -20546,7 +21188,7 @@
                     <a:bodyPr/>
                     <a:lstStyle/>
                     <a:p>
-                      <a:pPr algn="ctr" indent="0" marL="0">
+                      <a:pPr marL="0" indent="0" algn="ctr">
                         <a:lnSpc>
                           <a:spcPct val="100000"/>
                         </a:lnSpc>
@@ -20608,6 +21250,11 @@
                     </a:solidFill>
                   </a:tcPr>
                 </a:tc>
+                <a:extLst>
+                  <a:ext uri="{0D108BD9-81ED-4DB2-BD59-A6C34878D82A}">
+                    <a16:rowId xmlns:a16="http://schemas.microsoft.com/office/drawing/2014/main" val="10007"/>
+                  </a:ext>
+                </a:extLst>
               </a:tr>
             </a:tbl>
           </a:graphicData>
@@ -20634,7 +21281,7 @@
           <a:bodyPr wrap="square" lIns="0" tIns="0" rIns="0" bIns="0" rtlCol="0" anchor="t"/>
           <a:lstStyle/>
           <a:p>
-            <a:pPr algn="l" indent="0" marL="0">
+            <a:pPr marL="0" indent="0" algn="l">
               <a:lnSpc>
                 <a:spcPct val="100000"/>
               </a:lnSpc>
@@ -20676,6 +21323,13 @@
           </a:solidFill>
           <a:ln/>
         </p:spPr>
+        <p:txBody>
+          <a:bodyPr/>
+          <a:lstStyle/>
+          <a:p>
+            <a:endParaRPr lang="es-PE"/>
+          </a:p>
+        </p:txBody>
       </p:sp>
       <p:sp>
         <p:nvSpPr>
@@ -20698,7 +21352,7 @@
           <a:bodyPr wrap="square" lIns="0" tIns="0" rIns="0" bIns="0" rtlCol="0" anchor="ctr"/>
           <a:lstStyle/>
           <a:p>
-            <a:pPr algn="l" indent="0" marL="0">
+            <a:pPr marL="0" indent="0" algn="l">
               <a:lnSpc>
                 <a:spcPct val="100000"/>
               </a:lnSpc>
@@ -20721,7 +21375,7 @@
       </p:sp>
       <p:sp>
         <p:nvSpPr>
-          <p:cNvPr id="9" name="Text 5"/>
+          <p:cNvPr id="4" name="Text 5"/>
           <p:cNvSpPr txBox="1"/>
           <p:nvPr/>
         </p:nvSpPr>
@@ -20740,7 +21394,7 @@
           <a:bodyPr wrap="square" lIns="0" tIns="0" rIns="0" bIns="0" rtlCol="0" anchor="t"/>
           <a:lstStyle/>
           <a:p>
-            <a:pPr algn="l" indent="0" marL="0">
+            <a:pPr marL="0" indent="0" algn="l">
               <a:lnSpc>
                 <a:spcPct val="100000"/>
               </a:lnSpc>
@@ -20782,6 +21436,13 @@
           </a:solidFill>
           <a:ln/>
         </p:spPr>
+        <p:txBody>
+          <a:bodyPr/>
+          <a:lstStyle/>
+          <a:p>
+            <a:endParaRPr lang="es-PE"/>
+          </a:p>
+        </p:txBody>
       </p:sp>
       <p:sp>
         <p:nvSpPr>
@@ -20804,7 +21465,7 @@
           <a:bodyPr wrap="square" lIns="0" tIns="0" rIns="0" bIns="0" rtlCol="0" anchor="ctr"/>
           <a:lstStyle/>
           <a:p>
-            <a:pPr algn="l" indent="0" marL="0">
+            <a:pPr marL="0" indent="0" algn="l">
               <a:lnSpc>
                 <a:spcPct val="100000"/>
               </a:lnSpc>
@@ -20846,7 +21507,7 @@
           <a:bodyPr wrap="square" lIns="0" tIns="0" rIns="0" bIns="0" rtlCol="0" anchor="t"/>
           <a:lstStyle/>
           <a:p>
-            <a:pPr algn="l" indent="0" marL="0">
+            <a:pPr marL="0" indent="0" algn="l">
               <a:lnSpc>
                 <a:spcPct val="100000"/>
               </a:lnSpc>
@@ -20887,7 +21548,7 @@
           </a:prstGeom>
           <a:extLst>
             <a:ext uri="{C572A759-6A51-4108-AA02-DFA0A04FC94B}">
-              <ma14:wrappingTextBoxFlag xmlns:ma14="http://schemas.microsoft.com/office/mac/drawingml/2011/main" val="0"/>
+              <ma14:wrappingTextBoxFlag xmlns:ma14="http://schemas.microsoft.com/office/mac/drawingml/2011/main" xmlns="" val="0"/>
             </a:ext>
           </a:extLst>
         </p:spPr>
@@ -20908,7 +21569,7 @@
           <a:p>
             <a:pPr algn="r"/>
             <a:fld id="{F7021451-1387-4CA6-816F-3879F97B5CBC}" type="slidenum">
-              <a:rPr b="0" lang="en-US"/>
+              <a:rPr lang="en-US" b="0"/>
               <a:t>8</a:t>
             </a:fld>
             <a:endParaRPr lang="en-US"/>
@@ -20943,9 +21604,11 @@
       <p:sp>
         <p:nvSpPr>
           <p:cNvPr id="2" name="Text 0"/>
-          <p:cNvSpPr/>
+          <p:cNvSpPr>
+            <a:spLocks noGrp="1"/>
+          </p:cNvSpPr>
           <p:nvPr>
-            <p:ph idx="100" type="title" hasCustomPrompt="1"/>
+            <p:ph type="title" idx="100" hasCustomPrompt="1"/>
           </p:nvPr>
         </p:nvSpPr>
         <p:spPr>
@@ -20963,7 +21626,7 @@
           <a:bodyPr wrap="square" lIns="0" tIns="0" rIns="0" bIns="0" rtlCol="0" anchor="t"/>
           <a:lstStyle/>
           <a:p>
-            <a:pPr algn="l" indent="0" marL="0">
+            <a:pPr marL="0" indent="0" algn="l">
               <a:buNone/>
             </a:pPr>
             <a:r>
@@ -21002,14 +21665,14 @@
           <a:bodyPr wrap="square" lIns="0" tIns="0" rIns="0" bIns="0" rtlCol="0" anchor="t"/>
           <a:lstStyle/>
           <a:p>
-            <a:pPr algn="l" indent="0" marL="0">
+            <a:pPr marL="0" indent="0" algn="l">
               <a:lnSpc>
                 <a:spcPct val="100000"/>
               </a:lnSpc>
               <a:buNone/>
             </a:pPr>
             <a:r>
-              <a:rPr lang="en-US" sz="1200" b="1" spc="200" kern="0" dirty="0">
+              <a:rPr lang="en-US" sz="1200" b="1" kern="0" spc="200" dirty="0">
                 <a:solidFill>
                   <a:srgbClr val="315C3D"/>
                 </a:solidFill>
@@ -21049,6 +21712,13 @@
             <a:prstDash val="solid"/>
           </a:ln>
         </p:spPr>
+        <p:txBody>
+          <a:bodyPr/>
+          <a:lstStyle/>
+          <a:p>
+            <a:endParaRPr lang="es-PE"/>
+          </a:p>
+        </p:txBody>
       </p:sp>
       <p:sp>
         <p:nvSpPr>
@@ -21069,6 +21739,13 @@
           </a:solidFill>
           <a:ln/>
         </p:spPr>
+        <p:txBody>
+          <a:bodyPr/>
+          <a:lstStyle/>
+          <a:p>
+            <a:endParaRPr lang="es-PE"/>
+          </a:p>
+        </p:txBody>
       </p:sp>
       <p:sp>
         <p:nvSpPr>
@@ -21091,7 +21768,7 @@
           <a:bodyPr wrap="square" lIns="0" tIns="0" rIns="0" bIns="0" rtlCol="0" anchor="ctr"/>
           <a:lstStyle/>
           <a:p>
-            <a:pPr algn="ctr" indent="0" marL="0">
+            <a:pPr marL="0" indent="0" algn="ctr">
               <a:lnSpc>
                 <a:spcPct val="100000"/>
               </a:lnSpc>
@@ -21133,7 +21810,7 @@
           <a:bodyPr wrap="square" lIns="0" tIns="0" rIns="0" bIns="0" rtlCol="0" anchor="ctr"/>
           <a:lstStyle/>
           <a:p>
-            <a:pPr algn="l" indent="0" marL="0">
+            <a:pPr marL="0" indent="0" algn="l">
               <a:lnSpc>
                 <a:spcPct val="100000"/>
               </a:lnSpc>
@@ -21175,7 +21852,7 @@
           <a:bodyPr wrap="square" lIns="0" tIns="0" rIns="0" bIns="0" rtlCol="0" anchor="t"/>
           <a:lstStyle/>
           <a:p>
-            <a:pPr algn="l" indent="0" marL="0">
+            <a:pPr marL="0" indent="0" algn="l">
               <a:lnSpc>
                 <a:spcPct val="100000"/>
               </a:lnSpc>
@@ -21217,7 +21894,7 @@
           <a:bodyPr wrap="square" lIns="0" tIns="0" rIns="0" bIns="0" rtlCol="0" anchor="t"/>
           <a:lstStyle/>
           <a:p>
-            <a:pPr algn="l" indent="0" marL="0">
+            <a:pPr marL="0" indent="0" algn="l">
               <a:lnSpc>
                 <a:spcPct val="100000"/>
               </a:lnSpc>
@@ -21264,6 +21941,13 @@
             <a:prstDash val="solid"/>
           </a:ln>
         </p:spPr>
+        <p:txBody>
+          <a:bodyPr/>
+          <a:lstStyle/>
+          <a:p>
+            <a:endParaRPr lang="es-PE"/>
+          </a:p>
+        </p:txBody>
       </p:sp>
       <p:sp>
         <p:nvSpPr>
@@ -21284,6 +21968,13 @@
           </a:solidFill>
           <a:ln/>
         </p:spPr>
+        <p:txBody>
+          <a:bodyPr/>
+          <a:lstStyle/>
+          <a:p>
+            <a:endParaRPr lang="es-PE"/>
+          </a:p>
+        </p:txBody>
       </p:sp>
       <p:sp>
         <p:nvSpPr>
@@ -21306,7 +21997,7 @@
           <a:bodyPr wrap="square" lIns="0" tIns="0" rIns="0" bIns="0" rtlCol="0" anchor="ctr"/>
           <a:lstStyle/>
           <a:p>
-            <a:pPr algn="ctr" indent="0" marL="0">
+            <a:pPr marL="0" indent="0" algn="ctr">
               <a:lnSpc>
                 <a:spcPct val="100000"/>
               </a:lnSpc>
@@ -21348,7 +22039,7 @@
           <a:bodyPr wrap="square" lIns="0" tIns="0" rIns="0" bIns="0" rtlCol="0" anchor="ctr"/>
           <a:lstStyle/>
           <a:p>
-            <a:pPr algn="l" indent="0" marL="0">
+            <a:pPr marL="0" indent="0" algn="l">
               <a:lnSpc>
                 <a:spcPct val="100000"/>
               </a:lnSpc>
@@ -21390,7 +22081,7 @@
           <a:bodyPr wrap="square" lIns="0" tIns="0" rIns="0" bIns="0" rtlCol="0" anchor="t"/>
           <a:lstStyle/>
           <a:p>
-            <a:pPr algn="l" indent="0" marL="0">
+            <a:pPr marL="0" indent="0" algn="l">
               <a:lnSpc>
                 <a:spcPct val="100000"/>
               </a:lnSpc>
@@ -21432,7 +22123,7 @@
           <a:bodyPr wrap="square" lIns="0" tIns="0" rIns="0" bIns="0" rtlCol="0" anchor="t"/>
           <a:lstStyle/>
           <a:p>
-            <a:pPr algn="l" indent="0" marL="0">
+            <a:pPr marL="0" indent="0" algn="l">
               <a:lnSpc>
                 <a:spcPct val="100000"/>
               </a:lnSpc>
@@ -21479,6 +22170,13 @@
             <a:prstDash val="solid"/>
           </a:ln>
         </p:spPr>
+        <p:txBody>
+          <a:bodyPr/>
+          <a:lstStyle/>
+          <a:p>
+            <a:endParaRPr lang="es-PE"/>
+          </a:p>
+        </p:txBody>
       </p:sp>
       <p:sp>
         <p:nvSpPr>
@@ -21499,6 +22197,13 @@
           </a:solidFill>
           <a:ln/>
         </p:spPr>
+        <p:txBody>
+          <a:bodyPr/>
+          <a:lstStyle/>
+          <a:p>
+            <a:endParaRPr lang="es-PE"/>
+          </a:p>
+        </p:txBody>
       </p:sp>
       <p:sp>
         <p:nvSpPr>
@@ -21521,7 +22226,7 @@
           <a:bodyPr wrap="square" lIns="0" tIns="0" rIns="0" bIns="0" rtlCol="0" anchor="ctr"/>
           <a:lstStyle/>
           <a:p>
-            <a:pPr algn="ctr" indent="0" marL="0">
+            <a:pPr marL="0" indent="0" algn="ctr">
               <a:lnSpc>
                 <a:spcPct val="100000"/>
               </a:lnSpc>
@@ -21563,7 +22268,7 @@
           <a:bodyPr wrap="square" lIns="0" tIns="0" rIns="0" bIns="0" rtlCol="0" anchor="ctr"/>
           <a:lstStyle/>
           <a:p>
-            <a:pPr algn="l" indent="0" marL="0">
+            <a:pPr marL="0" indent="0" algn="l">
               <a:lnSpc>
                 <a:spcPct val="100000"/>
               </a:lnSpc>
@@ -21605,7 +22310,7 @@
           <a:bodyPr wrap="square" lIns="0" tIns="0" rIns="0" bIns="0" rtlCol="0" anchor="t"/>
           <a:lstStyle/>
           <a:p>
-            <a:pPr algn="l" indent="0" marL="0">
+            <a:pPr marL="0" indent="0" algn="l">
               <a:lnSpc>
                 <a:spcPct val="100000"/>
               </a:lnSpc>
@@ -21647,7 +22352,7 @@
           <a:bodyPr wrap="square" lIns="0" tIns="0" rIns="0" bIns="0" rtlCol="0" anchor="t"/>
           <a:lstStyle/>
           <a:p>
-            <a:pPr algn="l" indent="0" marL="0">
+            <a:pPr marL="0" indent="0" algn="l">
               <a:lnSpc>
                 <a:spcPct val="100000"/>
               </a:lnSpc>
@@ -21694,6 +22399,13 @@
             <a:prstDash val="solid"/>
           </a:ln>
         </p:spPr>
+        <p:txBody>
+          <a:bodyPr/>
+          <a:lstStyle/>
+          <a:p>
+            <a:endParaRPr lang="es-PE"/>
+          </a:p>
+        </p:txBody>
       </p:sp>
       <p:sp>
         <p:nvSpPr>
@@ -21714,6 +22426,13 @@
           </a:solidFill>
           <a:ln/>
         </p:spPr>
+        <p:txBody>
+          <a:bodyPr/>
+          <a:lstStyle/>
+          <a:p>
+            <a:endParaRPr lang="es-PE"/>
+          </a:p>
+        </p:txBody>
       </p:sp>
       <p:sp>
         <p:nvSpPr>
@@ -21736,7 +22455,7 @@
           <a:bodyPr wrap="square" lIns="0" tIns="0" rIns="0" bIns="0" rtlCol="0" anchor="ctr"/>
           <a:lstStyle/>
           <a:p>
-            <a:pPr algn="ctr" indent="0" marL="0">
+            <a:pPr marL="0" indent="0" algn="ctr">
               <a:lnSpc>
                 <a:spcPct val="100000"/>
               </a:lnSpc>
@@ -21778,7 +22497,7 @@
           <a:bodyPr wrap="square" lIns="0" tIns="0" rIns="0" bIns="0" rtlCol="0" anchor="ctr"/>
           <a:lstStyle/>
           <a:p>
-            <a:pPr algn="l" indent="0" marL="0">
+            <a:pPr marL="0" indent="0" algn="l">
               <a:lnSpc>
                 <a:spcPct val="100000"/>
               </a:lnSpc>
@@ -21820,7 +22539,7 @@
           <a:bodyPr wrap="square" lIns="0" tIns="0" rIns="0" bIns="0" rtlCol="0" anchor="t"/>
           <a:lstStyle/>
           <a:p>
-            <a:pPr algn="l" indent="0" marL="0">
+            <a:pPr marL="0" indent="0" algn="l">
               <a:lnSpc>
                 <a:spcPct val="100000"/>
               </a:lnSpc>
@@ -21862,7 +22581,7 @@
           <a:bodyPr wrap="square" lIns="0" tIns="0" rIns="0" bIns="0" rtlCol="0" anchor="t"/>
           <a:lstStyle/>
           <a:p>
-            <a:pPr algn="l" indent="0" marL="0">
+            <a:pPr marL="0" indent="0" algn="l">
               <a:lnSpc>
                 <a:spcPct val="100000"/>
               </a:lnSpc>
@@ -21909,6 +22628,13 @@
             <a:prstDash val="solid"/>
           </a:ln>
         </p:spPr>
+        <p:txBody>
+          <a:bodyPr/>
+          <a:lstStyle/>
+          <a:p>
+            <a:endParaRPr lang="es-PE"/>
+          </a:p>
+        </p:txBody>
       </p:sp>
       <p:sp>
         <p:nvSpPr>
@@ -21929,6 +22655,13 @@
           </a:solidFill>
           <a:ln/>
         </p:spPr>
+        <p:txBody>
+          <a:bodyPr/>
+          <a:lstStyle/>
+          <a:p>
+            <a:endParaRPr lang="es-PE"/>
+          </a:p>
+        </p:txBody>
       </p:sp>
       <p:sp>
         <p:nvSpPr>
@@ -21951,7 +22684,7 @@
           <a:bodyPr wrap="square" lIns="0" tIns="0" rIns="0" bIns="0" rtlCol="0" anchor="ctr"/>
           <a:lstStyle/>
           <a:p>
-            <a:pPr algn="ctr" indent="0" marL="0">
+            <a:pPr marL="0" indent="0" algn="ctr">
               <a:lnSpc>
                 <a:spcPct val="100000"/>
               </a:lnSpc>
@@ -21993,7 +22726,7 @@
           <a:bodyPr wrap="square" lIns="0" tIns="0" rIns="0" bIns="0" rtlCol="0" anchor="ctr"/>
           <a:lstStyle/>
           <a:p>
-            <a:pPr algn="l" indent="0" marL="0">
+            <a:pPr marL="0" indent="0" algn="l">
               <a:lnSpc>
                 <a:spcPct val="100000"/>
               </a:lnSpc>
@@ -22035,7 +22768,7 @@
           <a:bodyPr wrap="square" lIns="0" tIns="0" rIns="0" bIns="0" rtlCol="0" anchor="t"/>
           <a:lstStyle/>
           <a:p>
-            <a:pPr algn="l" indent="0" marL="0">
+            <a:pPr marL="0" indent="0" algn="l">
               <a:lnSpc>
                 <a:spcPct val="100000"/>
               </a:lnSpc>
@@ -22077,7 +22810,7 @@
           <a:bodyPr wrap="square" lIns="0" tIns="0" rIns="0" bIns="0" rtlCol="0" anchor="t"/>
           <a:lstStyle/>
           <a:p>
-            <a:pPr algn="l" indent="0" marL="0">
+            <a:pPr marL="0" indent="0" algn="l">
               <a:lnSpc>
                 <a:spcPct val="100000"/>
               </a:lnSpc>
@@ -22124,6 +22857,13 @@
             <a:prstDash val="solid"/>
           </a:ln>
         </p:spPr>
+        <p:txBody>
+          <a:bodyPr/>
+          <a:lstStyle/>
+          <a:p>
+            <a:endParaRPr lang="es-PE"/>
+          </a:p>
+        </p:txBody>
       </p:sp>
       <p:sp>
         <p:nvSpPr>
@@ -22144,6 +22884,13 @@
           </a:solidFill>
           <a:ln/>
         </p:spPr>
+        <p:txBody>
+          <a:bodyPr/>
+          <a:lstStyle/>
+          <a:p>
+            <a:endParaRPr lang="es-PE"/>
+          </a:p>
+        </p:txBody>
       </p:sp>
       <p:sp>
         <p:nvSpPr>
@@ -22166,7 +22913,7 @@
           <a:bodyPr wrap="square" lIns="0" tIns="0" rIns="0" bIns="0" rtlCol="0" anchor="ctr"/>
           <a:lstStyle/>
           <a:p>
-            <a:pPr algn="ctr" indent="0" marL="0">
+            <a:pPr marL="0" indent="0" algn="ctr">
               <a:lnSpc>
                 <a:spcPct val="100000"/>
               </a:lnSpc>
@@ -22208,7 +22955,7 @@
           <a:bodyPr wrap="square" lIns="0" tIns="0" rIns="0" bIns="0" rtlCol="0" anchor="ctr"/>
           <a:lstStyle/>
           <a:p>
-            <a:pPr algn="l" indent="0" marL="0">
+            <a:pPr marL="0" indent="0" algn="l">
               <a:lnSpc>
                 <a:spcPct val="100000"/>
               </a:lnSpc>
@@ -22250,7 +22997,7 @@
           <a:bodyPr wrap="square" lIns="0" tIns="0" rIns="0" bIns="0" rtlCol="0" anchor="t"/>
           <a:lstStyle/>
           <a:p>
-            <a:pPr algn="l" indent="0" marL="0">
+            <a:pPr marL="0" indent="0" algn="l">
               <a:lnSpc>
                 <a:spcPct val="100000"/>
               </a:lnSpc>
@@ -22292,7 +23039,7 @@
           <a:bodyPr wrap="square" lIns="0" tIns="0" rIns="0" bIns="0" rtlCol="0" anchor="t"/>
           <a:lstStyle/>
           <a:p>
-            <a:pPr algn="l" indent="0" marL="0">
+            <a:pPr marL="0" indent="0" algn="l">
               <a:lnSpc>
                 <a:spcPct val="100000"/>
               </a:lnSpc>
@@ -22315,7 +23062,7 @@
       </p:sp>
       <p:sp>
         <p:nvSpPr>
-          <p:cNvPr id="25" name="Slide Number Placeholder 0"/>
+          <p:cNvPr id="40" name="Slide Number Placeholder 0"/>
           <p:cNvSpPr>
             <a:spLocks noGrp="1"/>
           </p:cNvSpPr>
@@ -22333,7 +23080,7 @@
           </a:prstGeom>
           <a:extLst>
             <a:ext uri="{C572A759-6A51-4108-AA02-DFA0A04FC94B}">
-              <ma14:wrappingTextBoxFlag xmlns:ma14="http://schemas.microsoft.com/office/mac/drawingml/2011/main" val="0"/>
+              <ma14:wrappingTextBoxFlag xmlns:ma14="http://schemas.microsoft.com/office/mac/drawingml/2011/main" xmlns="" val="0"/>
             </a:ext>
           </a:extLst>
         </p:spPr>
@@ -22354,7 +23101,7 @@
           <a:p>
             <a:pPr algn="r"/>
             <a:fld id="{F7021451-1387-4CA6-816F-3879F97B5CBC}" type="slidenum">
-              <a:rPr b="0" lang="en-US"/>
+              <a:rPr lang="en-US" b="0"/>
               <a:t>9</a:t>
             </a:fld>
             <a:endParaRPr lang="en-US"/>
@@ -22662,4 +23409,319 @@
     </a:ext>
   </a:extLst>
 </a:theme>
+</file>
+
+<file path=ppt/theme/theme2.xml><?xml version="1.0" encoding="utf-8"?>
+<a:theme xmlns:a="http://schemas.openxmlformats.org/drawingml/2006/main" name="Tema de Office">
+  <a:themeElements>
+    <a:clrScheme name="Office">
+      <a:dk1>
+        <a:sysClr val="windowText" lastClr="000000"/>
+      </a:dk1>
+      <a:lt1>
+        <a:sysClr val="window" lastClr="FFFFFF"/>
+      </a:lt1>
+      <a:dk2>
+        <a:srgbClr val="0E2841"/>
+      </a:dk2>
+      <a:lt2>
+        <a:srgbClr val="E8E8E8"/>
+      </a:lt2>
+      <a:accent1>
+        <a:srgbClr val="156082"/>
+      </a:accent1>
+      <a:accent2>
+        <a:srgbClr val="E97132"/>
+      </a:accent2>
+      <a:accent3>
+        <a:srgbClr val="196B24"/>
+      </a:accent3>
+      <a:accent4>
+        <a:srgbClr val="0F9ED5"/>
+      </a:accent4>
+      <a:accent5>
+        <a:srgbClr val="A02B93"/>
+      </a:accent5>
+      <a:accent6>
+        <a:srgbClr val="4EA72E"/>
+      </a:accent6>
+      <a:hlink>
+        <a:srgbClr val="467886"/>
+      </a:hlink>
+      <a:folHlink>
+        <a:srgbClr val="96607D"/>
+      </a:folHlink>
+    </a:clrScheme>
+    <a:fontScheme name="Office">
+      <a:majorFont>
+        <a:latin typeface="Aptos Display" panose="02110004020202020204"/>
+        <a:ea typeface=""/>
+        <a:cs typeface=""/>
+        <a:font script="Jpan" typeface="游ゴシック Light"/>
+        <a:font script="Hang" typeface="맑은 고딕"/>
+        <a:font script="Hans" typeface="等线 Light"/>
+        <a:font script="Hant" typeface="新細明體"/>
+        <a:font script="Arab" typeface="Times New Roman"/>
+        <a:font script="Hebr" typeface="Times New Roman"/>
+        <a:font script="Thai" typeface="Angsana New"/>
+        <a:font script="Ethi" typeface="Nyala"/>
+        <a:font script="Beng" typeface="Vrinda"/>
+        <a:font script="Gujr" typeface="Shruti"/>
+        <a:font script="Khmr" typeface="MoolBoran"/>
+        <a:font script="Knda" typeface="Tunga"/>
+        <a:font script="Guru" typeface="Raavi"/>
+        <a:font script="Cans" typeface="Euphemia"/>
+        <a:font script="Cher" typeface="Plantagenet Cherokee"/>
+        <a:font script="Yiii" typeface="Microsoft Yi Baiti"/>
+        <a:font script="Tibt" typeface="Microsoft Himalaya"/>
+        <a:font script="Thaa" typeface="MV Boli"/>
+        <a:font script="Deva" typeface="Mangal"/>
+        <a:font script="Telu" typeface="Gautami"/>
+        <a:font script="Taml" typeface="Latha"/>
+        <a:font script="Syrc" typeface="Estrangelo Edessa"/>
+        <a:font script="Orya" typeface="Kalinga"/>
+        <a:font script="Mlym" typeface="Kartika"/>
+        <a:font script="Laoo" typeface="DokChampa"/>
+        <a:font script="Sinh" typeface="Iskoola Pota"/>
+        <a:font script="Mong" typeface="Mongolian Baiti"/>
+        <a:font script="Viet" typeface="Times New Roman"/>
+        <a:font script="Uigh" typeface="Microsoft Uighur"/>
+        <a:font script="Geor" typeface="Sylfaen"/>
+        <a:font script="Armn" typeface="Arial"/>
+        <a:font script="Bugi" typeface="Leelawadee UI"/>
+        <a:font script="Bopo" typeface="Microsoft JhengHei"/>
+        <a:font script="Java" typeface="Javanese Text"/>
+        <a:font script="Lisu" typeface="Segoe UI"/>
+        <a:font script="Mymr" typeface="Myanmar Text"/>
+        <a:font script="Nkoo" typeface="Ebrima"/>
+        <a:font script="Olck" typeface="Nirmala UI"/>
+        <a:font script="Osma" typeface="Ebrima"/>
+        <a:font script="Phag" typeface="Phagspa"/>
+        <a:font script="Syrn" typeface="Estrangelo Edessa"/>
+        <a:font script="Syrj" typeface="Estrangelo Edessa"/>
+        <a:font script="Syre" typeface="Estrangelo Edessa"/>
+        <a:font script="Sora" typeface="Nirmala UI"/>
+        <a:font script="Tale" typeface="Microsoft Tai Le"/>
+        <a:font script="Talu" typeface="Microsoft New Tai Lue"/>
+        <a:font script="Tfng" typeface="Ebrima"/>
+      </a:majorFont>
+      <a:minorFont>
+        <a:latin typeface="Aptos" panose="02110004020202020204"/>
+        <a:ea typeface=""/>
+        <a:cs typeface=""/>
+        <a:font script="Jpan" typeface="游ゴシック"/>
+        <a:font script="Hang" typeface="맑은 고딕"/>
+        <a:font script="Hans" typeface="等线"/>
+        <a:font script="Hant" typeface="新細明體"/>
+        <a:font script="Arab" typeface="Arial"/>
+        <a:font script="Hebr" typeface="Arial"/>
+        <a:font script="Thai" typeface="Cordia New"/>
+        <a:font script="Ethi" typeface="Nyala"/>
+        <a:font script="Beng" typeface="Vrinda"/>
+        <a:font script="Gujr" typeface="Shruti"/>
+        <a:font script="Khmr" typeface="DaunPenh"/>
+        <a:font script="Knda" typeface="Tunga"/>
+        <a:font script="Guru" typeface="Raavi"/>
+        <a:font script="Cans" typeface="Euphemia"/>
+        <a:font script="Cher" typeface="Plantagenet Cherokee"/>
+        <a:font script="Yiii" typeface="Microsoft Yi Baiti"/>
+        <a:font script="Tibt" typeface="Microsoft Himalaya"/>
+        <a:font script="Thaa" typeface="MV Boli"/>
+        <a:font script="Deva" typeface="Mangal"/>
+        <a:font script="Telu" typeface="Gautami"/>
+        <a:font script="Taml" typeface="Latha"/>
+        <a:font script="Syrc" typeface="Estrangelo Edessa"/>
+        <a:font script="Orya" typeface="Kalinga"/>
+        <a:font script="Mlym" typeface="Kartika"/>
+        <a:font script="Laoo" typeface="DokChampa"/>
+        <a:font script="Sinh" typeface="Iskoola Pota"/>
+        <a:font script="Mong" typeface="Mongolian Baiti"/>
+        <a:font script="Viet" typeface="Arial"/>
+        <a:font script="Uigh" typeface="Microsoft Uighur"/>
+        <a:font script="Geor" typeface="Sylfaen"/>
+        <a:font script="Armn" typeface="Arial"/>
+        <a:font script="Bugi" typeface="Leelawadee UI"/>
+        <a:font script="Bopo" typeface="Microsoft JhengHei"/>
+        <a:font script="Java" typeface="Javanese Text"/>
+        <a:font script="Lisu" typeface="Segoe UI"/>
+        <a:font script="Mymr" typeface="Myanmar Text"/>
+        <a:font script="Nkoo" typeface="Ebrima"/>
+        <a:font script="Olck" typeface="Nirmala UI"/>
+        <a:font script="Osma" typeface="Ebrima"/>
+        <a:font script="Phag" typeface="Phagspa"/>
+        <a:font script="Syrn" typeface="Estrangelo Edessa"/>
+        <a:font script="Syrj" typeface="Estrangelo Edessa"/>
+        <a:font script="Syre" typeface="Estrangelo Edessa"/>
+        <a:font script="Sora" typeface="Nirmala UI"/>
+        <a:font script="Tale" typeface="Microsoft Tai Le"/>
+        <a:font script="Talu" typeface="Microsoft New Tai Lue"/>
+        <a:font script="Tfng" typeface="Ebrima"/>
+      </a:minorFont>
+    </a:fontScheme>
+    <a:fmtScheme name="Office">
+      <a:fillStyleLst>
+        <a:solidFill>
+          <a:schemeClr val="phClr"/>
+        </a:solidFill>
+        <a:gradFill rotWithShape="1">
+          <a:gsLst>
+            <a:gs pos="0">
+              <a:schemeClr val="phClr">
+                <a:lumMod val="110000"/>
+                <a:satMod val="105000"/>
+                <a:tint val="67000"/>
+              </a:schemeClr>
+            </a:gs>
+            <a:gs pos="50000">
+              <a:schemeClr val="phClr">
+                <a:lumMod val="105000"/>
+                <a:satMod val="103000"/>
+                <a:tint val="73000"/>
+              </a:schemeClr>
+            </a:gs>
+            <a:gs pos="100000">
+              <a:schemeClr val="phClr">
+                <a:lumMod val="105000"/>
+                <a:satMod val="109000"/>
+                <a:tint val="81000"/>
+              </a:schemeClr>
+            </a:gs>
+          </a:gsLst>
+          <a:lin ang="5400000" scaled="0"/>
+        </a:gradFill>
+        <a:gradFill rotWithShape="1">
+          <a:gsLst>
+            <a:gs pos="0">
+              <a:schemeClr val="phClr">
+                <a:satMod val="103000"/>
+                <a:lumMod val="102000"/>
+                <a:tint val="94000"/>
+              </a:schemeClr>
+            </a:gs>
+            <a:gs pos="50000">
+              <a:schemeClr val="phClr">
+                <a:satMod val="110000"/>
+                <a:lumMod val="100000"/>
+                <a:shade val="100000"/>
+              </a:schemeClr>
+            </a:gs>
+            <a:gs pos="100000">
+              <a:schemeClr val="phClr">
+                <a:lumMod val="99000"/>
+                <a:satMod val="120000"/>
+                <a:shade val="78000"/>
+              </a:schemeClr>
+            </a:gs>
+          </a:gsLst>
+          <a:lin ang="5400000" scaled="0"/>
+        </a:gradFill>
+      </a:fillStyleLst>
+      <a:lnStyleLst>
+        <a:ln w="12700" cap="flat" cmpd="sng" algn="ctr">
+          <a:solidFill>
+            <a:schemeClr val="phClr"/>
+          </a:solidFill>
+          <a:prstDash val="solid"/>
+          <a:miter lim="800000"/>
+        </a:ln>
+        <a:ln w="19050" cap="flat" cmpd="sng" algn="ctr">
+          <a:solidFill>
+            <a:schemeClr val="phClr"/>
+          </a:solidFill>
+          <a:prstDash val="solid"/>
+          <a:miter lim="800000"/>
+        </a:ln>
+        <a:ln w="25400" cap="flat" cmpd="sng" algn="ctr">
+          <a:solidFill>
+            <a:schemeClr val="phClr"/>
+          </a:solidFill>
+          <a:prstDash val="solid"/>
+          <a:miter lim="800000"/>
+        </a:ln>
+      </a:lnStyleLst>
+      <a:effectStyleLst>
+        <a:effectStyle>
+          <a:effectLst/>
+        </a:effectStyle>
+        <a:effectStyle>
+          <a:effectLst/>
+        </a:effectStyle>
+        <a:effectStyle>
+          <a:effectLst>
+            <a:outerShdw blurRad="57150" dist="19050" dir="5400000" algn="ctr" rotWithShape="0">
+              <a:srgbClr val="000000">
+                <a:alpha val="63000"/>
+              </a:srgbClr>
+            </a:outerShdw>
+          </a:effectLst>
+        </a:effectStyle>
+      </a:effectStyleLst>
+      <a:bgFillStyleLst>
+        <a:solidFill>
+          <a:schemeClr val="phClr"/>
+        </a:solidFill>
+        <a:solidFill>
+          <a:schemeClr val="phClr">
+            <a:tint val="95000"/>
+            <a:satMod val="170000"/>
+          </a:schemeClr>
+        </a:solidFill>
+        <a:gradFill rotWithShape="1">
+          <a:gsLst>
+            <a:gs pos="0">
+              <a:schemeClr val="phClr">
+                <a:tint val="93000"/>
+                <a:satMod val="150000"/>
+                <a:shade val="98000"/>
+                <a:lumMod val="102000"/>
+              </a:schemeClr>
+            </a:gs>
+            <a:gs pos="50000">
+              <a:schemeClr val="phClr">
+                <a:tint val="98000"/>
+                <a:satMod val="130000"/>
+                <a:shade val="90000"/>
+                <a:lumMod val="103000"/>
+              </a:schemeClr>
+            </a:gs>
+            <a:gs pos="100000">
+              <a:schemeClr val="phClr">
+                <a:shade val="63000"/>
+                <a:satMod val="120000"/>
+              </a:schemeClr>
+            </a:gs>
+          </a:gsLst>
+          <a:lin ang="5400000" scaled="0"/>
+        </a:gradFill>
+      </a:bgFillStyleLst>
+    </a:fmtScheme>
+  </a:themeElements>
+  <a:objectDefaults>
+    <a:lnDef>
+      <a:spPr/>
+      <a:bodyPr/>
+      <a:lstStyle/>
+      <a:style>
+        <a:lnRef idx="2">
+          <a:schemeClr val="accent1"/>
+        </a:lnRef>
+        <a:fillRef idx="0">
+          <a:schemeClr val="accent1"/>
+        </a:fillRef>
+        <a:effectRef idx="1">
+          <a:schemeClr val="accent1"/>
+        </a:effectRef>
+        <a:fontRef idx="minor">
+          <a:schemeClr val="tx1"/>
+        </a:fontRef>
+      </a:style>
+    </a:lnDef>
+  </a:objectDefaults>
+  <a:extraClrSchemeLst/>
+  <a:extLst>
+    <a:ext uri="{05A4C25C-085E-4340-85A3-A5531E510DB2}">
+      <thm15:themeFamily xmlns:thm15="http://schemas.microsoft.com/office/thememl/2012/main" name="Office Theme" id="{2E142A2C-CD16-42D6-873A-C26D2A0506FA}" vid="{1BDDFF52-6CD6-40A5-AB3C-68EB2F1E4D0A}"/>
+    </a:ext>
+  </a:extLst>
+</a:theme>
 </file>